--- a/AI_Trends_2025.pptx
+++ b/AI_Trends_2025.pptx
@@ -3119,7 +3119,7 @@
             <a:avLst/>
           </a:prstGeom>
           <a:solidFill>
-            <a:srgbClr val="1E3A8A"/>
+            <a:srgbClr val="0F172A"/>
           </a:solidFill>
           <a:ln>
             <a:noFill/>
@@ -3149,14 +3149,186 @@
       </p:sp>
       <p:sp>
         <p:nvSpPr>
-          <p:cNvPr id="3" name="TextBox 2"/>
+          <p:cNvPr id="3" name="Rectangle 2"/>
+          <p:cNvSpPr/>
+          <p:nvPr/>
+        </p:nvSpPr>
+        <p:spPr>
+          <a:xfrm>
+            <a:off x="0" y="0"/>
+            <a:ext cx="9144000" cy="73152"/>
+          </a:xfrm>
+          <a:prstGeom prst="rect">
+            <a:avLst/>
+          </a:prstGeom>
+          <a:solidFill>
+            <a:srgbClr val="6366F1"/>
+          </a:solidFill>
+          <a:ln>
+            <a:noFill/>
+          </a:ln>
+        </p:spPr>
+        <p:style>
+          <a:lnRef idx="1">
+            <a:schemeClr val="accent1"/>
+          </a:lnRef>
+          <a:fillRef idx="3">
+            <a:schemeClr val="accent1"/>
+          </a:fillRef>
+          <a:effectRef idx="2">
+            <a:schemeClr val="accent1"/>
+          </a:effectRef>
+          <a:fontRef idx="minor">
+            <a:schemeClr val="lt1"/>
+          </a:fontRef>
+        </p:style>
+        <p:txBody>
+          <a:bodyPr rtlCol="0" anchor="ctr"/>
+          <a:lstStyle/>
+          <a:p>
+            <a:pPr algn="ctr"/>
+          </a:p>
+        </p:txBody>
+      </p:sp>
+      <p:sp>
+        <p:nvSpPr>
+          <p:cNvPr id="4" name="Rectangle 3"/>
+          <p:cNvSpPr/>
+          <p:nvPr/>
+        </p:nvSpPr>
+        <p:spPr>
+          <a:xfrm>
+            <a:off x="0" y="6784848"/>
+            <a:ext cx="9144000" cy="73152"/>
+          </a:xfrm>
+          <a:prstGeom prst="rect">
+            <a:avLst/>
+          </a:prstGeom>
+          <a:solidFill>
+            <a:srgbClr val="6366F1"/>
+          </a:solidFill>
+          <a:ln>
+            <a:noFill/>
+          </a:ln>
+        </p:spPr>
+        <p:style>
+          <a:lnRef idx="1">
+            <a:schemeClr val="accent1"/>
+          </a:lnRef>
+          <a:fillRef idx="3">
+            <a:schemeClr val="accent1"/>
+          </a:fillRef>
+          <a:effectRef idx="2">
+            <a:schemeClr val="accent1"/>
+          </a:effectRef>
+          <a:fontRef idx="minor">
+            <a:schemeClr val="lt1"/>
+          </a:fontRef>
+        </p:style>
+        <p:txBody>
+          <a:bodyPr rtlCol="0" anchor="ctr"/>
+          <a:lstStyle/>
+          <a:p>
+            <a:pPr algn="ctr"/>
+          </a:p>
+        </p:txBody>
+      </p:sp>
+      <p:sp>
+        <p:nvSpPr>
+          <p:cNvPr id="5" name="Oval 4"/>
+          <p:cNvSpPr/>
+          <p:nvPr/>
+        </p:nvSpPr>
+        <p:spPr>
+          <a:xfrm>
+            <a:off x="6858000" y="-914400"/>
+            <a:ext cx="3657600" cy="3657600"/>
+          </a:xfrm>
+          <a:prstGeom prst="ellipse">
+            <a:avLst/>
+          </a:prstGeom>
+          <a:solidFill>
+            <a:srgbClr val="6366F1"/>
+          </a:solidFill>
+          <a:ln>
+            <a:noFill/>
+          </a:ln>
+        </p:spPr>
+        <p:style>
+          <a:lnRef idx="1">
+            <a:schemeClr val="accent1"/>
+          </a:lnRef>
+          <a:fillRef idx="3">
+            <a:schemeClr val="accent1"/>
+          </a:fillRef>
+          <a:effectRef idx="2">
+            <a:schemeClr val="accent1"/>
+          </a:effectRef>
+          <a:fontRef idx="minor">
+            <a:schemeClr val="lt1"/>
+          </a:fontRef>
+        </p:style>
+        <p:txBody>
+          <a:bodyPr rtlCol="0" anchor="ctr"/>
+          <a:lstStyle/>
+          <a:p>
+            <a:pPr algn="ctr"/>
+          </a:p>
+        </p:txBody>
+      </p:sp>
+      <p:sp>
+        <p:nvSpPr>
+          <p:cNvPr id="6" name="Oval 5"/>
+          <p:cNvSpPr/>
+          <p:nvPr/>
+        </p:nvSpPr>
+        <p:spPr>
+          <a:xfrm>
+            <a:off x="-1371600" y="4572000"/>
+            <a:ext cx="2743200" cy="2743200"/>
+          </a:xfrm>
+          <a:prstGeom prst="ellipse">
+            <a:avLst/>
+          </a:prstGeom>
+          <a:solidFill>
+            <a:srgbClr val="1E293B"/>
+          </a:solidFill>
+          <a:ln>
+            <a:noFill/>
+          </a:ln>
+        </p:spPr>
+        <p:style>
+          <a:lnRef idx="1">
+            <a:schemeClr val="accent1"/>
+          </a:lnRef>
+          <a:fillRef idx="3">
+            <a:schemeClr val="accent1"/>
+          </a:fillRef>
+          <a:effectRef idx="2">
+            <a:schemeClr val="accent1"/>
+          </a:effectRef>
+          <a:fontRef idx="minor">
+            <a:schemeClr val="lt1"/>
+          </a:fontRef>
+        </p:style>
+        <p:txBody>
+          <a:bodyPr rtlCol="0" anchor="ctr"/>
+          <a:lstStyle/>
+          <a:p>
+            <a:pPr algn="ctr"/>
+          </a:p>
+        </p:txBody>
+      </p:sp>
+      <p:sp>
+        <p:nvSpPr>
+          <p:cNvPr id="7" name="TextBox 6"/>
           <p:cNvSpPr txBox="1"/>
           <p:nvPr/>
         </p:nvSpPr>
         <p:spPr>
           <a:xfrm>
-            <a:off x="457200" y="2286000"/>
-            <a:ext cx="8229600" cy="1371600"/>
+            <a:off x="731520" y="2103120"/>
+            <a:ext cx="7315200" cy="1097280"/>
           </a:xfrm>
           <a:prstGeom prst="rect">
             <a:avLst/>
@@ -3169,29 +3341,29 @@
           </a:bodyPr>
           <a:lstStyle/>
           <a:p>
-            <a:pPr algn="ctr">
-              <a:defRPr sz="5400" b="1">
+            <a:pPr algn="l">
+              <a:defRPr sz="7200" b="1">
                 <a:solidFill>
                   <a:srgbClr val="FFFFFF"/>
                 </a:solidFill>
               </a:defRPr>
             </a:pPr>
             <a:r>
-              <a:t>AI 트렌드 2025</a:t>
-            </a:r>
-          </a:p>
-        </p:txBody>
-      </p:sp>
-      <p:sp>
-        <p:nvSpPr>
-          <p:cNvPr id="4" name="TextBox 3"/>
+              <a:t>AI TRENDS</a:t>
+            </a:r>
+          </a:p>
+        </p:txBody>
+      </p:sp>
+      <p:sp>
+        <p:nvSpPr>
+          <p:cNvPr id="8" name="TextBox 7"/>
           <p:cNvSpPr txBox="1"/>
           <p:nvPr/>
         </p:nvSpPr>
         <p:spPr>
           <a:xfrm>
-            <a:off x="457200" y="3840480"/>
-            <a:ext cx="8229600" cy="731520"/>
+            <a:off x="731520" y="3200400"/>
+            <a:ext cx="7315200" cy="731520"/>
           </a:xfrm>
           <a:prstGeom prst="rect">
             <a:avLst/>
@@ -3204,16 +3376,94 @@
           </a:bodyPr>
           <a:lstStyle/>
           <a:p>
-            <a:pPr algn="ctr">
-              <a:defRPr sz="2800">
-                <a:solidFill>
-                  <a:srgbClr val="C8C8C8"/>
+            <a:pPr algn="l">
+              <a:defRPr sz="5600" b="1">
+                <a:solidFill>
+                  <a:srgbClr val="6366F1"/>
                 </a:solidFill>
               </a:defRPr>
             </a:pPr>
             <a:r>
-              <a:t>인공지능이 바꾸는 미래</a:t>
-            </a:r>
+              <a:t>2025</a:t>
+            </a:r>
+          </a:p>
+        </p:txBody>
+      </p:sp>
+      <p:sp>
+        <p:nvSpPr>
+          <p:cNvPr id="9" name="TextBox 8"/>
+          <p:cNvSpPr txBox="1"/>
+          <p:nvPr/>
+        </p:nvSpPr>
+        <p:spPr>
+          <a:xfrm>
+            <a:off x="731520" y="4114800"/>
+            <a:ext cx="5486400" cy="548640"/>
+          </a:xfrm>
+          <a:prstGeom prst="rect">
+            <a:avLst/>
+          </a:prstGeom>
+          <a:noFill/>
+        </p:spPr>
+        <p:txBody>
+          <a:bodyPr wrap="none">
+            <a:spAutoFit/>
+          </a:bodyPr>
+          <a:lstStyle/>
+          <a:p>
+            <a:pPr algn="l">
+              <a:defRPr sz="2200">
+                <a:solidFill>
+                  <a:srgbClr val="94A3B8"/>
+                </a:solidFill>
+              </a:defRPr>
+            </a:pPr>
+            <a:r>
+              <a:t>인공지능이 바꾸는 비즈니스의 미래</a:t>
+            </a:r>
+          </a:p>
+        </p:txBody>
+      </p:sp>
+      <p:sp>
+        <p:nvSpPr>
+          <p:cNvPr id="10" name="Rectangle 9"/>
+          <p:cNvSpPr/>
+          <p:nvPr/>
+        </p:nvSpPr>
+        <p:spPr>
+          <a:xfrm>
+            <a:off x="731520" y="3977639"/>
+            <a:ext cx="1828800" cy="36576"/>
+          </a:xfrm>
+          <a:prstGeom prst="rect">
+            <a:avLst/>
+          </a:prstGeom>
+          <a:solidFill>
+            <a:srgbClr val="6366F1"/>
+          </a:solidFill>
+          <a:ln>
+            <a:noFill/>
+          </a:ln>
+        </p:spPr>
+        <p:style>
+          <a:lnRef idx="1">
+            <a:schemeClr val="accent1"/>
+          </a:lnRef>
+          <a:fillRef idx="3">
+            <a:schemeClr val="accent1"/>
+          </a:fillRef>
+          <a:effectRef idx="2">
+            <a:schemeClr val="accent1"/>
+          </a:effectRef>
+          <a:fontRef idx="minor">
+            <a:schemeClr val="lt1"/>
+          </a:fontRef>
+        </p:style>
+        <p:txBody>
+          <a:bodyPr rtlCol="0" anchor="ctr"/>
+          <a:lstStyle/>
+          <a:p>
+            <a:pPr algn="ctr"/>
           </a:p>
         </p:txBody>
       </p:sp>
@@ -3244,13 +3494,13 @@
         <p:spPr>
           <a:xfrm>
             <a:off x="0" y="0"/>
-            <a:ext cx="9144000" cy="1097280"/>
-          </a:xfrm>
-          <a:prstGeom prst="rect">
-            <a:avLst/>
-          </a:prstGeom>
-          <a:solidFill>
-            <a:srgbClr val="06B6D4"/>
+            <a:ext cx="9144000" cy="6858000"/>
+          </a:xfrm>
+          <a:prstGeom prst="rect">
+            <a:avLst/>
+          </a:prstGeom>
+          <a:solidFill>
+            <a:srgbClr val="0F172A"/>
           </a:solidFill>
           <a:ln>
             <a:noFill/>
@@ -3280,14 +3530,57 @@
       </p:sp>
       <p:sp>
         <p:nvSpPr>
-          <p:cNvPr id="3" name="TextBox 2"/>
+          <p:cNvPr id="3" name="Rectangle 2"/>
+          <p:cNvSpPr/>
+          <p:nvPr/>
+        </p:nvSpPr>
+        <p:spPr>
+          <a:xfrm>
+            <a:off x="0" y="0"/>
+            <a:ext cx="137160" cy="6858000"/>
+          </a:xfrm>
+          <a:prstGeom prst="rect">
+            <a:avLst/>
+          </a:prstGeom>
+          <a:solidFill>
+            <a:srgbClr val="14B8A6"/>
+          </a:solidFill>
+          <a:ln>
+            <a:noFill/>
+          </a:ln>
+        </p:spPr>
+        <p:style>
+          <a:lnRef idx="1">
+            <a:schemeClr val="accent1"/>
+          </a:lnRef>
+          <a:fillRef idx="3">
+            <a:schemeClr val="accent1"/>
+          </a:fillRef>
+          <a:effectRef idx="2">
+            <a:schemeClr val="accent1"/>
+          </a:effectRef>
+          <a:fontRef idx="minor">
+            <a:schemeClr val="lt1"/>
+          </a:fontRef>
+        </p:style>
+        <p:txBody>
+          <a:bodyPr rtlCol="0" anchor="ctr"/>
+          <a:lstStyle/>
+          <a:p>
+            <a:pPr algn="ctr"/>
+          </a:p>
+        </p:txBody>
+      </p:sp>
+      <p:sp>
+        <p:nvSpPr>
+          <p:cNvPr id="4" name="TextBox 3"/>
           <p:cNvSpPr txBox="1"/>
           <p:nvPr/>
         </p:nvSpPr>
         <p:spPr>
           <a:xfrm>
-            <a:off x="457200" y="274320"/>
-            <a:ext cx="8229600" cy="731520"/>
+            <a:off x="548640" y="320040"/>
+            <a:ext cx="7315200" cy="365760"/>
           </a:xfrm>
           <a:prstGeom prst="rect">
             <a:avLst/>
@@ -3301,28 +3594,227 @@
           <a:lstStyle/>
           <a:p>
             <a:pPr>
-              <a:defRPr sz="3600" b="1">
+              <a:defRPr sz="1200" b="1">
+                <a:solidFill>
+                  <a:srgbClr val="14B8A6"/>
+                </a:solidFill>
+              </a:defRPr>
+            </a:pPr>
+            <a:r>
+              <a:t>SECTION 04 · 엣지 AI</a:t>
+            </a:r>
+          </a:p>
+        </p:txBody>
+      </p:sp>
+      <p:sp>
+        <p:nvSpPr>
+          <p:cNvPr id="5" name="TextBox 4"/>
+          <p:cNvSpPr txBox="1"/>
+          <p:nvPr/>
+        </p:nvSpPr>
+        <p:spPr>
+          <a:xfrm>
+            <a:off x="548640" y="640080"/>
+            <a:ext cx="7315200" cy="640080"/>
+          </a:xfrm>
+          <a:prstGeom prst="rect">
+            <a:avLst/>
+          </a:prstGeom>
+          <a:noFill/>
+        </p:spPr>
+        <p:txBody>
+          <a:bodyPr wrap="none">
+            <a:spAutoFit/>
+          </a:bodyPr>
+          <a:lstStyle/>
+          <a:p>
+            <a:pPr>
+              <a:defRPr sz="3200" b="1">
                 <a:solidFill>
                   <a:srgbClr val="FFFFFF"/>
                 </a:solidFill>
               </a:defRPr>
             </a:pPr>
             <a:r>
-              <a:t>📱 엣지 AI &amp; 온디바이스 AI</a:t>
-            </a:r>
-          </a:p>
-        </p:txBody>
-      </p:sp>
-      <p:sp>
-        <p:nvSpPr>
-          <p:cNvPr id="4" name="TextBox 3"/>
+              <a:t>Edge AI &amp; On-Device AI</a:t>
+            </a:r>
+          </a:p>
+        </p:txBody>
+      </p:sp>
+      <p:sp>
+        <p:nvSpPr>
+          <p:cNvPr id="6" name="Rectangle 5"/>
+          <p:cNvSpPr/>
+          <p:nvPr/>
+        </p:nvSpPr>
+        <p:spPr>
+          <a:xfrm>
+            <a:off x="548640" y="1325880"/>
+            <a:ext cx="8046720" cy="13716"/>
+          </a:xfrm>
+          <a:prstGeom prst="rect">
+            <a:avLst/>
+          </a:prstGeom>
+          <a:solidFill>
+            <a:srgbClr val="1E293B"/>
+          </a:solidFill>
+          <a:ln>
+            <a:noFill/>
+          </a:ln>
+        </p:spPr>
+        <p:style>
+          <a:lnRef idx="1">
+            <a:schemeClr val="accent1"/>
+          </a:lnRef>
+          <a:fillRef idx="3">
+            <a:schemeClr val="accent1"/>
+          </a:fillRef>
+          <a:effectRef idx="2">
+            <a:schemeClr val="accent1"/>
+          </a:effectRef>
+          <a:fontRef idx="minor">
+            <a:schemeClr val="lt1"/>
+          </a:fontRef>
+        </p:style>
+        <p:txBody>
+          <a:bodyPr rtlCol="0" anchor="ctr"/>
+          <a:lstStyle/>
+          <a:p>
+            <a:pPr algn="ctr"/>
+          </a:p>
+        </p:txBody>
+      </p:sp>
+      <p:sp>
+        <p:nvSpPr>
+          <p:cNvPr id="7" name="Rounded Rectangle 6"/>
+          <p:cNvSpPr/>
+          <p:nvPr/>
+        </p:nvSpPr>
+        <p:spPr>
+          <a:xfrm>
+            <a:off x="548640" y="1554480"/>
+            <a:ext cx="8046720" cy="822960"/>
+          </a:xfrm>
+          <a:prstGeom prst="roundRect">
+            <a:avLst/>
+          </a:prstGeom>
+          <a:solidFill>
+            <a:srgbClr val="1E293B"/>
+          </a:solidFill>
+          <a:ln>
+            <a:noFill/>
+          </a:ln>
+        </p:spPr>
+        <p:style>
+          <a:lnRef idx="1">
+            <a:schemeClr val="accent1"/>
+          </a:lnRef>
+          <a:fillRef idx="3">
+            <a:schemeClr val="accent1"/>
+          </a:fillRef>
+          <a:effectRef idx="2">
+            <a:schemeClr val="accent1"/>
+          </a:effectRef>
+          <a:fontRef idx="minor">
+            <a:schemeClr val="lt1"/>
+          </a:fontRef>
+        </p:style>
+        <p:txBody>
+          <a:bodyPr rtlCol="0" anchor="ctr"/>
+          <a:lstStyle/>
+          <a:p>
+            <a:pPr algn="ctr"/>
+          </a:p>
+        </p:txBody>
+      </p:sp>
+      <p:sp>
+        <p:nvSpPr>
+          <p:cNvPr id="8" name="Oval 7"/>
+          <p:cNvSpPr/>
+          <p:nvPr/>
+        </p:nvSpPr>
+        <p:spPr>
+          <a:xfrm>
+            <a:off x="777240" y="1810512"/>
+            <a:ext cx="320040" cy="320040"/>
+          </a:xfrm>
+          <a:prstGeom prst="ellipse">
+            <a:avLst/>
+          </a:prstGeom>
+          <a:solidFill>
+            <a:srgbClr val="14B8A6"/>
+          </a:solidFill>
+          <a:ln>
+            <a:noFill/>
+          </a:ln>
+        </p:spPr>
+        <p:style>
+          <a:lnRef idx="1">
+            <a:schemeClr val="accent1"/>
+          </a:lnRef>
+          <a:fillRef idx="3">
+            <a:schemeClr val="accent1"/>
+          </a:fillRef>
+          <a:effectRef idx="2">
+            <a:schemeClr val="accent1"/>
+          </a:effectRef>
+          <a:fontRef idx="minor">
+            <a:schemeClr val="lt1"/>
+          </a:fontRef>
+        </p:style>
+        <p:txBody>
+          <a:bodyPr rtlCol="0" anchor="ctr"/>
+          <a:lstStyle/>
+          <a:p>
+            <a:pPr algn="ctr"/>
+          </a:p>
+        </p:txBody>
+      </p:sp>
+      <p:sp>
+        <p:nvSpPr>
+          <p:cNvPr id="9" name="TextBox 8"/>
           <p:cNvSpPr txBox="1"/>
           <p:nvPr/>
         </p:nvSpPr>
         <p:spPr>
           <a:xfrm>
-            <a:off x="640080" y="1463040"/>
-            <a:ext cx="7863840" cy="4572000"/>
+            <a:off x="777240" y="1847088"/>
+            <a:ext cx="320040" cy="274320"/>
+          </a:xfrm>
+          <a:prstGeom prst="rect">
+            <a:avLst/>
+          </a:prstGeom>
+          <a:noFill/>
+        </p:spPr>
+        <p:txBody>
+          <a:bodyPr wrap="none">
+            <a:spAutoFit/>
+          </a:bodyPr>
+          <a:lstStyle/>
+          <a:p>
+            <a:pPr algn="ctr">
+              <a:defRPr sz="1400" b="1">
+                <a:solidFill>
+                  <a:srgbClr val="FFFFFF"/>
+                </a:solidFill>
+              </a:defRPr>
+            </a:pPr>
+            <a:r>
+              <a:t>1</a:t>
+            </a:r>
+          </a:p>
+        </p:txBody>
+      </p:sp>
+      <p:sp>
+        <p:nvSpPr>
+          <p:cNvPr id="10" name="TextBox 9"/>
+          <p:cNvSpPr txBox="1"/>
+          <p:nvPr/>
+        </p:nvSpPr>
+        <p:spPr>
+          <a:xfrm>
+            <a:off x="1280160" y="1783080"/>
+            <a:ext cx="7132320" cy="457200"/>
           </a:xfrm>
           <a:prstGeom prst="rect">
             <a:avLst/>
@@ -3336,77 +3828,638 @@
           <a:lstStyle/>
           <a:p>
             <a:pPr>
-              <a:spcAft>
-                <a:spcPts val="1600"/>
-              </a:spcAft>
-              <a:defRPr sz="2200">
-                <a:solidFill>
-                  <a:srgbClr val="323232"/>
+              <a:defRPr sz="1800">
+                <a:solidFill>
+                  <a:srgbClr val="E2E8F0"/>
                 </a:solidFill>
               </a:defRPr>
             </a:pPr>
             <a:r>
-              <a:t>• 스마트폰, IoT 기기에서 직접 AI 실행</a:t>
-            </a:r>
-          </a:p>
+              <a:t>스마트폰, IoT 디바이스에서 직접 AI 모델 실행</a:t>
+            </a:r>
+          </a:p>
+        </p:txBody>
+      </p:sp>
+      <p:sp>
+        <p:nvSpPr>
+          <p:cNvPr id="11" name="Rounded Rectangle 10"/>
+          <p:cNvSpPr/>
+          <p:nvPr/>
+        </p:nvSpPr>
+        <p:spPr>
+          <a:xfrm>
+            <a:off x="548640" y="2514600"/>
+            <a:ext cx="8046720" cy="822960"/>
+          </a:xfrm>
+          <a:prstGeom prst="roundRect">
+            <a:avLst/>
+          </a:prstGeom>
+          <a:solidFill>
+            <a:srgbClr val="1E293B"/>
+          </a:solidFill>
+          <a:ln>
+            <a:noFill/>
+          </a:ln>
+        </p:spPr>
+        <p:style>
+          <a:lnRef idx="1">
+            <a:schemeClr val="accent1"/>
+          </a:lnRef>
+          <a:fillRef idx="3">
+            <a:schemeClr val="accent1"/>
+          </a:fillRef>
+          <a:effectRef idx="2">
+            <a:schemeClr val="accent1"/>
+          </a:effectRef>
+          <a:fontRef idx="minor">
+            <a:schemeClr val="lt1"/>
+          </a:fontRef>
+        </p:style>
+        <p:txBody>
+          <a:bodyPr rtlCol="0" anchor="ctr"/>
+          <a:lstStyle/>
+          <a:p>
+            <a:pPr algn="ctr"/>
+          </a:p>
+        </p:txBody>
+      </p:sp>
+      <p:sp>
+        <p:nvSpPr>
+          <p:cNvPr id="12" name="Oval 11"/>
+          <p:cNvSpPr/>
+          <p:nvPr/>
+        </p:nvSpPr>
+        <p:spPr>
+          <a:xfrm>
+            <a:off x="777240" y="2770632"/>
+            <a:ext cx="320040" cy="320040"/>
+          </a:xfrm>
+          <a:prstGeom prst="ellipse">
+            <a:avLst/>
+          </a:prstGeom>
+          <a:solidFill>
+            <a:srgbClr val="14B8A6"/>
+          </a:solidFill>
+          <a:ln>
+            <a:noFill/>
+          </a:ln>
+        </p:spPr>
+        <p:style>
+          <a:lnRef idx="1">
+            <a:schemeClr val="accent1"/>
+          </a:lnRef>
+          <a:fillRef idx="3">
+            <a:schemeClr val="accent1"/>
+          </a:fillRef>
+          <a:effectRef idx="2">
+            <a:schemeClr val="accent1"/>
+          </a:effectRef>
+          <a:fontRef idx="minor">
+            <a:schemeClr val="lt1"/>
+          </a:fontRef>
+        </p:style>
+        <p:txBody>
+          <a:bodyPr rtlCol="0" anchor="ctr"/>
+          <a:lstStyle/>
+          <a:p>
+            <a:pPr algn="ctr"/>
+          </a:p>
+        </p:txBody>
+      </p:sp>
+      <p:sp>
+        <p:nvSpPr>
+          <p:cNvPr id="13" name="TextBox 12"/>
+          <p:cNvSpPr txBox="1"/>
+          <p:nvPr/>
+        </p:nvSpPr>
+        <p:spPr>
+          <a:xfrm>
+            <a:off x="777240" y="2807208"/>
+            <a:ext cx="320040" cy="274320"/>
+          </a:xfrm>
+          <a:prstGeom prst="rect">
+            <a:avLst/>
+          </a:prstGeom>
+          <a:noFill/>
+        </p:spPr>
+        <p:txBody>
+          <a:bodyPr wrap="none">
+            <a:spAutoFit/>
+          </a:bodyPr>
+          <a:lstStyle/>
+          <a:p>
+            <a:pPr algn="ctr">
+              <a:defRPr sz="1400" b="1">
+                <a:solidFill>
+                  <a:srgbClr val="FFFFFF"/>
+                </a:solidFill>
+              </a:defRPr>
+            </a:pPr>
+            <a:r>
+              <a:t>2</a:t>
+            </a:r>
+          </a:p>
+        </p:txBody>
+      </p:sp>
+      <p:sp>
+        <p:nvSpPr>
+          <p:cNvPr id="14" name="TextBox 13"/>
+          <p:cNvSpPr txBox="1"/>
+          <p:nvPr/>
+        </p:nvSpPr>
+        <p:spPr>
+          <a:xfrm>
+            <a:off x="1280160" y="2743200"/>
+            <a:ext cx="7132320" cy="457200"/>
+          </a:xfrm>
+          <a:prstGeom prst="rect">
+            <a:avLst/>
+          </a:prstGeom>
+          <a:noFill/>
+        </p:spPr>
+        <p:txBody>
+          <a:bodyPr wrap="square">
+            <a:spAutoFit/>
+          </a:bodyPr>
+          <a:lstStyle/>
           <a:p>
             <a:pPr>
-              <a:spcAft>
-                <a:spcPts val="1600"/>
-              </a:spcAft>
-              <a:defRPr sz="2200">
-                <a:solidFill>
-                  <a:srgbClr val="323232"/>
+              <a:defRPr sz="1800">
+                <a:solidFill>
+                  <a:srgbClr val="E2E8F0"/>
                 </a:solidFill>
               </a:defRPr>
             </a:pPr>
             <a:r>
-              <a:t>• 클라우드 의존도 감소, 프라이버시 강화</a:t>
-            </a:r>
-          </a:p>
+              <a:t>클라우드 의존도 감소로 프라이버시 및 보안 강화</a:t>
+            </a:r>
+          </a:p>
+        </p:txBody>
+      </p:sp>
+      <p:sp>
+        <p:nvSpPr>
+          <p:cNvPr id="15" name="Rounded Rectangle 14"/>
+          <p:cNvSpPr/>
+          <p:nvPr/>
+        </p:nvSpPr>
+        <p:spPr>
+          <a:xfrm>
+            <a:off x="548640" y="3474720"/>
+            <a:ext cx="8046720" cy="822960"/>
+          </a:xfrm>
+          <a:prstGeom prst="roundRect">
+            <a:avLst/>
+          </a:prstGeom>
+          <a:solidFill>
+            <a:srgbClr val="1E293B"/>
+          </a:solidFill>
+          <a:ln>
+            <a:noFill/>
+          </a:ln>
+        </p:spPr>
+        <p:style>
+          <a:lnRef idx="1">
+            <a:schemeClr val="accent1"/>
+          </a:lnRef>
+          <a:fillRef idx="3">
+            <a:schemeClr val="accent1"/>
+          </a:fillRef>
+          <a:effectRef idx="2">
+            <a:schemeClr val="accent1"/>
+          </a:effectRef>
+          <a:fontRef idx="minor">
+            <a:schemeClr val="lt1"/>
+          </a:fontRef>
+        </p:style>
+        <p:txBody>
+          <a:bodyPr rtlCol="0" anchor="ctr"/>
+          <a:lstStyle/>
+          <a:p>
+            <a:pPr algn="ctr"/>
+          </a:p>
+        </p:txBody>
+      </p:sp>
+      <p:sp>
+        <p:nvSpPr>
+          <p:cNvPr id="16" name="Oval 15"/>
+          <p:cNvSpPr/>
+          <p:nvPr/>
+        </p:nvSpPr>
+        <p:spPr>
+          <a:xfrm>
+            <a:off x="777240" y="3730752"/>
+            <a:ext cx="320040" cy="320040"/>
+          </a:xfrm>
+          <a:prstGeom prst="ellipse">
+            <a:avLst/>
+          </a:prstGeom>
+          <a:solidFill>
+            <a:srgbClr val="14B8A6"/>
+          </a:solidFill>
+          <a:ln>
+            <a:noFill/>
+          </a:ln>
+        </p:spPr>
+        <p:style>
+          <a:lnRef idx="1">
+            <a:schemeClr val="accent1"/>
+          </a:lnRef>
+          <a:fillRef idx="3">
+            <a:schemeClr val="accent1"/>
+          </a:fillRef>
+          <a:effectRef idx="2">
+            <a:schemeClr val="accent1"/>
+          </a:effectRef>
+          <a:fontRef idx="minor">
+            <a:schemeClr val="lt1"/>
+          </a:fontRef>
+        </p:style>
+        <p:txBody>
+          <a:bodyPr rtlCol="0" anchor="ctr"/>
+          <a:lstStyle/>
+          <a:p>
+            <a:pPr algn="ctr"/>
+          </a:p>
+        </p:txBody>
+      </p:sp>
+      <p:sp>
+        <p:nvSpPr>
+          <p:cNvPr id="17" name="TextBox 16"/>
+          <p:cNvSpPr txBox="1"/>
+          <p:nvPr/>
+        </p:nvSpPr>
+        <p:spPr>
+          <a:xfrm>
+            <a:off x="777240" y="3767328"/>
+            <a:ext cx="320040" cy="274320"/>
+          </a:xfrm>
+          <a:prstGeom prst="rect">
+            <a:avLst/>
+          </a:prstGeom>
+          <a:noFill/>
+        </p:spPr>
+        <p:txBody>
+          <a:bodyPr wrap="none">
+            <a:spAutoFit/>
+          </a:bodyPr>
+          <a:lstStyle/>
+          <a:p>
+            <a:pPr algn="ctr">
+              <a:defRPr sz="1400" b="1">
+                <a:solidFill>
+                  <a:srgbClr val="FFFFFF"/>
+                </a:solidFill>
+              </a:defRPr>
+            </a:pPr>
+            <a:r>
+              <a:t>3</a:t>
+            </a:r>
+          </a:p>
+        </p:txBody>
+      </p:sp>
+      <p:sp>
+        <p:nvSpPr>
+          <p:cNvPr id="18" name="TextBox 17"/>
+          <p:cNvSpPr txBox="1"/>
+          <p:nvPr/>
+        </p:nvSpPr>
+        <p:spPr>
+          <a:xfrm>
+            <a:off x="1280160" y="3703320"/>
+            <a:ext cx="7132320" cy="457200"/>
+          </a:xfrm>
+          <a:prstGeom prst="rect">
+            <a:avLst/>
+          </a:prstGeom>
+          <a:noFill/>
+        </p:spPr>
+        <p:txBody>
+          <a:bodyPr wrap="square">
+            <a:spAutoFit/>
+          </a:bodyPr>
+          <a:lstStyle/>
           <a:p>
             <a:pPr>
-              <a:spcAft>
-                <a:spcPts val="1600"/>
-              </a:spcAft>
-              <a:defRPr sz="2200">
-                <a:solidFill>
-                  <a:srgbClr val="323232"/>
+              <a:defRPr sz="1800">
+                <a:solidFill>
+                  <a:srgbClr val="E2E8F0"/>
                 </a:solidFill>
               </a:defRPr>
             </a:pPr>
             <a:r>
-              <a:t>• 실시간 처리 및 낮은 지연시간</a:t>
-            </a:r>
-          </a:p>
+              <a:t>초저지연 실시간 처리로 사용자 경험 향상</a:t>
+            </a:r>
+          </a:p>
+        </p:txBody>
+      </p:sp>
+      <p:sp>
+        <p:nvSpPr>
+          <p:cNvPr id="19" name="Rounded Rectangle 18"/>
+          <p:cNvSpPr/>
+          <p:nvPr/>
+        </p:nvSpPr>
+        <p:spPr>
+          <a:xfrm>
+            <a:off x="548640" y="4434840"/>
+            <a:ext cx="8046720" cy="822960"/>
+          </a:xfrm>
+          <a:prstGeom prst="roundRect">
+            <a:avLst/>
+          </a:prstGeom>
+          <a:solidFill>
+            <a:srgbClr val="1E293B"/>
+          </a:solidFill>
+          <a:ln>
+            <a:noFill/>
+          </a:ln>
+        </p:spPr>
+        <p:style>
+          <a:lnRef idx="1">
+            <a:schemeClr val="accent1"/>
+          </a:lnRef>
+          <a:fillRef idx="3">
+            <a:schemeClr val="accent1"/>
+          </a:fillRef>
+          <a:effectRef idx="2">
+            <a:schemeClr val="accent1"/>
+          </a:effectRef>
+          <a:fontRef idx="minor">
+            <a:schemeClr val="lt1"/>
+          </a:fontRef>
+        </p:style>
+        <p:txBody>
+          <a:bodyPr rtlCol="0" anchor="ctr"/>
+          <a:lstStyle/>
+          <a:p>
+            <a:pPr algn="ctr"/>
+          </a:p>
+        </p:txBody>
+      </p:sp>
+      <p:sp>
+        <p:nvSpPr>
+          <p:cNvPr id="20" name="Oval 19"/>
+          <p:cNvSpPr/>
+          <p:nvPr/>
+        </p:nvSpPr>
+        <p:spPr>
+          <a:xfrm>
+            <a:off x="777240" y="4690872"/>
+            <a:ext cx="320040" cy="320040"/>
+          </a:xfrm>
+          <a:prstGeom prst="ellipse">
+            <a:avLst/>
+          </a:prstGeom>
+          <a:solidFill>
+            <a:srgbClr val="14B8A6"/>
+          </a:solidFill>
+          <a:ln>
+            <a:noFill/>
+          </a:ln>
+        </p:spPr>
+        <p:style>
+          <a:lnRef idx="1">
+            <a:schemeClr val="accent1"/>
+          </a:lnRef>
+          <a:fillRef idx="3">
+            <a:schemeClr val="accent1"/>
+          </a:fillRef>
+          <a:effectRef idx="2">
+            <a:schemeClr val="accent1"/>
+          </a:effectRef>
+          <a:fontRef idx="minor">
+            <a:schemeClr val="lt1"/>
+          </a:fontRef>
+        </p:style>
+        <p:txBody>
+          <a:bodyPr rtlCol="0" anchor="ctr"/>
+          <a:lstStyle/>
+          <a:p>
+            <a:pPr algn="ctr"/>
+          </a:p>
+        </p:txBody>
+      </p:sp>
+      <p:sp>
+        <p:nvSpPr>
+          <p:cNvPr id="21" name="TextBox 20"/>
+          <p:cNvSpPr txBox="1"/>
+          <p:nvPr/>
+        </p:nvSpPr>
+        <p:spPr>
+          <a:xfrm>
+            <a:off x="777240" y="4727448"/>
+            <a:ext cx="320040" cy="274320"/>
+          </a:xfrm>
+          <a:prstGeom prst="rect">
+            <a:avLst/>
+          </a:prstGeom>
+          <a:noFill/>
+        </p:spPr>
+        <p:txBody>
+          <a:bodyPr wrap="none">
+            <a:spAutoFit/>
+          </a:bodyPr>
+          <a:lstStyle/>
+          <a:p>
+            <a:pPr algn="ctr">
+              <a:defRPr sz="1400" b="1">
+                <a:solidFill>
+                  <a:srgbClr val="FFFFFF"/>
+                </a:solidFill>
+              </a:defRPr>
+            </a:pPr>
+            <a:r>
+              <a:t>4</a:t>
+            </a:r>
+          </a:p>
+        </p:txBody>
+      </p:sp>
+      <p:sp>
+        <p:nvSpPr>
+          <p:cNvPr id="22" name="TextBox 21"/>
+          <p:cNvSpPr txBox="1"/>
+          <p:nvPr/>
+        </p:nvSpPr>
+        <p:spPr>
+          <a:xfrm>
+            <a:off x="1280160" y="4663440"/>
+            <a:ext cx="7132320" cy="457200"/>
+          </a:xfrm>
+          <a:prstGeom prst="rect">
+            <a:avLst/>
+          </a:prstGeom>
+          <a:noFill/>
+        </p:spPr>
+        <p:txBody>
+          <a:bodyPr wrap="square">
+            <a:spAutoFit/>
+          </a:bodyPr>
+          <a:lstStyle/>
           <a:p>
             <a:pPr>
-              <a:spcAft>
-                <a:spcPts val="1600"/>
-              </a:spcAft>
-              <a:defRPr sz="2200">
-                <a:solidFill>
-                  <a:srgbClr val="323232"/>
+              <a:defRPr sz="1800">
+                <a:solidFill>
+                  <a:srgbClr val="E2E8F0"/>
                 </a:solidFill>
               </a:defRPr>
             </a:pPr>
             <a:r>
-              <a:t>• Apple Intelligence, Google Gemini Nano 등</a:t>
-            </a:r>
-          </a:p>
+              <a:t>Apple Intelligence, Google Gemini Nano 등 상용화</a:t>
+            </a:r>
+          </a:p>
+        </p:txBody>
+      </p:sp>
+      <p:sp>
+        <p:nvSpPr>
+          <p:cNvPr id="23" name="Rounded Rectangle 22"/>
+          <p:cNvSpPr/>
+          <p:nvPr/>
+        </p:nvSpPr>
+        <p:spPr>
+          <a:xfrm>
+            <a:off x="548640" y="5394960"/>
+            <a:ext cx="8046720" cy="822960"/>
+          </a:xfrm>
+          <a:prstGeom prst="roundRect">
+            <a:avLst/>
+          </a:prstGeom>
+          <a:solidFill>
+            <a:srgbClr val="1E293B"/>
+          </a:solidFill>
+          <a:ln>
+            <a:noFill/>
+          </a:ln>
+        </p:spPr>
+        <p:style>
+          <a:lnRef idx="1">
+            <a:schemeClr val="accent1"/>
+          </a:lnRef>
+          <a:fillRef idx="3">
+            <a:schemeClr val="accent1"/>
+          </a:fillRef>
+          <a:effectRef idx="2">
+            <a:schemeClr val="accent1"/>
+          </a:effectRef>
+          <a:fontRef idx="minor">
+            <a:schemeClr val="lt1"/>
+          </a:fontRef>
+        </p:style>
+        <p:txBody>
+          <a:bodyPr rtlCol="0" anchor="ctr"/>
+          <a:lstStyle/>
+          <a:p>
+            <a:pPr algn="ctr"/>
+          </a:p>
+        </p:txBody>
+      </p:sp>
+      <p:sp>
+        <p:nvSpPr>
+          <p:cNvPr id="24" name="Oval 23"/>
+          <p:cNvSpPr/>
+          <p:nvPr/>
+        </p:nvSpPr>
+        <p:spPr>
+          <a:xfrm>
+            <a:off x="777240" y="5650992"/>
+            <a:ext cx="320040" cy="320040"/>
+          </a:xfrm>
+          <a:prstGeom prst="ellipse">
+            <a:avLst/>
+          </a:prstGeom>
+          <a:solidFill>
+            <a:srgbClr val="14B8A6"/>
+          </a:solidFill>
+          <a:ln>
+            <a:noFill/>
+          </a:ln>
+        </p:spPr>
+        <p:style>
+          <a:lnRef idx="1">
+            <a:schemeClr val="accent1"/>
+          </a:lnRef>
+          <a:fillRef idx="3">
+            <a:schemeClr val="accent1"/>
+          </a:fillRef>
+          <a:effectRef idx="2">
+            <a:schemeClr val="accent1"/>
+          </a:effectRef>
+          <a:fontRef idx="minor">
+            <a:schemeClr val="lt1"/>
+          </a:fontRef>
+        </p:style>
+        <p:txBody>
+          <a:bodyPr rtlCol="0" anchor="ctr"/>
+          <a:lstStyle/>
+          <a:p>
+            <a:pPr algn="ctr"/>
+          </a:p>
+        </p:txBody>
+      </p:sp>
+      <p:sp>
+        <p:nvSpPr>
+          <p:cNvPr id="25" name="TextBox 24"/>
+          <p:cNvSpPr txBox="1"/>
+          <p:nvPr/>
+        </p:nvSpPr>
+        <p:spPr>
+          <a:xfrm>
+            <a:off x="777240" y="5687568"/>
+            <a:ext cx="320040" cy="274320"/>
+          </a:xfrm>
+          <a:prstGeom prst="rect">
+            <a:avLst/>
+          </a:prstGeom>
+          <a:noFill/>
+        </p:spPr>
+        <p:txBody>
+          <a:bodyPr wrap="none">
+            <a:spAutoFit/>
+          </a:bodyPr>
+          <a:lstStyle/>
+          <a:p>
+            <a:pPr algn="ctr">
+              <a:defRPr sz="1400" b="1">
+                <a:solidFill>
+                  <a:srgbClr val="FFFFFF"/>
+                </a:solidFill>
+              </a:defRPr>
+            </a:pPr>
+            <a:r>
+              <a:t>5</a:t>
+            </a:r>
+          </a:p>
+        </p:txBody>
+      </p:sp>
+      <p:sp>
+        <p:nvSpPr>
+          <p:cNvPr id="26" name="TextBox 25"/>
+          <p:cNvSpPr txBox="1"/>
+          <p:nvPr/>
+        </p:nvSpPr>
+        <p:spPr>
+          <a:xfrm>
+            <a:off x="1280160" y="5623560"/>
+            <a:ext cx="7132320" cy="457200"/>
+          </a:xfrm>
+          <a:prstGeom prst="rect">
+            <a:avLst/>
+          </a:prstGeom>
+          <a:noFill/>
+        </p:spPr>
+        <p:txBody>
+          <a:bodyPr wrap="square">
+            <a:spAutoFit/>
+          </a:bodyPr>
+          <a:lstStyle/>
           <a:p>
             <a:pPr>
-              <a:spcAft>
-                <a:spcPts val="1600"/>
-              </a:spcAft>
-              <a:defRPr sz="2200">
-                <a:solidFill>
-                  <a:srgbClr val="323232"/>
+              <a:defRPr sz="1800">
+                <a:solidFill>
+                  <a:srgbClr val="E2E8F0"/>
                 </a:solidFill>
               </a:defRPr>
             </a:pPr>
             <a:r>
-              <a:t>• 소형화된 언어모델 (SLM) 발전</a:t>
+              <a:t>소형 언어모델(SLM)의 효율성 및 성능 발전</a:t>
             </a:r>
           </a:p>
         </p:txBody>
@@ -3444,7 +4497,7 @@
             <a:avLst/>
           </a:prstGeom>
           <a:solidFill>
-            <a:srgbClr val="10B981"/>
+            <a:srgbClr val="0F172A"/>
           </a:solidFill>
           <a:ln>
             <a:noFill/>
@@ -3480,8 +4533,8 @@
         </p:nvSpPr>
         <p:spPr>
           <a:xfrm>
-            <a:off x="457200" y="1828800"/>
-            <a:ext cx="8229600" cy="914400"/>
+            <a:off x="5029200" y="457200"/>
+            <a:ext cx="4572000" cy="5486400"/>
           </a:xfrm>
           <a:prstGeom prst="rect">
             <a:avLst/>
@@ -3494,10 +4547,10 @@
           </a:bodyPr>
           <a:lstStyle/>
           <a:p>
-            <a:pPr algn="ctr">
-              <a:defRPr sz="7200" b="1">
-                <a:solidFill>
-                  <a:srgbClr val="FFFFFF"/>
+            <a:pPr algn="r">
+              <a:defRPr sz="28000" b="1">
+                <a:solidFill>
+                  <a:srgbClr val="1E293B"/>
                 </a:solidFill>
               </a:defRPr>
             </a:pPr>
@@ -3509,14 +4562,57 @@
       </p:sp>
       <p:sp>
         <p:nvSpPr>
-          <p:cNvPr id="4" name="TextBox 3"/>
+          <p:cNvPr id="4" name="Rectangle 3"/>
+          <p:cNvSpPr/>
+          <p:nvPr/>
+        </p:nvSpPr>
+        <p:spPr>
+          <a:xfrm>
+            <a:off x="731520" y="2926080"/>
+            <a:ext cx="731520" cy="54864"/>
+          </a:xfrm>
+          <a:prstGeom prst="rect">
+            <a:avLst/>
+          </a:prstGeom>
+          <a:solidFill>
+            <a:srgbClr val="F59E0B"/>
+          </a:solidFill>
+          <a:ln>
+            <a:noFill/>
+          </a:ln>
+        </p:spPr>
+        <p:style>
+          <a:lnRef idx="1">
+            <a:schemeClr val="accent1"/>
+          </a:lnRef>
+          <a:fillRef idx="3">
+            <a:schemeClr val="accent1"/>
+          </a:fillRef>
+          <a:effectRef idx="2">
+            <a:schemeClr val="accent1"/>
+          </a:effectRef>
+          <a:fontRef idx="minor">
+            <a:schemeClr val="lt1"/>
+          </a:fontRef>
+        </p:style>
+        <p:txBody>
+          <a:bodyPr rtlCol="0" anchor="ctr"/>
+          <a:lstStyle/>
+          <a:p>
+            <a:pPr algn="ctr"/>
+          </a:p>
+        </p:txBody>
+      </p:sp>
+      <p:sp>
+        <p:nvSpPr>
+          <p:cNvPr id="5" name="TextBox 4"/>
           <p:cNvSpPr txBox="1"/>
           <p:nvPr/>
         </p:nvSpPr>
         <p:spPr>
           <a:xfrm>
-            <a:off x="457200" y="2926080"/>
-            <a:ext cx="8229600" cy="914400"/>
+            <a:off x="731520" y="2286000"/>
+            <a:ext cx="1828800" cy="548640"/>
           </a:xfrm>
           <a:prstGeom prst="rect">
             <a:avLst/>
@@ -3529,8 +4625,43 @@
           </a:bodyPr>
           <a:lstStyle/>
           <a:p>
-            <a:pPr algn="ctr">
-              <a:defRPr sz="4000">
+            <a:pPr>
+              <a:defRPr sz="1400" b="1">
+                <a:solidFill>
+                  <a:srgbClr val="F59E0B"/>
+                </a:solidFill>
+              </a:defRPr>
+            </a:pPr>
+            <a:r>
+              <a:t>SECTION 05</a:t>
+            </a:r>
+          </a:p>
+        </p:txBody>
+      </p:sp>
+      <p:sp>
+        <p:nvSpPr>
+          <p:cNvPr id="6" name="TextBox 5"/>
+          <p:cNvSpPr txBox="1"/>
+          <p:nvPr/>
+        </p:nvSpPr>
+        <p:spPr>
+          <a:xfrm>
+            <a:off x="731520" y="3200400"/>
+            <a:ext cx="6400800" cy="1097280"/>
+          </a:xfrm>
+          <a:prstGeom prst="rect">
+            <a:avLst/>
+          </a:prstGeom>
+          <a:noFill/>
+        </p:spPr>
+        <p:txBody>
+          <a:bodyPr wrap="none">
+            <a:spAutoFit/>
+          </a:bodyPr>
+          <a:lstStyle/>
+          <a:p>
+            <a:pPr>
+              <a:defRPr sz="4400" b="1">
                 <a:solidFill>
                   <a:srgbClr val="FFFFFF"/>
                 </a:solidFill>
@@ -3569,13 +4700,13 @@
         <p:spPr>
           <a:xfrm>
             <a:off x="0" y="0"/>
-            <a:ext cx="9144000" cy="1097280"/>
-          </a:xfrm>
-          <a:prstGeom prst="rect">
-            <a:avLst/>
-          </a:prstGeom>
-          <a:solidFill>
-            <a:srgbClr val="EF4444"/>
+            <a:ext cx="9144000" cy="6858000"/>
+          </a:xfrm>
+          <a:prstGeom prst="rect">
+            <a:avLst/>
+          </a:prstGeom>
+          <a:solidFill>
+            <a:srgbClr val="0F172A"/>
           </a:solidFill>
           <a:ln>
             <a:noFill/>
@@ -3605,14 +4736,57 @@
       </p:sp>
       <p:sp>
         <p:nvSpPr>
-          <p:cNvPr id="3" name="TextBox 2"/>
+          <p:cNvPr id="3" name="Rectangle 2"/>
+          <p:cNvSpPr/>
+          <p:nvPr/>
+        </p:nvSpPr>
+        <p:spPr>
+          <a:xfrm>
+            <a:off x="0" y="0"/>
+            <a:ext cx="137160" cy="6858000"/>
+          </a:xfrm>
+          <a:prstGeom prst="rect">
+            <a:avLst/>
+          </a:prstGeom>
+          <a:solidFill>
+            <a:srgbClr val="F59E0B"/>
+          </a:solidFill>
+          <a:ln>
+            <a:noFill/>
+          </a:ln>
+        </p:spPr>
+        <p:style>
+          <a:lnRef idx="1">
+            <a:schemeClr val="accent1"/>
+          </a:lnRef>
+          <a:fillRef idx="3">
+            <a:schemeClr val="accent1"/>
+          </a:fillRef>
+          <a:effectRef idx="2">
+            <a:schemeClr val="accent1"/>
+          </a:effectRef>
+          <a:fontRef idx="minor">
+            <a:schemeClr val="lt1"/>
+          </a:fontRef>
+        </p:style>
+        <p:txBody>
+          <a:bodyPr rtlCol="0" anchor="ctr"/>
+          <a:lstStyle/>
+          <a:p>
+            <a:pPr algn="ctr"/>
+          </a:p>
+        </p:txBody>
+      </p:sp>
+      <p:sp>
+        <p:nvSpPr>
+          <p:cNvPr id="4" name="TextBox 3"/>
           <p:cNvSpPr txBox="1"/>
           <p:nvPr/>
         </p:nvSpPr>
         <p:spPr>
           <a:xfrm>
-            <a:off x="457200" y="274320"/>
-            <a:ext cx="8229600" cy="731520"/>
+            <a:off x="548640" y="320040"/>
+            <a:ext cx="7315200" cy="365760"/>
           </a:xfrm>
           <a:prstGeom prst="rect">
             <a:avLst/>
@@ -3626,28 +4800,227 @@
           <a:lstStyle/>
           <a:p>
             <a:pPr>
-              <a:defRPr sz="3600" b="1">
+              <a:defRPr sz="1200" b="1">
+                <a:solidFill>
+                  <a:srgbClr val="F59E0B"/>
+                </a:solidFill>
+              </a:defRPr>
+            </a:pPr>
+            <a:r>
+              <a:t>SECTION 05 · AI 규제와 윤리</a:t>
+            </a:r>
+          </a:p>
+        </p:txBody>
+      </p:sp>
+      <p:sp>
+        <p:nvSpPr>
+          <p:cNvPr id="5" name="TextBox 4"/>
+          <p:cNvSpPr txBox="1"/>
+          <p:nvPr/>
+        </p:nvSpPr>
+        <p:spPr>
+          <a:xfrm>
+            <a:off x="548640" y="640080"/>
+            <a:ext cx="7315200" cy="640080"/>
+          </a:xfrm>
+          <a:prstGeom prst="rect">
+            <a:avLst/>
+          </a:prstGeom>
+          <a:noFill/>
+        </p:spPr>
+        <p:txBody>
+          <a:bodyPr wrap="none">
+            <a:spAutoFit/>
+          </a:bodyPr>
+          <a:lstStyle/>
+          <a:p>
+            <a:pPr>
+              <a:defRPr sz="3200" b="1">
                 <a:solidFill>
                   <a:srgbClr val="FFFFFF"/>
                 </a:solidFill>
               </a:defRPr>
             </a:pPr>
             <a:r>
-              <a:t>⚖️ AI 규제와 윤리</a:t>
-            </a:r>
-          </a:p>
-        </p:txBody>
-      </p:sp>
-      <p:sp>
-        <p:nvSpPr>
-          <p:cNvPr id="4" name="TextBox 3"/>
+              <a:t>AI Governance &amp; Ethics</a:t>
+            </a:r>
+          </a:p>
+        </p:txBody>
+      </p:sp>
+      <p:sp>
+        <p:nvSpPr>
+          <p:cNvPr id="6" name="Rectangle 5"/>
+          <p:cNvSpPr/>
+          <p:nvPr/>
+        </p:nvSpPr>
+        <p:spPr>
+          <a:xfrm>
+            <a:off x="548640" y="1325880"/>
+            <a:ext cx="8046720" cy="13716"/>
+          </a:xfrm>
+          <a:prstGeom prst="rect">
+            <a:avLst/>
+          </a:prstGeom>
+          <a:solidFill>
+            <a:srgbClr val="1E293B"/>
+          </a:solidFill>
+          <a:ln>
+            <a:noFill/>
+          </a:ln>
+        </p:spPr>
+        <p:style>
+          <a:lnRef idx="1">
+            <a:schemeClr val="accent1"/>
+          </a:lnRef>
+          <a:fillRef idx="3">
+            <a:schemeClr val="accent1"/>
+          </a:fillRef>
+          <a:effectRef idx="2">
+            <a:schemeClr val="accent1"/>
+          </a:effectRef>
+          <a:fontRef idx="minor">
+            <a:schemeClr val="lt1"/>
+          </a:fontRef>
+        </p:style>
+        <p:txBody>
+          <a:bodyPr rtlCol="0" anchor="ctr"/>
+          <a:lstStyle/>
+          <a:p>
+            <a:pPr algn="ctr"/>
+          </a:p>
+        </p:txBody>
+      </p:sp>
+      <p:sp>
+        <p:nvSpPr>
+          <p:cNvPr id="7" name="Rounded Rectangle 6"/>
+          <p:cNvSpPr/>
+          <p:nvPr/>
+        </p:nvSpPr>
+        <p:spPr>
+          <a:xfrm>
+            <a:off x="548640" y="1554480"/>
+            <a:ext cx="8046720" cy="822960"/>
+          </a:xfrm>
+          <a:prstGeom prst="roundRect">
+            <a:avLst/>
+          </a:prstGeom>
+          <a:solidFill>
+            <a:srgbClr val="1E293B"/>
+          </a:solidFill>
+          <a:ln>
+            <a:noFill/>
+          </a:ln>
+        </p:spPr>
+        <p:style>
+          <a:lnRef idx="1">
+            <a:schemeClr val="accent1"/>
+          </a:lnRef>
+          <a:fillRef idx="3">
+            <a:schemeClr val="accent1"/>
+          </a:fillRef>
+          <a:effectRef idx="2">
+            <a:schemeClr val="accent1"/>
+          </a:effectRef>
+          <a:fontRef idx="minor">
+            <a:schemeClr val="lt1"/>
+          </a:fontRef>
+        </p:style>
+        <p:txBody>
+          <a:bodyPr rtlCol="0" anchor="ctr"/>
+          <a:lstStyle/>
+          <a:p>
+            <a:pPr algn="ctr"/>
+          </a:p>
+        </p:txBody>
+      </p:sp>
+      <p:sp>
+        <p:nvSpPr>
+          <p:cNvPr id="8" name="Oval 7"/>
+          <p:cNvSpPr/>
+          <p:nvPr/>
+        </p:nvSpPr>
+        <p:spPr>
+          <a:xfrm>
+            <a:off x="777240" y="1810512"/>
+            <a:ext cx="320040" cy="320040"/>
+          </a:xfrm>
+          <a:prstGeom prst="ellipse">
+            <a:avLst/>
+          </a:prstGeom>
+          <a:solidFill>
+            <a:srgbClr val="F59E0B"/>
+          </a:solidFill>
+          <a:ln>
+            <a:noFill/>
+          </a:ln>
+        </p:spPr>
+        <p:style>
+          <a:lnRef idx="1">
+            <a:schemeClr val="accent1"/>
+          </a:lnRef>
+          <a:fillRef idx="3">
+            <a:schemeClr val="accent1"/>
+          </a:fillRef>
+          <a:effectRef idx="2">
+            <a:schemeClr val="accent1"/>
+          </a:effectRef>
+          <a:fontRef idx="minor">
+            <a:schemeClr val="lt1"/>
+          </a:fontRef>
+        </p:style>
+        <p:txBody>
+          <a:bodyPr rtlCol="0" anchor="ctr"/>
+          <a:lstStyle/>
+          <a:p>
+            <a:pPr algn="ctr"/>
+          </a:p>
+        </p:txBody>
+      </p:sp>
+      <p:sp>
+        <p:nvSpPr>
+          <p:cNvPr id="9" name="TextBox 8"/>
           <p:cNvSpPr txBox="1"/>
           <p:nvPr/>
         </p:nvSpPr>
         <p:spPr>
           <a:xfrm>
-            <a:off x="640080" y="1463040"/>
-            <a:ext cx="7863840" cy="4572000"/>
+            <a:off x="777240" y="1847088"/>
+            <a:ext cx="320040" cy="274320"/>
+          </a:xfrm>
+          <a:prstGeom prst="rect">
+            <a:avLst/>
+          </a:prstGeom>
+          <a:noFill/>
+        </p:spPr>
+        <p:txBody>
+          <a:bodyPr wrap="none">
+            <a:spAutoFit/>
+          </a:bodyPr>
+          <a:lstStyle/>
+          <a:p>
+            <a:pPr algn="ctr">
+              <a:defRPr sz="1400" b="1">
+                <a:solidFill>
+                  <a:srgbClr val="FFFFFF"/>
+                </a:solidFill>
+              </a:defRPr>
+            </a:pPr>
+            <a:r>
+              <a:t>1</a:t>
+            </a:r>
+          </a:p>
+        </p:txBody>
+      </p:sp>
+      <p:sp>
+        <p:nvSpPr>
+          <p:cNvPr id="10" name="TextBox 9"/>
+          <p:cNvSpPr txBox="1"/>
+          <p:nvPr/>
+        </p:nvSpPr>
+        <p:spPr>
+          <a:xfrm>
+            <a:off x="1280160" y="1783080"/>
+            <a:ext cx="7132320" cy="457200"/>
           </a:xfrm>
           <a:prstGeom prst="rect">
             <a:avLst/>
@@ -3661,77 +5034,638 @@
           <a:lstStyle/>
           <a:p>
             <a:pPr>
-              <a:spcAft>
-                <a:spcPts val="1600"/>
-              </a:spcAft>
-              <a:defRPr sz="2200">
-                <a:solidFill>
-                  <a:srgbClr val="323232"/>
+              <a:defRPr sz="1800">
+                <a:solidFill>
+                  <a:srgbClr val="E2E8F0"/>
                 </a:solidFill>
               </a:defRPr>
             </a:pPr>
             <a:r>
-              <a:t>• EU AI Act 시행 (2024년~)</a:t>
-            </a:r>
-          </a:p>
+              <a:t>EU AI Act 본격 시행 - 리스크 기반 규제 프레임워크</a:t>
+            </a:r>
+          </a:p>
+        </p:txBody>
+      </p:sp>
+      <p:sp>
+        <p:nvSpPr>
+          <p:cNvPr id="11" name="Rounded Rectangle 10"/>
+          <p:cNvSpPr/>
+          <p:nvPr/>
+        </p:nvSpPr>
+        <p:spPr>
+          <a:xfrm>
+            <a:off x="548640" y="2514600"/>
+            <a:ext cx="8046720" cy="822960"/>
+          </a:xfrm>
+          <a:prstGeom prst="roundRect">
+            <a:avLst/>
+          </a:prstGeom>
+          <a:solidFill>
+            <a:srgbClr val="1E293B"/>
+          </a:solidFill>
+          <a:ln>
+            <a:noFill/>
+          </a:ln>
+        </p:spPr>
+        <p:style>
+          <a:lnRef idx="1">
+            <a:schemeClr val="accent1"/>
+          </a:lnRef>
+          <a:fillRef idx="3">
+            <a:schemeClr val="accent1"/>
+          </a:fillRef>
+          <a:effectRef idx="2">
+            <a:schemeClr val="accent1"/>
+          </a:effectRef>
+          <a:fontRef idx="minor">
+            <a:schemeClr val="lt1"/>
+          </a:fontRef>
+        </p:style>
+        <p:txBody>
+          <a:bodyPr rtlCol="0" anchor="ctr"/>
+          <a:lstStyle/>
+          <a:p>
+            <a:pPr algn="ctr"/>
+          </a:p>
+        </p:txBody>
+      </p:sp>
+      <p:sp>
+        <p:nvSpPr>
+          <p:cNvPr id="12" name="Oval 11"/>
+          <p:cNvSpPr/>
+          <p:nvPr/>
+        </p:nvSpPr>
+        <p:spPr>
+          <a:xfrm>
+            <a:off x="777240" y="2770632"/>
+            <a:ext cx="320040" cy="320040"/>
+          </a:xfrm>
+          <a:prstGeom prst="ellipse">
+            <a:avLst/>
+          </a:prstGeom>
+          <a:solidFill>
+            <a:srgbClr val="F59E0B"/>
+          </a:solidFill>
+          <a:ln>
+            <a:noFill/>
+          </a:ln>
+        </p:spPr>
+        <p:style>
+          <a:lnRef idx="1">
+            <a:schemeClr val="accent1"/>
+          </a:lnRef>
+          <a:fillRef idx="3">
+            <a:schemeClr val="accent1"/>
+          </a:fillRef>
+          <a:effectRef idx="2">
+            <a:schemeClr val="accent1"/>
+          </a:effectRef>
+          <a:fontRef idx="minor">
+            <a:schemeClr val="lt1"/>
+          </a:fontRef>
+        </p:style>
+        <p:txBody>
+          <a:bodyPr rtlCol="0" anchor="ctr"/>
+          <a:lstStyle/>
+          <a:p>
+            <a:pPr algn="ctr"/>
+          </a:p>
+        </p:txBody>
+      </p:sp>
+      <p:sp>
+        <p:nvSpPr>
+          <p:cNvPr id="13" name="TextBox 12"/>
+          <p:cNvSpPr txBox="1"/>
+          <p:nvPr/>
+        </p:nvSpPr>
+        <p:spPr>
+          <a:xfrm>
+            <a:off x="777240" y="2807208"/>
+            <a:ext cx="320040" cy="274320"/>
+          </a:xfrm>
+          <a:prstGeom prst="rect">
+            <a:avLst/>
+          </a:prstGeom>
+          <a:noFill/>
+        </p:spPr>
+        <p:txBody>
+          <a:bodyPr wrap="none">
+            <a:spAutoFit/>
+          </a:bodyPr>
+          <a:lstStyle/>
+          <a:p>
+            <a:pPr algn="ctr">
+              <a:defRPr sz="1400" b="1">
+                <a:solidFill>
+                  <a:srgbClr val="FFFFFF"/>
+                </a:solidFill>
+              </a:defRPr>
+            </a:pPr>
+            <a:r>
+              <a:t>2</a:t>
+            </a:r>
+          </a:p>
+        </p:txBody>
+      </p:sp>
+      <p:sp>
+        <p:nvSpPr>
+          <p:cNvPr id="14" name="TextBox 13"/>
+          <p:cNvSpPr txBox="1"/>
+          <p:nvPr/>
+        </p:nvSpPr>
+        <p:spPr>
+          <a:xfrm>
+            <a:off x="1280160" y="2743200"/>
+            <a:ext cx="7132320" cy="457200"/>
+          </a:xfrm>
+          <a:prstGeom prst="rect">
+            <a:avLst/>
+          </a:prstGeom>
+          <a:noFill/>
+        </p:spPr>
+        <p:txBody>
+          <a:bodyPr wrap="square">
+            <a:spAutoFit/>
+          </a:bodyPr>
+          <a:lstStyle/>
           <a:p>
             <a:pPr>
-              <a:spcAft>
-                <a:spcPts val="1600"/>
-              </a:spcAft>
-              <a:defRPr sz="2200">
-                <a:solidFill>
-                  <a:srgbClr val="323232"/>
+              <a:defRPr sz="1800">
+                <a:solidFill>
+                  <a:srgbClr val="E2E8F0"/>
                 </a:solidFill>
               </a:defRPr>
             </a:pPr>
             <a:r>
-              <a:t>• AI 투명성 및 설명가능성 요구 증가</a:t>
-            </a:r>
-          </a:p>
+              <a:t>AI 시스템의 투명성 및 설명가능성(XAI) 요구 증가</a:t>
+            </a:r>
+          </a:p>
+        </p:txBody>
+      </p:sp>
+      <p:sp>
+        <p:nvSpPr>
+          <p:cNvPr id="15" name="Rounded Rectangle 14"/>
+          <p:cNvSpPr/>
+          <p:nvPr/>
+        </p:nvSpPr>
+        <p:spPr>
+          <a:xfrm>
+            <a:off x="548640" y="3474720"/>
+            <a:ext cx="8046720" cy="822960"/>
+          </a:xfrm>
+          <a:prstGeom prst="roundRect">
+            <a:avLst/>
+          </a:prstGeom>
+          <a:solidFill>
+            <a:srgbClr val="1E293B"/>
+          </a:solidFill>
+          <a:ln>
+            <a:noFill/>
+          </a:ln>
+        </p:spPr>
+        <p:style>
+          <a:lnRef idx="1">
+            <a:schemeClr val="accent1"/>
+          </a:lnRef>
+          <a:fillRef idx="3">
+            <a:schemeClr val="accent1"/>
+          </a:fillRef>
+          <a:effectRef idx="2">
+            <a:schemeClr val="accent1"/>
+          </a:effectRef>
+          <a:fontRef idx="minor">
+            <a:schemeClr val="lt1"/>
+          </a:fontRef>
+        </p:style>
+        <p:txBody>
+          <a:bodyPr rtlCol="0" anchor="ctr"/>
+          <a:lstStyle/>
+          <a:p>
+            <a:pPr algn="ctr"/>
+          </a:p>
+        </p:txBody>
+      </p:sp>
+      <p:sp>
+        <p:nvSpPr>
+          <p:cNvPr id="16" name="Oval 15"/>
+          <p:cNvSpPr/>
+          <p:nvPr/>
+        </p:nvSpPr>
+        <p:spPr>
+          <a:xfrm>
+            <a:off x="777240" y="3730752"/>
+            <a:ext cx="320040" cy="320040"/>
+          </a:xfrm>
+          <a:prstGeom prst="ellipse">
+            <a:avLst/>
+          </a:prstGeom>
+          <a:solidFill>
+            <a:srgbClr val="F59E0B"/>
+          </a:solidFill>
+          <a:ln>
+            <a:noFill/>
+          </a:ln>
+        </p:spPr>
+        <p:style>
+          <a:lnRef idx="1">
+            <a:schemeClr val="accent1"/>
+          </a:lnRef>
+          <a:fillRef idx="3">
+            <a:schemeClr val="accent1"/>
+          </a:fillRef>
+          <a:effectRef idx="2">
+            <a:schemeClr val="accent1"/>
+          </a:effectRef>
+          <a:fontRef idx="minor">
+            <a:schemeClr val="lt1"/>
+          </a:fontRef>
+        </p:style>
+        <p:txBody>
+          <a:bodyPr rtlCol="0" anchor="ctr"/>
+          <a:lstStyle/>
+          <a:p>
+            <a:pPr algn="ctr"/>
+          </a:p>
+        </p:txBody>
+      </p:sp>
+      <p:sp>
+        <p:nvSpPr>
+          <p:cNvPr id="17" name="TextBox 16"/>
+          <p:cNvSpPr txBox="1"/>
+          <p:nvPr/>
+        </p:nvSpPr>
+        <p:spPr>
+          <a:xfrm>
+            <a:off x="777240" y="3767328"/>
+            <a:ext cx="320040" cy="274320"/>
+          </a:xfrm>
+          <a:prstGeom prst="rect">
+            <a:avLst/>
+          </a:prstGeom>
+          <a:noFill/>
+        </p:spPr>
+        <p:txBody>
+          <a:bodyPr wrap="none">
+            <a:spAutoFit/>
+          </a:bodyPr>
+          <a:lstStyle/>
+          <a:p>
+            <a:pPr algn="ctr">
+              <a:defRPr sz="1400" b="1">
+                <a:solidFill>
+                  <a:srgbClr val="FFFFFF"/>
+                </a:solidFill>
+              </a:defRPr>
+            </a:pPr>
+            <a:r>
+              <a:t>3</a:t>
+            </a:r>
+          </a:p>
+        </p:txBody>
+      </p:sp>
+      <p:sp>
+        <p:nvSpPr>
+          <p:cNvPr id="18" name="TextBox 17"/>
+          <p:cNvSpPr txBox="1"/>
+          <p:nvPr/>
+        </p:nvSpPr>
+        <p:spPr>
+          <a:xfrm>
+            <a:off x="1280160" y="3703320"/>
+            <a:ext cx="7132320" cy="457200"/>
+          </a:xfrm>
+          <a:prstGeom prst="rect">
+            <a:avLst/>
+          </a:prstGeom>
+          <a:noFill/>
+        </p:spPr>
+        <p:txBody>
+          <a:bodyPr wrap="square">
+            <a:spAutoFit/>
+          </a:bodyPr>
+          <a:lstStyle/>
           <a:p>
             <a:pPr>
-              <a:spcAft>
-                <a:spcPts val="1600"/>
-              </a:spcAft>
-              <a:defRPr sz="2200">
-                <a:solidFill>
-                  <a:srgbClr val="323232"/>
+              <a:defRPr sz="1800">
+                <a:solidFill>
+                  <a:srgbClr val="E2E8F0"/>
                 </a:solidFill>
               </a:defRPr>
             </a:pPr>
             <a:r>
-              <a:t>• 딥페이크 및 허위정보 대응</a:t>
-            </a:r>
-          </a:p>
+              <a:t>딥페이크, 허위정보 대응을 위한 기술적·제도적 장치</a:t>
+            </a:r>
+          </a:p>
+        </p:txBody>
+      </p:sp>
+      <p:sp>
+        <p:nvSpPr>
+          <p:cNvPr id="19" name="Rounded Rectangle 18"/>
+          <p:cNvSpPr/>
+          <p:nvPr/>
+        </p:nvSpPr>
+        <p:spPr>
+          <a:xfrm>
+            <a:off x="548640" y="4434840"/>
+            <a:ext cx="8046720" cy="822960"/>
+          </a:xfrm>
+          <a:prstGeom prst="roundRect">
+            <a:avLst/>
+          </a:prstGeom>
+          <a:solidFill>
+            <a:srgbClr val="1E293B"/>
+          </a:solidFill>
+          <a:ln>
+            <a:noFill/>
+          </a:ln>
+        </p:spPr>
+        <p:style>
+          <a:lnRef idx="1">
+            <a:schemeClr val="accent1"/>
+          </a:lnRef>
+          <a:fillRef idx="3">
+            <a:schemeClr val="accent1"/>
+          </a:fillRef>
+          <a:effectRef idx="2">
+            <a:schemeClr val="accent1"/>
+          </a:effectRef>
+          <a:fontRef idx="minor">
+            <a:schemeClr val="lt1"/>
+          </a:fontRef>
+        </p:style>
+        <p:txBody>
+          <a:bodyPr rtlCol="0" anchor="ctr"/>
+          <a:lstStyle/>
+          <a:p>
+            <a:pPr algn="ctr"/>
+          </a:p>
+        </p:txBody>
+      </p:sp>
+      <p:sp>
+        <p:nvSpPr>
+          <p:cNvPr id="20" name="Oval 19"/>
+          <p:cNvSpPr/>
+          <p:nvPr/>
+        </p:nvSpPr>
+        <p:spPr>
+          <a:xfrm>
+            <a:off x="777240" y="4690872"/>
+            <a:ext cx="320040" cy="320040"/>
+          </a:xfrm>
+          <a:prstGeom prst="ellipse">
+            <a:avLst/>
+          </a:prstGeom>
+          <a:solidFill>
+            <a:srgbClr val="F59E0B"/>
+          </a:solidFill>
+          <a:ln>
+            <a:noFill/>
+          </a:ln>
+        </p:spPr>
+        <p:style>
+          <a:lnRef idx="1">
+            <a:schemeClr val="accent1"/>
+          </a:lnRef>
+          <a:fillRef idx="3">
+            <a:schemeClr val="accent1"/>
+          </a:fillRef>
+          <a:effectRef idx="2">
+            <a:schemeClr val="accent1"/>
+          </a:effectRef>
+          <a:fontRef idx="minor">
+            <a:schemeClr val="lt1"/>
+          </a:fontRef>
+        </p:style>
+        <p:txBody>
+          <a:bodyPr rtlCol="0" anchor="ctr"/>
+          <a:lstStyle/>
+          <a:p>
+            <a:pPr algn="ctr"/>
+          </a:p>
+        </p:txBody>
+      </p:sp>
+      <p:sp>
+        <p:nvSpPr>
+          <p:cNvPr id="21" name="TextBox 20"/>
+          <p:cNvSpPr txBox="1"/>
+          <p:nvPr/>
+        </p:nvSpPr>
+        <p:spPr>
+          <a:xfrm>
+            <a:off x="777240" y="4727448"/>
+            <a:ext cx="320040" cy="274320"/>
+          </a:xfrm>
+          <a:prstGeom prst="rect">
+            <a:avLst/>
+          </a:prstGeom>
+          <a:noFill/>
+        </p:spPr>
+        <p:txBody>
+          <a:bodyPr wrap="none">
+            <a:spAutoFit/>
+          </a:bodyPr>
+          <a:lstStyle/>
+          <a:p>
+            <a:pPr algn="ctr">
+              <a:defRPr sz="1400" b="1">
+                <a:solidFill>
+                  <a:srgbClr val="FFFFFF"/>
+                </a:solidFill>
+              </a:defRPr>
+            </a:pPr>
+            <a:r>
+              <a:t>4</a:t>
+            </a:r>
+          </a:p>
+        </p:txBody>
+      </p:sp>
+      <p:sp>
+        <p:nvSpPr>
+          <p:cNvPr id="22" name="TextBox 21"/>
+          <p:cNvSpPr txBox="1"/>
+          <p:nvPr/>
+        </p:nvSpPr>
+        <p:spPr>
+          <a:xfrm>
+            <a:off x="1280160" y="4663440"/>
+            <a:ext cx="7132320" cy="457200"/>
+          </a:xfrm>
+          <a:prstGeom prst="rect">
+            <a:avLst/>
+          </a:prstGeom>
+          <a:noFill/>
+        </p:spPr>
+        <p:txBody>
+          <a:bodyPr wrap="square">
+            <a:spAutoFit/>
+          </a:bodyPr>
+          <a:lstStyle/>
           <a:p>
             <a:pPr>
-              <a:spcAft>
-                <a:spcPts val="1600"/>
-              </a:spcAft>
-              <a:defRPr sz="2200">
-                <a:solidFill>
-                  <a:srgbClr val="323232"/>
+              <a:defRPr sz="1800">
+                <a:solidFill>
+                  <a:srgbClr val="E2E8F0"/>
                 </a:solidFill>
               </a:defRPr>
             </a:pPr>
             <a:r>
-              <a:t>• AI 저작권 및 지적재산권 논의</a:t>
-            </a:r>
-          </a:p>
+              <a:t>AI 저작권 및 지적재산권 관련 법적 논의 활발</a:t>
+            </a:r>
+          </a:p>
+        </p:txBody>
+      </p:sp>
+      <p:sp>
+        <p:nvSpPr>
+          <p:cNvPr id="23" name="Rounded Rectangle 22"/>
+          <p:cNvSpPr/>
+          <p:nvPr/>
+        </p:nvSpPr>
+        <p:spPr>
+          <a:xfrm>
+            <a:off x="548640" y="5394960"/>
+            <a:ext cx="8046720" cy="822960"/>
+          </a:xfrm>
+          <a:prstGeom prst="roundRect">
+            <a:avLst/>
+          </a:prstGeom>
+          <a:solidFill>
+            <a:srgbClr val="1E293B"/>
+          </a:solidFill>
+          <a:ln>
+            <a:noFill/>
+          </a:ln>
+        </p:spPr>
+        <p:style>
+          <a:lnRef idx="1">
+            <a:schemeClr val="accent1"/>
+          </a:lnRef>
+          <a:fillRef idx="3">
+            <a:schemeClr val="accent1"/>
+          </a:fillRef>
+          <a:effectRef idx="2">
+            <a:schemeClr val="accent1"/>
+          </a:effectRef>
+          <a:fontRef idx="minor">
+            <a:schemeClr val="lt1"/>
+          </a:fontRef>
+        </p:style>
+        <p:txBody>
+          <a:bodyPr rtlCol="0" anchor="ctr"/>
+          <a:lstStyle/>
+          <a:p>
+            <a:pPr algn="ctr"/>
+          </a:p>
+        </p:txBody>
+      </p:sp>
+      <p:sp>
+        <p:nvSpPr>
+          <p:cNvPr id="24" name="Oval 23"/>
+          <p:cNvSpPr/>
+          <p:nvPr/>
+        </p:nvSpPr>
+        <p:spPr>
+          <a:xfrm>
+            <a:off x="777240" y="5650992"/>
+            <a:ext cx="320040" cy="320040"/>
+          </a:xfrm>
+          <a:prstGeom prst="ellipse">
+            <a:avLst/>
+          </a:prstGeom>
+          <a:solidFill>
+            <a:srgbClr val="F59E0B"/>
+          </a:solidFill>
+          <a:ln>
+            <a:noFill/>
+          </a:ln>
+        </p:spPr>
+        <p:style>
+          <a:lnRef idx="1">
+            <a:schemeClr val="accent1"/>
+          </a:lnRef>
+          <a:fillRef idx="3">
+            <a:schemeClr val="accent1"/>
+          </a:fillRef>
+          <a:effectRef idx="2">
+            <a:schemeClr val="accent1"/>
+          </a:effectRef>
+          <a:fontRef idx="minor">
+            <a:schemeClr val="lt1"/>
+          </a:fontRef>
+        </p:style>
+        <p:txBody>
+          <a:bodyPr rtlCol="0" anchor="ctr"/>
+          <a:lstStyle/>
+          <a:p>
+            <a:pPr algn="ctr"/>
+          </a:p>
+        </p:txBody>
+      </p:sp>
+      <p:sp>
+        <p:nvSpPr>
+          <p:cNvPr id="25" name="TextBox 24"/>
+          <p:cNvSpPr txBox="1"/>
+          <p:nvPr/>
+        </p:nvSpPr>
+        <p:spPr>
+          <a:xfrm>
+            <a:off x="777240" y="5687568"/>
+            <a:ext cx="320040" cy="274320"/>
+          </a:xfrm>
+          <a:prstGeom prst="rect">
+            <a:avLst/>
+          </a:prstGeom>
+          <a:noFill/>
+        </p:spPr>
+        <p:txBody>
+          <a:bodyPr wrap="none">
+            <a:spAutoFit/>
+          </a:bodyPr>
+          <a:lstStyle/>
+          <a:p>
+            <a:pPr algn="ctr">
+              <a:defRPr sz="1400" b="1">
+                <a:solidFill>
+                  <a:srgbClr val="FFFFFF"/>
+                </a:solidFill>
+              </a:defRPr>
+            </a:pPr>
+            <a:r>
+              <a:t>5</a:t>
+            </a:r>
+          </a:p>
+        </p:txBody>
+      </p:sp>
+      <p:sp>
+        <p:nvSpPr>
+          <p:cNvPr id="26" name="TextBox 25"/>
+          <p:cNvSpPr txBox="1"/>
+          <p:nvPr/>
+        </p:nvSpPr>
+        <p:spPr>
+          <a:xfrm>
+            <a:off x="1280160" y="5623560"/>
+            <a:ext cx="7132320" cy="457200"/>
+          </a:xfrm>
+          <a:prstGeom prst="rect">
+            <a:avLst/>
+          </a:prstGeom>
+          <a:noFill/>
+        </p:spPr>
+        <p:txBody>
+          <a:bodyPr wrap="square">
+            <a:spAutoFit/>
+          </a:bodyPr>
+          <a:lstStyle/>
           <a:p>
             <a:pPr>
-              <a:spcAft>
-                <a:spcPts val="1600"/>
-              </a:spcAft>
-              <a:defRPr sz="2200">
-                <a:solidFill>
-                  <a:srgbClr val="323232"/>
+              <a:defRPr sz="1800">
+                <a:solidFill>
+                  <a:srgbClr val="E2E8F0"/>
                 </a:solidFill>
               </a:defRPr>
             </a:pPr>
             <a:r>
-              <a:t>• 책임있는 AI (Responsible AI) 프레임워크</a:t>
+              <a:t>Responsible AI 프레임워크 도입 확산</a:t>
             </a:r>
           </a:p>
         </p:txBody>
@@ -3769,7 +5703,7 @@
             <a:avLst/>
           </a:prstGeom>
           <a:solidFill>
-            <a:srgbClr val="10B981"/>
+            <a:srgbClr val="0F172A"/>
           </a:solidFill>
           <a:ln>
             <a:noFill/>
@@ -3805,8 +5739,8 @@
         </p:nvSpPr>
         <p:spPr>
           <a:xfrm>
-            <a:off x="457200" y="1828800"/>
-            <a:ext cx="8229600" cy="914400"/>
+            <a:off x="5029200" y="457200"/>
+            <a:ext cx="4572000" cy="5486400"/>
           </a:xfrm>
           <a:prstGeom prst="rect">
             <a:avLst/>
@@ -3819,10 +5753,10 @@
           </a:bodyPr>
           <a:lstStyle/>
           <a:p>
-            <a:pPr algn="ctr">
-              <a:defRPr sz="7200" b="1">
-                <a:solidFill>
-                  <a:srgbClr val="FFFFFF"/>
+            <a:pPr algn="r">
+              <a:defRPr sz="28000" b="1">
+                <a:solidFill>
+                  <a:srgbClr val="1E293B"/>
                 </a:solidFill>
               </a:defRPr>
             </a:pPr>
@@ -3834,14 +5768,57 @@
       </p:sp>
       <p:sp>
         <p:nvSpPr>
-          <p:cNvPr id="4" name="TextBox 3"/>
+          <p:cNvPr id="4" name="Rectangle 3"/>
+          <p:cNvSpPr/>
+          <p:nvPr/>
+        </p:nvSpPr>
+        <p:spPr>
+          <a:xfrm>
+            <a:off x="731520" y="2926080"/>
+            <a:ext cx="731520" cy="54864"/>
+          </a:xfrm>
+          <a:prstGeom prst="rect">
+            <a:avLst/>
+          </a:prstGeom>
+          <a:solidFill>
+            <a:srgbClr val="22C55E"/>
+          </a:solidFill>
+          <a:ln>
+            <a:noFill/>
+          </a:ln>
+        </p:spPr>
+        <p:style>
+          <a:lnRef idx="1">
+            <a:schemeClr val="accent1"/>
+          </a:lnRef>
+          <a:fillRef idx="3">
+            <a:schemeClr val="accent1"/>
+          </a:fillRef>
+          <a:effectRef idx="2">
+            <a:schemeClr val="accent1"/>
+          </a:effectRef>
+          <a:fontRef idx="minor">
+            <a:schemeClr val="lt1"/>
+          </a:fontRef>
+        </p:style>
+        <p:txBody>
+          <a:bodyPr rtlCol="0" anchor="ctr"/>
+          <a:lstStyle/>
+          <a:p>
+            <a:pPr algn="ctr"/>
+          </a:p>
+        </p:txBody>
+      </p:sp>
+      <p:sp>
+        <p:nvSpPr>
+          <p:cNvPr id="5" name="TextBox 4"/>
           <p:cNvSpPr txBox="1"/>
           <p:nvPr/>
         </p:nvSpPr>
         <p:spPr>
           <a:xfrm>
-            <a:off x="457200" y="2926080"/>
-            <a:ext cx="8229600" cy="914400"/>
+            <a:off x="731520" y="2286000"/>
+            <a:ext cx="1828800" cy="548640"/>
           </a:xfrm>
           <a:prstGeom prst="rect">
             <a:avLst/>
@@ -3854,8 +5831,43 @@
           </a:bodyPr>
           <a:lstStyle/>
           <a:p>
-            <a:pPr algn="ctr">
-              <a:defRPr sz="4000">
+            <a:pPr>
+              <a:defRPr sz="1400" b="1">
+                <a:solidFill>
+                  <a:srgbClr val="22C55E"/>
+                </a:solidFill>
+              </a:defRPr>
+            </a:pPr>
+            <a:r>
+              <a:t>SECTION 06</a:t>
+            </a:r>
+          </a:p>
+        </p:txBody>
+      </p:sp>
+      <p:sp>
+        <p:nvSpPr>
+          <p:cNvPr id="6" name="TextBox 5"/>
+          <p:cNvSpPr txBox="1"/>
+          <p:nvPr/>
+        </p:nvSpPr>
+        <p:spPr>
+          <a:xfrm>
+            <a:off x="731520" y="3200400"/>
+            <a:ext cx="6400800" cy="1097280"/>
+          </a:xfrm>
+          <a:prstGeom prst="rect">
+            <a:avLst/>
+          </a:prstGeom>
+          <a:noFill/>
+        </p:spPr>
+        <p:txBody>
+          <a:bodyPr wrap="none">
+            <a:spAutoFit/>
+          </a:bodyPr>
+          <a:lstStyle/>
+          <a:p>
+            <a:pPr>
+              <a:defRPr sz="4400" b="1">
                 <a:solidFill>
                   <a:srgbClr val="FFFFFF"/>
                 </a:solidFill>
@@ -3894,13 +5906,13 @@
         <p:spPr>
           <a:xfrm>
             <a:off x="0" y="0"/>
-            <a:ext cx="9144000" cy="1097280"/>
-          </a:xfrm>
-          <a:prstGeom prst="rect">
-            <a:avLst/>
-          </a:prstGeom>
-          <a:solidFill>
-            <a:srgbClr val="22C55E"/>
+            <a:ext cx="9144000" cy="6858000"/>
+          </a:xfrm>
+          <a:prstGeom prst="rect">
+            <a:avLst/>
+          </a:prstGeom>
+          <a:solidFill>
+            <a:srgbClr val="0F172A"/>
           </a:solidFill>
           <a:ln>
             <a:noFill/>
@@ -3930,14 +5942,57 @@
       </p:sp>
       <p:sp>
         <p:nvSpPr>
-          <p:cNvPr id="3" name="TextBox 2"/>
+          <p:cNvPr id="3" name="Rectangle 2"/>
+          <p:cNvSpPr/>
+          <p:nvPr/>
+        </p:nvSpPr>
+        <p:spPr>
+          <a:xfrm>
+            <a:off x="0" y="0"/>
+            <a:ext cx="137160" cy="6858000"/>
+          </a:xfrm>
+          <a:prstGeom prst="rect">
+            <a:avLst/>
+          </a:prstGeom>
+          <a:solidFill>
+            <a:srgbClr val="22C55E"/>
+          </a:solidFill>
+          <a:ln>
+            <a:noFill/>
+          </a:ln>
+        </p:spPr>
+        <p:style>
+          <a:lnRef idx="1">
+            <a:schemeClr val="accent1"/>
+          </a:lnRef>
+          <a:fillRef idx="3">
+            <a:schemeClr val="accent1"/>
+          </a:fillRef>
+          <a:effectRef idx="2">
+            <a:schemeClr val="accent1"/>
+          </a:effectRef>
+          <a:fontRef idx="minor">
+            <a:schemeClr val="lt1"/>
+          </a:fontRef>
+        </p:style>
+        <p:txBody>
+          <a:bodyPr rtlCol="0" anchor="ctr"/>
+          <a:lstStyle/>
+          <a:p>
+            <a:pPr algn="ctr"/>
+          </a:p>
+        </p:txBody>
+      </p:sp>
+      <p:sp>
+        <p:nvSpPr>
+          <p:cNvPr id="4" name="TextBox 3"/>
           <p:cNvSpPr txBox="1"/>
           <p:nvPr/>
         </p:nvSpPr>
         <p:spPr>
           <a:xfrm>
-            <a:off x="457200" y="274320"/>
-            <a:ext cx="8229600" cy="731520"/>
+            <a:off x="548640" y="320040"/>
+            <a:ext cx="7315200" cy="365760"/>
           </a:xfrm>
           <a:prstGeom prst="rect">
             <a:avLst/>
@@ -3951,28 +6006,98 @@
           <a:lstStyle/>
           <a:p>
             <a:pPr>
-              <a:defRPr sz="3600" b="1">
+              <a:defRPr sz="1200" b="1">
+                <a:solidFill>
+                  <a:srgbClr val="22C55E"/>
+                </a:solidFill>
+              </a:defRPr>
+            </a:pPr>
+            <a:r>
+              <a:t>SECTION 06 · 산업별 AI 적용</a:t>
+            </a:r>
+          </a:p>
+        </p:txBody>
+      </p:sp>
+      <p:sp>
+        <p:nvSpPr>
+          <p:cNvPr id="5" name="TextBox 4"/>
+          <p:cNvSpPr txBox="1"/>
+          <p:nvPr/>
+        </p:nvSpPr>
+        <p:spPr>
+          <a:xfrm>
+            <a:off x="548640" y="640080"/>
+            <a:ext cx="7315200" cy="640080"/>
+          </a:xfrm>
+          <a:prstGeom prst="rect">
+            <a:avLst/>
+          </a:prstGeom>
+          <a:noFill/>
+        </p:spPr>
+        <p:txBody>
+          <a:bodyPr wrap="none">
+            <a:spAutoFit/>
+          </a:bodyPr>
+          <a:lstStyle/>
+          <a:p>
+            <a:pPr>
+              <a:defRPr sz="3200" b="1">
                 <a:solidFill>
                   <a:srgbClr val="FFFFFF"/>
                 </a:solidFill>
               </a:defRPr>
             </a:pPr>
             <a:r>
-              <a:t>🏭 산업별 AI 적용 사례</a:t>
-            </a:r>
-          </a:p>
-        </p:txBody>
-      </p:sp>
-      <p:sp>
-        <p:nvSpPr>
-          <p:cNvPr id="4" name="TextBox 3"/>
+              <a:t>Industry Applications</a:t>
+            </a:r>
+          </a:p>
+        </p:txBody>
+      </p:sp>
+      <p:sp>
+        <p:nvSpPr>
+          <p:cNvPr id="6" name="TextBox 5"/>
           <p:cNvSpPr txBox="1"/>
           <p:nvPr/>
         </p:nvSpPr>
         <p:spPr>
           <a:xfrm>
-            <a:off x="640080" y="1463040"/>
-            <a:ext cx="7863840" cy="4572000"/>
+            <a:off x="548640" y="1645920"/>
+            <a:ext cx="3657600" cy="365760"/>
+          </a:xfrm>
+          <a:prstGeom prst="rect">
+            <a:avLst/>
+          </a:prstGeom>
+          <a:noFill/>
+        </p:spPr>
+        <p:txBody>
+          <a:bodyPr wrap="none">
+            <a:spAutoFit/>
+          </a:bodyPr>
+          <a:lstStyle/>
+          <a:p>
+            <a:pPr>
+              <a:defRPr sz="1800" b="1">
+                <a:solidFill>
+                  <a:srgbClr val="22C55E"/>
+                </a:solidFill>
+              </a:defRPr>
+            </a:pPr>
+            <a:r>
+              <a:t>Healthcare</a:t>
+            </a:r>
+          </a:p>
+        </p:txBody>
+      </p:sp>
+      <p:sp>
+        <p:nvSpPr>
+          <p:cNvPr id="7" name="TextBox 6"/>
+          <p:cNvSpPr txBox="1"/>
+          <p:nvPr/>
+        </p:nvSpPr>
+        <p:spPr>
+          <a:xfrm>
+            <a:off x="548640" y="2011680"/>
+            <a:ext cx="3657600" cy="731520"/>
           </a:xfrm>
           <a:prstGeom prst="rect">
             <a:avLst/>
@@ -3986,77 +6111,388 @@
           <a:lstStyle/>
           <a:p>
             <a:pPr>
-              <a:spcAft>
-                <a:spcPts val="1600"/>
-              </a:spcAft>
-              <a:defRPr sz="2200">
-                <a:solidFill>
-                  <a:srgbClr val="323232"/>
+              <a:defRPr sz="1500">
+                <a:solidFill>
+                  <a:srgbClr val="E2E8F0"/>
                 </a:solidFill>
               </a:defRPr>
             </a:pPr>
             <a:r>
-              <a:t>• 헬스케어: 신약 개발, 진단 보조, 맞춤형 치료</a:t>
-            </a:r>
-          </a:p>
+              <a:t>신약 개발 가속화, AI 진단 보조,</a:t>
+            </a:r>
+            <a:br/>
+            <a:r>
+              <a:t>개인 맞춤형 정밀 치료</a:t>
+            </a:r>
+          </a:p>
+        </p:txBody>
+      </p:sp>
+      <p:sp>
+        <p:nvSpPr>
+          <p:cNvPr id="8" name="TextBox 7"/>
+          <p:cNvSpPr txBox="1"/>
+          <p:nvPr/>
+        </p:nvSpPr>
+        <p:spPr>
+          <a:xfrm>
+            <a:off x="548640" y="2926080"/>
+            <a:ext cx="3657600" cy="365760"/>
+          </a:xfrm>
+          <a:prstGeom prst="rect">
+            <a:avLst/>
+          </a:prstGeom>
+          <a:noFill/>
+        </p:spPr>
+        <p:txBody>
+          <a:bodyPr wrap="none">
+            <a:spAutoFit/>
+          </a:bodyPr>
+          <a:lstStyle/>
           <a:p>
             <a:pPr>
-              <a:spcAft>
-                <a:spcPts val="1600"/>
-              </a:spcAft>
-              <a:defRPr sz="2200">
-                <a:solidFill>
-                  <a:srgbClr val="323232"/>
+              <a:defRPr sz="1800" b="1">
+                <a:solidFill>
+                  <a:srgbClr val="22C55E"/>
                 </a:solidFill>
               </a:defRPr>
             </a:pPr>
             <a:r>
-              <a:t>• 금융: 사기 탐지, 리스크 관리, 로보어드바이저</a:t>
-            </a:r>
-          </a:p>
+              <a:t>Finance</a:t>
+            </a:r>
+          </a:p>
+        </p:txBody>
+      </p:sp>
+      <p:sp>
+        <p:nvSpPr>
+          <p:cNvPr id="9" name="TextBox 8"/>
+          <p:cNvSpPr txBox="1"/>
+          <p:nvPr/>
+        </p:nvSpPr>
+        <p:spPr>
+          <a:xfrm>
+            <a:off x="548640" y="3291840"/>
+            <a:ext cx="3657600" cy="731520"/>
+          </a:xfrm>
+          <a:prstGeom prst="rect">
+            <a:avLst/>
+          </a:prstGeom>
+          <a:noFill/>
+        </p:spPr>
+        <p:txBody>
+          <a:bodyPr wrap="square">
+            <a:spAutoFit/>
+          </a:bodyPr>
+          <a:lstStyle/>
           <a:p>
             <a:pPr>
-              <a:spcAft>
-                <a:spcPts val="1600"/>
-              </a:spcAft>
-              <a:defRPr sz="2200">
-                <a:solidFill>
-                  <a:srgbClr val="323232"/>
+              <a:defRPr sz="1500">
+                <a:solidFill>
+                  <a:srgbClr val="E2E8F0"/>
                 </a:solidFill>
               </a:defRPr>
             </a:pPr>
             <a:r>
-              <a:t>• 제조: 예측 정비, 품질 관리, 스마트 팩토리</a:t>
-            </a:r>
-          </a:p>
+              <a:t>실시간 사기 탐지, 리스크 관리,</a:t>
+            </a:r>
+            <a:br/>
+            <a:r>
+              <a:t>AI 기반 로보어드바이저</a:t>
+            </a:r>
+          </a:p>
+        </p:txBody>
+      </p:sp>
+      <p:sp>
+        <p:nvSpPr>
+          <p:cNvPr id="10" name="TextBox 9"/>
+          <p:cNvSpPr txBox="1"/>
+          <p:nvPr/>
+        </p:nvSpPr>
+        <p:spPr>
+          <a:xfrm>
+            <a:off x="548640" y="4206240"/>
+            <a:ext cx="3657600" cy="365760"/>
+          </a:xfrm>
+          <a:prstGeom prst="rect">
+            <a:avLst/>
+          </a:prstGeom>
+          <a:noFill/>
+        </p:spPr>
+        <p:txBody>
+          <a:bodyPr wrap="none">
+            <a:spAutoFit/>
+          </a:bodyPr>
+          <a:lstStyle/>
           <a:p>
             <a:pPr>
-              <a:spcAft>
-                <a:spcPts val="1600"/>
-              </a:spcAft>
-              <a:defRPr sz="2200">
-                <a:solidFill>
-                  <a:srgbClr val="323232"/>
+              <a:defRPr sz="1800" b="1">
+                <a:solidFill>
+                  <a:srgbClr val="22C55E"/>
                 </a:solidFill>
               </a:defRPr>
             </a:pPr>
             <a:r>
-              <a:t>• 교육: 개인화 학습, AI 튜터, 평가 자동화</a:t>
-            </a:r>
-          </a:p>
+              <a:t>Manufacturing</a:t>
+            </a:r>
+          </a:p>
+        </p:txBody>
+      </p:sp>
+      <p:sp>
+        <p:nvSpPr>
+          <p:cNvPr id="11" name="TextBox 10"/>
+          <p:cNvSpPr txBox="1"/>
+          <p:nvPr/>
+        </p:nvSpPr>
+        <p:spPr>
+          <a:xfrm>
+            <a:off x="548640" y="4572000"/>
+            <a:ext cx="3657600" cy="731520"/>
+          </a:xfrm>
+          <a:prstGeom prst="rect">
+            <a:avLst/>
+          </a:prstGeom>
+          <a:noFill/>
+        </p:spPr>
+        <p:txBody>
+          <a:bodyPr wrap="square">
+            <a:spAutoFit/>
+          </a:bodyPr>
+          <a:lstStyle/>
           <a:p>
             <a:pPr>
-              <a:spcAft>
-                <a:spcPts val="1600"/>
-              </a:spcAft>
-              <a:defRPr sz="2200">
-                <a:solidFill>
-                  <a:srgbClr val="323232"/>
+              <a:defRPr sz="1500">
+                <a:solidFill>
+                  <a:srgbClr val="E2E8F0"/>
                 </a:solidFill>
               </a:defRPr>
             </a:pPr>
             <a:r>
-              <a:t>• 리테일: 추천 시스템, 재고 관리, 고객 서비스</a:t>
+              <a:t>예측 정비, 품질 검사 자동화,</a:t>
+            </a:r>
+            <a:br/>
+            <a:r>
+              <a:t>스마트 팩토리 구현</a:t>
+            </a:r>
+          </a:p>
+        </p:txBody>
+      </p:sp>
+      <p:sp>
+        <p:nvSpPr>
+          <p:cNvPr id="12" name="TextBox 11"/>
+          <p:cNvSpPr txBox="1"/>
+          <p:nvPr/>
+        </p:nvSpPr>
+        <p:spPr>
+          <a:xfrm>
+            <a:off x="4754880" y="1645920"/>
+            <a:ext cx="3657600" cy="365760"/>
+          </a:xfrm>
+          <a:prstGeom prst="rect">
+            <a:avLst/>
+          </a:prstGeom>
+          <a:noFill/>
+        </p:spPr>
+        <p:txBody>
+          <a:bodyPr wrap="none">
+            <a:spAutoFit/>
+          </a:bodyPr>
+          <a:lstStyle/>
+          <a:p>
+            <a:pPr>
+              <a:defRPr sz="1800" b="1">
+                <a:solidFill>
+                  <a:srgbClr val="22C55E"/>
+                </a:solidFill>
+              </a:defRPr>
+            </a:pPr>
+            <a:r>
+              <a:t>Education</a:t>
+            </a:r>
+          </a:p>
+        </p:txBody>
+      </p:sp>
+      <p:sp>
+        <p:nvSpPr>
+          <p:cNvPr id="13" name="TextBox 12"/>
+          <p:cNvSpPr txBox="1"/>
+          <p:nvPr/>
+        </p:nvSpPr>
+        <p:spPr>
+          <a:xfrm>
+            <a:off x="4754880" y="2011680"/>
+            <a:ext cx="3840480" cy="731520"/>
+          </a:xfrm>
+          <a:prstGeom prst="rect">
+            <a:avLst/>
+          </a:prstGeom>
+          <a:noFill/>
+        </p:spPr>
+        <p:txBody>
+          <a:bodyPr wrap="square">
+            <a:spAutoFit/>
+          </a:bodyPr>
+          <a:lstStyle/>
+          <a:p>
+            <a:pPr>
+              <a:defRPr sz="1500">
+                <a:solidFill>
+                  <a:srgbClr val="E2E8F0"/>
+                </a:solidFill>
+              </a:defRPr>
+            </a:pPr>
+            <a:r>
+              <a:t>적응형 학습 시스템, AI 튜터,</a:t>
+            </a:r>
+            <a:br/>
+            <a:r>
+              <a:t>자동 평가 및 피드백</a:t>
+            </a:r>
+          </a:p>
+        </p:txBody>
+      </p:sp>
+      <p:sp>
+        <p:nvSpPr>
+          <p:cNvPr id="14" name="TextBox 13"/>
+          <p:cNvSpPr txBox="1"/>
+          <p:nvPr/>
+        </p:nvSpPr>
+        <p:spPr>
+          <a:xfrm>
+            <a:off x="4754880" y="2926080"/>
+            <a:ext cx="3657600" cy="365760"/>
+          </a:xfrm>
+          <a:prstGeom prst="rect">
+            <a:avLst/>
+          </a:prstGeom>
+          <a:noFill/>
+        </p:spPr>
+        <p:txBody>
+          <a:bodyPr wrap="none">
+            <a:spAutoFit/>
+          </a:bodyPr>
+          <a:lstStyle/>
+          <a:p>
+            <a:pPr>
+              <a:defRPr sz="1800" b="1">
+                <a:solidFill>
+                  <a:srgbClr val="22C55E"/>
+                </a:solidFill>
+              </a:defRPr>
+            </a:pPr>
+            <a:r>
+              <a:t>Retail</a:t>
+            </a:r>
+          </a:p>
+        </p:txBody>
+      </p:sp>
+      <p:sp>
+        <p:nvSpPr>
+          <p:cNvPr id="15" name="TextBox 14"/>
+          <p:cNvSpPr txBox="1"/>
+          <p:nvPr/>
+        </p:nvSpPr>
+        <p:spPr>
+          <a:xfrm>
+            <a:off x="4754880" y="3291840"/>
+            <a:ext cx="3840480" cy="731520"/>
+          </a:xfrm>
+          <a:prstGeom prst="rect">
+            <a:avLst/>
+          </a:prstGeom>
+          <a:noFill/>
+        </p:spPr>
+        <p:txBody>
+          <a:bodyPr wrap="square">
+            <a:spAutoFit/>
+          </a:bodyPr>
+          <a:lstStyle/>
+          <a:p>
+            <a:pPr>
+              <a:defRPr sz="1500">
+                <a:solidFill>
+                  <a:srgbClr val="E2E8F0"/>
+                </a:solidFill>
+              </a:defRPr>
+            </a:pPr>
+            <a:r>
+              <a:t>초개인화 추천, 수요 예측,</a:t>
+            </a:r>
+            <a:br/>
+            <a:r>
+              <a:t>AI 고객 서비스 챗봇</a:t>
+            </a:r>
+          </a:p>
+        </p:txBody>
+      </p:sp>
+      <p:sp>
+        <p:nvSpPr>
+          <p:cNvPr id="16" name="TextBox 15"/>
+          <p:cNvSpPr txBox="1"/>
+          <p:nvPr/>
+        </p:nvSpPr>
+        <p:spPr>
+          <a:xfrm>
+            <a:off x="4754880" y="4206240"/>
+            <a:ext cx="3657600" cy="365760"/>
+          </a:xfrm>
+          <a:prstGeom prst="rect">
+            <a:avLst/>
+          </a:prstGeom>
+          <a:noFill/>
+        </p:spPr>
+        <p:txBody>
+          <a:bodyPr wrap="none">
+            <a:spAutoFit/>
+          </a:bodyPr>
+          <a:lstStyle/>
+          <a:p>
+            <a:pPr>
+              <a:defRPr sz="1800" b="1">
+                <a:solidFill>
+                  <a:srgbClr val="22C55E"/>
+                </a:solidFill>
+              </a:defRPr>
+            </a:pPr>
+            <a:r>
+              <a:t>Logistics</a:t>
+            </a:r>
+          </a:p>
+        </p:txBody>
+      </p:sp>
+      <p:sp>
+        <p:nvSpPr>
+          <p:cNvPr id="17" name="TextBox 16"/>
+          <p:cNvSpPr txBox="1"/>
+          <p:nvPr/>
+        </p:nvSpPr>
+        <p:spPr>
+          <a:xfrm>
+            <a:off x="4754880" y="4572000"/>
+            <a:ext cx="3840480" cy="731520"/>
+          </a:xfrm>
+          <a:prstGeom prst="rect">
+            <a:avLst/>
+          </a:prstGeom>
+          <a:noFill/>
+        </p:spPr>
+        <p:txBody>
+          <a:bodyPr wrap="square">
+            <a:spAutoFit/>
+          </a:bodyPr>
+          <a:lstStyle/>
+          <a:p>
+            <a:pPr>
+              <a:defRPr sz="1500">
+                <a:solidFill>
+                  <a:srgbClr val="E2E8F0"/>
+                </a:solidFill>
+              </a:defRPr>
+            </a:pPr>
+            <a:r>
+              <a:t>경로 최적화, 자율 배송,</a:t>
+            </a:r>
+            <a:br/>
+            <a:r>
+              <a:t>스마트 창고 관리</a:t>
             </a:r>
           </a:p>
         </p:txBody>
@@ -4094,7 +6530,7 @@
             <a:avLst/>
           </a:prstGeom>
           <a:solidFill>
-            <a:srgbClr val="10B981"/>
+            <a:srgbClr val="0F172A"/>
           </a:solidFill>
           <a:ln>
             <a:noFill/>
@@ -4130,8 +6566,8 @@
         </p:nvSpPr>
         <p:spPr>
           <a:xfrm>
-            <a:off x="457200" y="1828800"/>
-            <a:ext cx="8229600" cy="914400"/>
+            <a:off x="5029200" y="457200"/>
+            <a:ext cx="4572000" cy="5486400"/>
           </a:xfrm>
           <a:prstGeom prst="rect">
             <a:avLst/>
@@ -4144,10 +6580,10 @@
           </a:bodyPr>
           <a:lstStyle/>
           <a:p>
-            <a:pPr algn="ctr">
-              <a:defRPr sz="7200" b="1">
-                <a:solidFill>
-                  <a:srgbClr val="FFFFFF"/>
+            <a:pPr algn="r">
+              <a:defRPr sz="28000" b="1">
+                <a:solidFill>
+                  <a:srgbClr val="1E293B"/>
                 </a:solidFill>
               </a:defRPr>
             </a:pPr>
@@ -4159,14 +6595,57 @@
       </p:sp>
       <p:sp>
         <p:nvSpPr>
-          <p:cNvPr id="4" name="TextBox 3"/>
+          <p:cNvPr id="4" name="Rectangle 3"/>
+          <p:cNvSpPr/>
+          <p:nvPr/>
+        </p:nvSpPr>
+        <p:spPr>
+          <a:xfrm>
+            <a:off x="731520" y="2926080"/>
+            <a:ext cx="731520" cy="54864"/>
+          </a:xfrm>
+          <a:prstGeom prst="rect">
+            <a:avLst/>
+          </a:prstGeom>
+          <a:solidFill>
+            <a:srgbClr val="6366F1"/>
+          </a:solidFill>
+          <a:ln>
+            <a:noFill/>
+          </a:ln>
+        </p:spPr>
+        <p:style>
+          <a:lnRef idx="1">
+            <a:schemeClr val="accent1"/>
+          </a:lnRef>
+          <a:fillRef idx="3">
+            <a:schemeClr val="accent1"/>
+          </a:fillRef>
+          <a:effectRef idx="2">
+            <a:schemeClr val="accent1"/>
+          </a:effectRef>
+          <a:fontRef idx="minor">
+            <a:schemeClr val="lt1"/>
+          </a:fontRef>
+        </p:style>
+        <p:txBody>
+          <a:bodyPr rtlCol="0" anchor="ctr"/>
+          <a:lstStyle/>
+          <a:p>
+            <a:pPr algn="ctr"/>
+          </a:p>
+        </p:txBody>
+      </p:sp>
+      <p:sp>
+        <p:nvSpPr>
+          <p:cNvPr id="5" name="TextBox 4"/>
           <p:cNvSpPr txBox="1"/>
           <p:nvPr/>
         </p:nvSpPr>
         <p:spPr>
           <a:xfrm>
-            <a:off x="457200" y="2926080"/>
-            <a:ext cx="8229600" cy="914400"/>
+            <a:off x="731520" y="2286000"/>
+            <a:ext cx="1828800" cy="548640"/>
           </a:xfrm>
           <a:prstGeom prst="rect">
             <a:avLst/>
@@ -4179,8 +6658,43 @@
           </a:bodyPr>
           <a:lstStyle/>
           <a:p>
-            <a:pPr algn="ctr">
-              <a:defRPr sz="4000">
+            <a:pPr>
+              <a:defRPr sz="1400" b="1">
+                <a:solidFill>
+                  <a:srgbClr val="6366F1"/>
+                </a:solidFill>
+              </a:defRPr>
+            </a:pPr>
+            <a:r>
+              <a:t>SECTION 07</a:t>
+            </a:r>
+          </a:p>
+        </p:txBody>
+      </p:sp>
+      <p:sp>
+        <p:nvSpPr>
+          <p:cNvPr id="6" name="TextBox 5"/>
+          <p:cNvSpPr txBox="1"/>
+          <p:nvPr/>
+        </p:nvSpPr>
+        <p:spPr>
+          <a:xfrm>
+            <a:off x="731520" y="3200400"/>
+            <a:ext cx="6400800" cy="1097280"/>
+          </a:xfrm>
+          <a:prstGeom prst="rect">
+            <a:avLst/>
+          </a:prstGeom>
+          <a:noFill/>
+        </p:spPr>
+        <p:txBody>
+          <a:bodyPr wrap="none">
+            <a:spAutoFit/>
+          </a:bodyPr>
+          <a:lstStyle/>
+          <a:p>
+            <a:pPr>
+              <a:defRPr sz="4400" b="1">
                 <a:solidFill>
                   <a:srgbClr val="FFFFFF"/>
                 </a:solidFill>
@@ -4219,13 +6733,13 @@
         <p:spPr>
           <a:xfrm>
             <a:off x="0" y="0"/>
-            <a:ext cx="9144000" cy="1097280"/>
-          </a:xfrm>
-          <a:prstGeom prst="rect">
-            <a:avLst/>
-          </a:prstGeom>
-          <a:solidFill>
-            <a:srgbClr val="6366F1"/>
+            <a:ext cx="9144000" cy="6858000"/>
+          </a:xfrm>
+          <a:prstGeom prst="rect">
+            <a:avLst/>
+          </a:prstGeom>
+          <a:solidFill>
+            <a:srgbClr val="0F172A"/>
           </a:solidFill>
           <a:ln>
             <a:noFill/>
@@ -4255,14 +6769,57 @@
       </p:sp>
       <p:sp>
         <p:nvSpPr>
-          <p:cNvPr id="3" name="TextBox 2"/>
+          <p:cNvPr id="3" name="Rectangle 2"/>
+          <p:cNvSpPr/>
+          <p:nvPr/>
+        </p:nvSpPr>
+        <p:spPr>
+          <a:xfrm>
+            <a:off x="0" y="0"/>
+            <a:ext cx="137160" cy="6858000"/>
+          </a:xfrm>
+          <a:prstGeom prst="rect">
+            <a:avLst/>
+          </a:prstGeom>
+          <a:solidFill>
+            <a:srgbClr val="6366F1"/>
+          </a:solidFill>
+          <a:ln>
+            <a:noFill/>
+          </a:ln>
+        </p:spPr>
+        <p:style>
+          <a:lnRef idx="1">
+            <a:schemeClr val="accent1"/>
+          </a:lnRef>
+          <a:fillRef idx="3">
+            <a:schemeClr val="accent1"/>
+          </a:fillRef>
+          <a:effectRef idx="2">
+            <a:schemeClr val="accent1"/>
+          </a:effectRef>
+          <a:fontRef idx="minor">
+            <a:schemeClr val="lt1"/>
+          </a:fontRef>
+        </p:style>
+        <p:txBody>
+          <a:bodyPr rtlCol="0" anchor="ctr"/>
+          <a:lstStyle/>
+          <a:p>
+            <a:pPr algn="ctr"/>
+          </a:p>
+        </p:txBody>
+      </p:sp>
+      <p:sp>
+        <p:nvSpPr>
+          <p:cNvPr id="4" name="TextBox 3"/>
           <p:cNvSpPr txBox="1"/>
           <p:nvPr/>
         </p:nvSpPr>
         <p:spPr>
           <a:xfrm>
-            <a:off x="457200" y="274320"/>
-            <a:ext cx="8229600" cy="731520"/>
+            <a:off x="548640" y="320040"/>
+            <a:ext cx="7315200" cy="365760"/>
           </a:xfrm>
           <a:prstGeom prst="rect">
             <a:avLst/>
@@ -4276,28 +6833,227 @@
           <a:lstStyle/>
           <a:p>
             <a:pPr>
-              <a:defRPr sz="3600" b="1">
+              <a:defRPr sz="1200" b="1">
+                <a:solidFill>
+                  <a:srgbClr val="6366F1"/>
+                </a:solidFill>
+              </a:defRPr>
+            </a:pPr>
+            <a:r>
+              <a:t>SECTION 07 · 미래 전망</a:t>
+            </a:r>
+          </a:p>
+        </p:txBody>
+      </p:sp>
+      <p:sp>
+        <p:nvSpPr>
+          <p:cNvPr id="5" name="TextBox 4"/>
+          <p:cNvSpPr txBox="1"/>
+          <p:nvPr/>
+        </p:nvSpPr>
+        <p:spPr>
+          <a:xfrm>
+            <a:off x="548640" y="640080"/>
+            <a:ext cx="7315200" cy="640080"/>
+          </a:xfrm>
+          <a:prstGeom prst="rect">
+            <a:avLst/>
+          </a:prstGeom>
+          <a:noFill/>
+        </p:spPr>
+        <p:txBody>
+          <a:bodyPr wrap="none">
+            <a:spAutoFit/>
+          </a:bodyPr>
+          <a:lstStyle/>
+          <a:p>
+            <a:pPr>
+              <a:defRPr sz="3200" b="1">
                 <a:solidFill>
                   <a:srgbClr val="FFFFFF"/>
                 </a:solidFill>
               </a:defRPr>
             </a:pPr>
             <a:r>
-              <a:t>🔮 AI의 미래 전망</a:t>
-            </a:r>
-          </a:p>
-        </p:txBody>
-      </p:sp>
-      <p:sp>
-        <p:nvSpPr>
-          <p:cNvPr id="4" name="TextBox 3"/>
+              <a:t>Future Outlook</a:t>
+            </a:r>
+          </a:p>
+        </p:txBody>
+      </p:sp>
+      <p:sp>
+        <p:nvSpPr>
+          <p:cNvPr id="6" name="Rectangle 5"/>
+          <p:cNvSpPr/>
+          <p:nvPr/>
+        </p:nvSpPr>
+        <p:spPr>
+          <a:xfrm>
+            <a:off x="548640" y="1325880"/>
+            <a:ext cx="8046720" cy="13716"/>
+          </a:xfrm>
+          <a:prstGeom prst="rect">
+            <a:avLst/>
+          </a:prstGeom>
+          <a:solidFill>
+            <a:srgbClr val="1E293B"/>
+          </a:solidFill>
+          <a:ln>
+            <a:noFill/>
+          </a:ln>
+        </p:spPr>
+        <p:style>
+          <a:lnRef idx="1">
+            <a:schemeClr val="accent1"/>
+          </a:lnRef>
+          <a:fillRef idx="3">
+            <a:schemeClr val="accent1"/>
+          </a:fillRef>
+          <a:effectRef idx="2">
+            <a:schemeClr val="accent1"/>
+          </a:effectRef>
+          <a:fontRef idx="minor">
+            <a:schemeClr val="lt1"/>
+          </a:fontRef>
+        </p:style>
+        <p:txBody>
+          <a:bodyPr rtlCol="0" anchor="ctr"/>
+          <a:lstStyle/>
+          <a:p>
+            <a:pPr algn="ctr"/>
+          </a:p>
+        </p:txBody>
+      </p:sp>
+      <p:sp>
+        <p:nvSpPr>
+          <p:cNvPr id="7" name="Rounded Rectangle 6"/>
+          <p:cNvSpPr/>
+          <p:nvPr/>
+        </p:nvSpPr>
+        <p:spPr>
+          <a:xfrm>
+            <a:off x="548640" y="1554480"/>
+            <a:ext cx="8046720" cy="822960"/>
+          </a:xfrm>
+          <a:prstGeom prst="roundRect">
+            <a:avLst/>
+          </a:prstGeom>
+          <a:solidFill>
+            <a:srgbClr val="1E293B"/>
+          </a:solidFill>
+          <a:ln>
+            <a:noFill/>
+          </a:ln>
+        </p:spPr>
+        <p:style>
+          <a:lnRef idx="1">
+            <a:schemeClr val="accent1"/>
+          </a:lnRef>
+          <a:fillRef idx="3">
+            <a:schemeClr val="accent1"/>
+          </a:fillRef>
+          <a:effectRef idx="2">
+            <a:schemeClr val="accent1"/>
+          </a:effectRef>
+          <a:fontRef idx="minor">
+            <a:schemeClr val="lt1"/>
+          </a:fontRef>
+        </p:style>
+        <p:txBody>
+          <a:bodyPr rtlCol="0" anchor="ctr"/>
+          <a:lstStyle/>
+          <a:p>
+            <a:pPr algn="ctr"/>
+          </a:p>
+        </p:txBody>
+      </p:sp>
+      <p:sp>
+        <p:nvSpPr>
+          <p:cNvPr id="8" name="Oval 7"/>
+          <p:cNvSpPr/>
+          <p:nvPr/>
+        </p:nvSpPr>
+        <p:spPr>
+          <a:xfrm>
+            <a:off x="777240" y="1810512"/>
+            <a:ext cx="320040" cy="320040"/>
+          </a:xfrm>
+          <a:prstGeom prst="ellipse">
+            <a:avLst/>
+          </a:prstGeom>
+          <a:solidFill>
+            <a:srgbClr val="6366F1"/>
+          </a:solidFill>
+          <a:ln>
+            <a:noFill/>
+          </a:ln>
+        </p:spPr>
+        <p:style>
+          <a:lnRef idx="1">
+            <a:schemeClr val="accent1"/>
+          </a:lnRef>
+          <a:fillRef idx="3">
+            <a:schemeClr val="accent1"/>
+          </a:fillRef>
+          <a:effectRef idx="2">
+            <a:schemeClr val="accent1"/>
+          </a:effectRef>
+          <a:fontRef idx="minor">
+            <a:schemeClr val="lt1"/>
+          </a:fontRef>
+        </p:style>
+        <p:txBody>
+          <a:bodyPr rtlCol="0" anchor="ctr"/>
+          <a:lstStyle/>
+          <a:p>
+            <a:pPr algn="ctr"/>
+          </a:p>
+        </p:txBody>
+      </p:sp>
+      <p:sp>
+        <p:nvSpPr>
+          <p:cNvPr id="9" name="TextBox 8"/>
           <p:cNvSpPr txBox="1"/>
           <p:nvPr/>
         </p:nvSpPr>
         <p:spPr>
           <a:xfrm>
-            <a:off x="640080" y="1463040"/>
-            <a:ext cx="7863840" cy="4572000"/>
+            <a:off x="777240" y="1847088"/>
+            <a:ext cx="320040" cy="274320"/>
+          </a:xfrm>
+          <a:prstGeom prst="rect">
+            <a:avLst/>
+          </a:prstGeom>
+          <a:noFill/>
+        </p:spPr>
+        <p:txBody>
+          <a:bodyPr wrap="none">
+            <a:spAutoFit/>
+          </a:bodyPr>
+          <a:lstStyle/>
+          <a:p>
+            <a:pPr algn="ctr">
+              <a:defRPr sz="1400" b="1">
+                <a:solidFill>
+                  <a:srgbClr val="FFFFFF"/>
+                </a:solidFill>
+              </a:defRPr>
+            </a:pPr>
+            <a:r>
+              <a:t>1</a:t>
+            </a:r>
+          </a:p>
+        </p:txBody>
+      </p:sp>
+      <p:sp>
+        <p:nvSpPr>
+          <p:cNvPr id="10" name="TextBox 9"/>
+          <p:cNvSpPr txBox="1"/>
+          <p:nvPr/>
+        </p:nvSpPr>
+        <p:spPr>
+          <a:xfrm>
+            <a:off x="1280160" y="1783080"/>
+            <a:ext cx="7132320" cy="457200"/>
           </a:xfrm>
           <a:prstGeom prst="rect">
             <a:avLst/>
@@ -4311,77 +7067,638 @@
           <a:lstStyle/>
           <a:p>
             <a:pPr>
-              <a:spcAft>
-                <a:spcPts val="1600"/>
-              </a:spcAft>
-              <a:defRPr sz="2200">
-                <a:solidFill>
-                  <a:srgbClr val="323232"/>
+              <a:defRPr sz="1800">
+                <a:solidFill>
+                  <a:srgbClr val="E2E8F0"/>
                 </a:solidFill>
               </a:defRPr>
             </a:pPr>
             <a:r>
-              <a:t>• AGI (범용 인공지능)를 향한 지속적 발전</a:t>
-            </a:r>
-          </a:p>
+              <a:t>AGI(범용 인공지능)를 향한 지속적인 연구 개발</a:t>
+            </a:r>
+          </a:p>
+        </p:txBody>
+      </p:sp>
+      <p:sp>
+        <p:nvSpPr>
+          <p:cNvPr id="11" name="Rounded Rectangle 10"/>
+          <p:cNvSpPr/>
+          <p:nvPr/>
+        </p:nvSpPr>
+        <p:spPr>
+          <a:xfrm>
+            <a:off x="548640" y="2514600"/>
+            <a:ext cx="8046720" cy="822960"/>
+          </a:xfrm>
+          <a:prstGeom prst="roundRect">
+            <a:avLst/>
+          </a:prstGeom>
+          <a:solidFill>
+            <a:srgbClr val="1E293B"/>
+          </a:solidFill>
+          <a:ln>
+            <a:noFill/>
+          </a:ln>
+        </p:spPr>
+        <p:style>
+          <a:lnRef idx="1">
+            <a:schemeClr val="accent1"/>
+          </a:lnRef>
+          <a:fillRef idx="3">
+            <a:schemeClr val="accent1"/>
+          </a:fillRef>
+          <a:effectRef idx="2">
+            <a:schemeClr val="accent1"/>
+          </a:effectRef>
+          <a:fontRef idx="minor">
+            <a:schemeClr val="lt1"/>
+          </a:fontRef>
+        </p:style>
+        <p:txBody>
+          <a:bodyPr rtlCol="0" anchor="ctr"/>
+          <a:lstStyle/>
+          <a:p>
+            <a:pPr algn="ctr"/>
+          </a:p>
+        </p:txBody>
+      </p:sp>
+      <p:sp>
+        <p:nvSpPr>
+          <p:cNvPr id="12" name="Oval 11"/>
+          <p:cNvSpPr/>
+          <p:nvPr/>
+        </p:nvSpPr>
+        <p:spPr>
+          <a:xfrm>
+            <a:off x="777240" y="2770632"/>
+            <a:ext cx="320040" cy="320040"/>
+          </a:xfrm>
+          <a:prstGeom prst="ellipse">
+            <a:avLst/>
+          </a:prstGeom>
+          <a:solidFill>
+            <a:srgbClr val="6366F1"/>
+          </a:solidFill>
+          <a:ln>
+            <a:noFill/>
+          </a:ln>
+        </p:spPr>
+        <p:style>
+          <a:lnRef idx="1">
+            <a:schemeClr val="accent1"/>
+          </a:lnRef>
+          <a:fillRef idx="3">
+            <a:schemeClr val="accent1"/>
+          </a:fillRef>
+          <a:effectRef idx="2">
+            <a:schemeClr val="accent1"/>
+          </a:effectRef>
+          <a:fontRef idx="minor">
+            <a:schemeClr val="lt1"/>
+          </a:fontRef>
+        </p:style>
+        <p:txBody>
+          <a:bodyPr rtlCol="0" anchor="ctr"/>
+          <a:lstStyle/>
+          <a:p>
+            <a:pPr algn="ctr"/>
+          </a:p>
+        </p:txBody>
+      </p:sp>
+      <p:sp>
+        <p:nvSpPr>
+          <p:cNvPr id="13" name="TextBox 12"/>
+          <p:cNvSpPr txBox="1"/>
+          <p:nvPr/>
+        </p:nvSpPr>
+        <p:spPr>
+          <a:xfrm>
+            <a:off x="777240" y="2807208"/>
+            <a:ext cx="320040" cy="274320"/>
+          </a:xfrm>
+          <a:prstGeom prst="rect">
+            <a:avLst/>
+          </a:prstGeom>
+          <a:noFill/>
+        </p:spPr>
+        <p:txBody>
+          <a:bodyPr wrap="none">
+            <a:spAutoFit/>
+          </a:bodyPr>
+          <a:lstStyle/>
+          <a:p>
+            <a:pPr algn="ctr">
+              <a:defRPr sz="1400" b="1">
+                <a:solidFill>
+                  <a:srgbClr val="FFFFFF"/>
+                </a:solidFill>
+              </a:defRPr>
+            </a:pPr>
+            <a:r>
+              <a:t>2</a:t>
+            </a:r>
+          </a:p>
+        </p:txBody>
+      </p:sp>
+      <p:sp>
+        <p:nvSpPr>
+          <p:cNvPr id="14" name="TextBox 13"/>
+          <p:cNvSpPr txBox="1"/>
+          <p:nvPr/>
+        </p:nvSpPr>
+        <p:spPr>
+          <a:xfrm>
+            <a:off x="1280160" y="2743200"/>
+            <a:ext cx="7132320" cy="457200"/>
+          </a:xfrm>
+          <a:prstGeom prst="rect">
+            <a:avLst/>
+          </a:prstGeom>
+          <a:noFill/>
+        </p:spPr>
+        <p:txBody>
+          <a:bodyPr wrap="square">
+            <a:spAutoFit/>
+          </a:bodyPr>
+          <a:lstStyle/>
           <a:p>
             <a:pPr>
-              <a:spcAft>
-                <a:spcPts val="1600"/>
-              </a:spcAft>
-              <a:defRPr sz="2200">
-                <a:solidFill>
-                  <a:srgbClr val="323232"/>
+              <a:defRPr sz="1800">
+                <a:solidFill>
+                  <a:srgbClr val="E2E8F0"/>
                 </a:solidFill>
               </a:defRPr>
             </a:pPr>
             <a:r>
-              <a:t>• AI와 인간의 공존 및 협력 모델 정립</a:t>
-            </a:r>
-          </a:p>
+              <a:t>AI와 인간의 공존을 위한 협력 모델 정립</a:t>
+            </a:r>
+          </a:p>
+        </p:txBody>
+      </p:sp>
+      <p:sp>
+        <p:nvSpPr>
+          <p:cNvPr id="15" name="Rounded Rectangle 14"/>
+          <p:cNvSpPr/>
+          <p:nvPr/>
+        </p:nvSpPr>
+        <p:spPr>
+          <a:xfrm>
+            <a:off x="548640" y="3474720"/>
+            <a:ext cx="8046720" cy="822960"/>
+          </a:xfrm>
+          <a:prstGeom prst="roundRect">
+            <a:avLst/>
+          </a:prstGeom>
+          <a:solidFill>
+            <a:srgbClr val="1E293B"/>
+          </a:solidFill>
+          <a:ln>
+            <a:noFill/>
+          </a:ln>
+        </p:spPr>
+        <p:style>
+          <a:lnRef idx="1">
+            <a:schemeClr val="accent1"/>
+          </a:lnRef>
+          <a:fillRef idx="3">
+            <a:schemeClr val="accent1"/>
+          </a:fillRef>
+          <a:effectRef idx="2">
+            <a:schemeClr val="accent1"/>
+          </a:effectRef>
+          <a:fontRef idx="minor">
+            <a:schemeClr val="lt1"/>
+          </a:fontRef>
+        </p:style>
+        <p:txBody>
+          <a:bodyPr rtlCol="0" anchor="ctr"/>
+          <a:lstStyle/>
+          <a:p>
+            <a:pPr algn="ctr"/>
+          </a:p>
+        </p:txBody>
+      </p:sp>
+      <p:sp>
+        <p:nvSpPr>
+          <p:cNvPr id="16" name="Oval 15"/>
+          <p:cNvSpPr/>
+          <p:nvPr/>
+        </p:nvSpPr>
+        <p:spPr>
+          <a:xfrm>
+            <a:off x="777240" y="3730752"/>
+            <a:ext cx="320040" cy="320040"/>
+          </a:xfrm>
+          <a:prstGeom prst="ellipse">
+            <a:avLst/>
+          </a:prstGeom>
+          <a:solidFill>
+            <a:srgbClr val="6366F1"/>
+          </a:solidFill>
+          <a:ln>
+            <a:noFill/>
+          </a:ln>
+        </p:spPr>
+        <p:style>
+          <a:lnRef idx="1">
+            <a:schemeClr val="accent1"/>
+          </a:lnRef>
+          <a:fillRef idx="3">
+            <a:schemeClr val="accent1"/>
+          </a:fillRef>
+          <a:effectRef idx="2">
+            <a:schemeClr val="accent1"/>
+          </a:effectRef>
+          <a:fontRef idx="minor">
+            <a:schemeClr val="lt1"/>
+          </a:fontRef>
+        </p:style>
+        <p:txBody>
+          <a:bodyPr rtlCol="0" anchor="ctr"/>
+          <a:lstStyle/>
+          <a:p>
+            <a:pPr algn="ctr"/>
+          </a:p>
+        </p:txBody>
+      </p:sp>
+      <p:sp>
+        <p:nvSpPr>
+          <p:cNvPr id="17" name="TextBox 16"/>
+          <p:cNvSpPr txBox="1"/>
+          <p:nvPr/>
+        </p:nvSpPr>
+        <p:spPr>
+          <a:xfrm>
+            <a:off x="777240" y="3767328"/>
+            <a:ext cx="320040" cy="274320"/>
+          </a:xfrm>
+          <a:prstGeom prst="rect">
+            <a:avLst/>
+          </a:prstGeom>
+          <a:noFill/>
+        </p:spPr>
+        <p:txBody>
+          <a:bodyPr wrap="none">
+            <a:spAutoFit/>
+          </a:bodyPr>
+          <a:lstStyle/>
+          <a:p>
+            <a:pPr algn="ctr">
+              <a:defRPr sz="1400" b="1">
+                <a:solidFill>
+                  <a:srgbClr val="FFFFFF"/>
+                </a:solidFill>
+              </a:defRPr>
+            </a:pPr>
+            <a:r>
+              <a:t>3</a:t>
+            </a:r>
+          </a:p>
+        </p:txBody>
+      </p:sp>
+      <p:sp>
+        <p:nvSpPr>
+          <p:cNvPr id="18" name="TextBox 17"/>
+          <p:cNvSpPr txBox="1"/>
+          <p:nvPr/>
+        </p:nvSpPr>
+        <p:spPr>
+          <a:xfrm>
+            <a:off x="1280160" y="3703320"/>
+            <a:ext cx="7132320" cy="457200"/>
+          </a:xfrm>
+          <a:prstGeom prst="rect">
+            <a:avLst/>
+          </a:prstGeom>
+          <a:noFill/>
+        </p:spPr>
+        <p:txBody>
+          <a:bodyPr wrap="square">
+            <a:spAutoFit/>
+          </a:bodyPr>
+          <a:lstStyle/>
           <a:p>
             <a:pPr>
-              <a:spcAft>
-                <a:spcPts val="1600"/>
-              </a:spcAft>
-              <a:defRPr sz="2200">
-                <a:solidFill>
-                  <a:srgbClr val="323232"/>
+              <a:defRPr sz="1800">
+                <a:solidFill>
+                  <a:srgbClr val="E2E8F0"/>
                 </a:solidFill>
               </a:defRPr>
             </a:pPr>
             <a:r>
-              <a:t>• 새로운 일자리 창출과 기존 직업의 변화</a:t>
-            </a:r>
-          </a:p>
+              <a:t>AI로 인한 새로운 직업 창출과 기존 직무의 재정의</a:t>
+            </a:r>
+          </a:p>
+        </p:txBody>
+      </p:sp>
+      <p:sp>
+        <p:nvSpPr>
+          <p:cNvPr id="19" name="Rounded Rectangle 18"/>
+          <p:cNvSpPr/>
+          <p:nvPr/>
+        </p:nvSpPr>
+        <p:spPr>
+          <a:xfrm>
+            <a:off x="548640" y="4434840"/>
+            <a:ext cx="8046720" cy="822960"/>
+          </a:xfrm>
+          <a:prstGeom prst="roundRect">
+            <a:avLst/>
+          </a:prstGeom>
+          <a:solidFill>
+            <a:srgbClr val="1E293B"/>
+          </a:solidFill>
+          <a:ln>
+            <a:noFill/>
+          </a:ln>
+        </p:spPr>
+        <p:style>
+          <a:lnRef idx="1">
+            <a:schemeClr val="accent1"/>
+          </a:lnRef>
+          <a:fillRef idx="3">
+            <a:schemeClr val="accent1"/>
+          </a:fillRef>
+          <a:effectRef idx="2">
+            <a:schemeClr val="accent1"/>
+          </a:effectRef>
+          <a:fontRef idx="minor">
+            <a:schemeClr val="lt1"/>
+          </a:fontRef>
+        </p:style>
+        <p:txBody>
+          <a:bodyPr rtlCol="0" anchor="ctr"/>
+          <a:lstStyle/>
+          <a:p>
+            <a:pPr algn="ctr"/>
+          </a:p>
+        </p:txBody>
+      </p:sp>
+      <p:sp>
+        <p:nvSpPr>
+          <p:cNvPr id="20" name="Oval 19"/>
+          <p:cNvSpPr/>
+          <p:nvPr/>
+        </p:nvSpPr>
+        <p:spPr>
+          <a:xfrm>
+            <a:off x="777240" y="4690872"/>
+            <a:ext cx="320040" cy="320040"/>
+          </a:xfrm>
+          <a:prstGeom prst="ellipse">
+            <a:avLst/>
+          </a:prstGeom>
+          <a:solidFill>
+            <a:srgbClr val="6366F1"/>
+          </a:solidFill>
+          <a:ln>
+            <a:noFill/>
+          </a:ln>
+        </p:spPr>
+        <p:style>
+          <a:lnRef idx="1">
+            <a:schemeClr val="accent1"/>
+          </a:lnRef>
+          <a:fillRef idx="3">
+            <a:schemeClr val="accent1"/>
+          </a:fillRef>
+          <a:effectRef idx="2">
+            <a:schemeClr val="accent1"/>
+          </a:effectRef>
+          <a:fontRef idx="minor">
+            <a:schemeClr val="lt1"/>
+          </a:fontRef>
+        </p:style>
+        <p:txBody>
+          <a:bodyPr rtlCol="0" anchor="ctr"/>
+          <a:lstStyle/>
+          <a:p>
+            <a:pPr algn="ctr"/>
+          </a:p>
+        </p:txBody>
+      </p:sp>
+      <p:sp>
+        <p:nvSpPr>
+          <p:cNvPr id="21" name="TextBox 20"/>
+          <p:cNvSpPr txBox="1"/>
+          <p:nvPr/>
+        </p:nvSpPr>
+        <p:spPr>
+          <a:xfrm>
+            <a:off x="777240" y="4727448"/>
+            <a:ext cx="320040" cy="274320"/>
+          </a:xfrm>
+          <a:prstGeom prst="rect">
+            <a:avLst/>
+          </a:prstGeom>
+          <a:noFill/>
+        </p:spPr>
+        <p:txBody>
+          <a:bodyPr wrap="none">
+            <a:spAutoFit/>
+          </a:bodyPr>
+          <a:lstStyle/>
+          <a:p>
+            <a:pPr algn="ctr">
+              <a:defRPr sz="1400" b="1">
+                <a:solidFill>
+                  <a:srgbClr val="FFFFFF"/>
+                </a:solidFill>
+              </a:defRPr>
+            </a:pPr>
+            <a:r>
+              <a:t>4</a:t>
+            </a:r>
+          </a:p>
+        </p:txBody>
+      </p:sp>
+      <p:sp>
+        <p:nvSpPr>
+          <p:cNvPr id="22" name="TextBox 21"/>
+          <p:cNvSpPr txBox="1"/>
+          <p:nvPr/>
+        </p:nvSpPr>
+        <p:spPr>
+          <a:xfrm>
+            <a:off x="1280160" y="4663440"/>
+            <a:ext cx="7132320" cy="457200"/>
+          </a:xfrm>
+          <a:prstGeom prst="rect">
+            <a:avLst/>
+          </a:prstGeom>
+          <a:noFill/>
+        </p:spPr>
+        <p:txBody>
+          <a:bodyPr wrap="square">
+            <a:spAutoFit/>
+          </a:bodyPr>
+          <a:lstStyle/>
           <a:p>
             <a:pPr>
-              <a:spcAft>
-                <a:spcPts val="1600"/>
-              </a:spcAft>
-              <a:defRPr sz="2200">
-                <a:solidFill>
-                  <a:srgbClr val="323232"/>
+              <a:defRPr sz="1800">
+                <a:solidFill>
+                  <a:srgbClr val="E2E8F0"/>
                 </a:solidFill>
               </a:defRPr>
             </a:pPr>
             <a:r>
-              <a:t>• AI 민주화: 누구나 AI를 활용하는 시대</a:t>
-            </a:r>
-          </a:p>
+              <a:t>AI 민주화 - 누구나 AI를 쉽게 활용하는 시대</a:t>
+            </a:r>
+          </a:p>
+        </p:txBody>
+      </p:sp>
+      <p:sp>
+        <p:nvSpPr>
+          <p:cNvPr id="23" name="Rounded Rectangle 22"/>
+          <p:cNvSpPr/>
+          <p:nvPr/>
+        </p:nvSpPr>
+        <p:spPr>
+          <a:xfrm>
+            <a:off x="548640" y="5394960"/>
+            <a:ext cx="8046720" cy="822960"/>
+          </a:xfrm>
+          <a:prstGeom prst="roundRect">
+            <a:avLst/>
+          </a:prstGeom>
+          <a:solidFill>
+            <a:srgbClr val="1E293B"/>
+          </a:solidFill>
+          <a:ln>
+            <a:noFill/>
+          </a:ln>
+        </p:spPr>
+        <p:style>
+          <a:lnRef idx="1">
+            <a:schemeClr val="accent1"/>
+          </a:lnRef>
+          <a:fillRef idx="3">
+            <a:schemeClr val="accent1"/>
+          </a:fillRef>
+          <a:effectRef idx="2">
+            <a:schemeClr val="accent1"/>
+          </a:effectRef>
+          <a:fontRef idx="minor">
+            <a:schemeClr val="lt1"/>
+          </a:fontRef>
+        </p:style>
+        <p:txBody>
+          <a:bodyPr rtlCol="0" anchor="ctr"/>
+          <a:lstStyle/>
+          <a:p>
+            <a:pPr algn="ctr"/>
+          </a:p>
+        </p:txBody>
+      </p:sp>
+      <p:sp>
+        <p:nvSpPr>
+          <p:cNvPr id="24" name="Oval 23"/>
+          <p:cNvSpPr/>
+          <p:nvPr/>
+        </p:nvSpPr>
+        <p:spPr>
+          <a:xfrm>
+            <a:off x="777240" y="5650992"/>
+            <a:ext cx="320040" cy="320040"/>
+          </a:xfrm>
+          <a:prstGeom prst="ellipse">
+            <a:avLst/>
+          </a:prstGeom>
+          <a:solidFill>
+            <a:srgbClr val="6366F1"/>
+          </a:solidFill>
+          <a:ln>
+            <a:noFill/>
+          </a:ln>
+        </p:spPr>
+        <p:style>
+          <a:lnRef idx="1">
+            <a:schemeClr val="accent1"/>
+          </a:lnRef>
+          <a:fillRef idx="3">
+            <a:schemeClr val="accent1"/>
+          </a:fillRef>
+          <a:effectRef idx="2">
+            <a:schemeClr val="accent1"/>
+          </a:effectRef>
+          <a:fontRef idx="minor">
+            <a:schemeClr val="lt1"/>
+          </a:fontRef>
+        </p:style>
+        <p:txBody>
+          <a:bodyPr rtlCol="0" anchor="ctr"/>
+          <a:lstStyle/>
+          <a:p>
+            <a:pPr algn="ctr"/>
+          </a:p>
+        </p:txBody>
+      </p:sp>
+      <p:sp>
+        <p:nvSpPr>
+          <p:cNvPr id="25" name="TextBox 24"/>
+          <p:cNvSpPr txBox="1"/>
+          <p:nvPr/>
+        </p:nvSpPr>
+        <p:spPr>
+          <a:xfrm>
+            <a:off x="777240" y="5687568"/>
+            <a:ext cx="320040" cy="274320"/>
+          </a:xfrm>
+          <a:prstGeom prst="rect">
+            <a:avLst/>
+          </a:prstGeom>
+          <a:noFill/>
+        </p:spPr>
+        <p:txBody>
+          <a:bodyPr wrap="none">
+            <a:spAutoFit/>
+          </a:bodyPr>
+          <a:lstStyle/>
+          <a:p>
+            <a:pPr algn="ctr">
+              <a:defRPr sz="1400" b="1">
+                <a:solidFill>
+                  <a:srgbClr val="FFFFFF"/>
+                </a:solidFill>
+              </a:defRPr>
+            </a:pPr>
+            <a:r>
+              <a:t>5</a:t>
+            </a:r>
+          </a:p>
+        </p:txBody>
+      </p:sp>
+      <p:sp>
+        <p:nvSpPr>
+          <p:cNvPr id="26" name="TextBox 25"/>
+          <p:cNvSpPr txBox="1"/>
+          <p:nvPr/>
+        </p:nvSpPr>
+        <p:spPr>
+          <a:xfrm>
+            <a:off x="1280160" y="5623560"/>
+            <a:ext cx="7132320" cy="457200"/>
+          </a:xfrm>
+          <a:prstGeom prst="rect">
+            <a:avLst/>
+          </a:prstGeom>
+          <a:noFill/>
+        </p:spPr>
+        <p:txBody>
+          <a:bodyPr wrap="square">
+            <a:spAutoFit/>
+          </a:bodyPr>
+          <a:lstStyle/>
           <a:p>
             <a:pPr>
-              <a:spcAft>
-                <a:spcPts val="1600"/>
-              </a:spcAft>
-              <a:defRPr sz="2200">
-                <a:solidFill>
-                  <a:srgbClr val="323232"/>
+              <a:defRPr sz="1800">
+                <a:solidFill>
+                  <a:srgbClr val="E2E8F0"/>
                 </a:solidFill>
               </a:defRPr>
             </a:pPr>
             <a:r>
-              <a:t>• 지속가능한 AI: 에너지 효율성 개선</a:t>
+              <a:t>Green AI - 에너지 효율적인 지속가능한 AI 개발</a:t>
             </a:r>
           </a:p>
         </p:txBody>
@@ -4419,7 +7736,7 @@
             <a:avLst/>
           </a:prstGeom>
           <a:solidFill>
-            <a:srgbClr val="1E3A8A"/>
+            <a:srgbClr val="0F172A"/>
           </a:solidFill>
           <a:ln>
             <a:noFill/>
@@ -4449,14 +7766,143 @@
       </p:sp>
       <p:sp>
         <p:nvSpPr>
-          <p:cNvPr id="3" name="TextBox 2"/>
+          <p:cNvPr id="3" name="Rectangle 2"/>
+          <p:cNvSpPr/>
+          <p:nvPr/>
+        </p:nvSpPr>
+        <p:spPr>
+          <a:xfrm>
+            <a:off x="0" y="0"/>
+            <a:ext cx="9144000" cy="73152"/>
+          </a:xfrm>
+          <a:prstGeom prst="rect">
+            <a:avLst/>
+          </a:prstGeom>
+          <a:solidFill>
+            <a:srgbClr val="6366F1"/>
+          </a:solidFill>
+          <a:ln>
+            <a:noFill/>
+          </a:ln>
+        </p:spPr>
+        <p:style>
+          <a:lnRef idx="1">
+            <a:schemeClr val="accent1"/>
+          </a:lnRef>
+          <a:fillRef idx="3">
+            <a:schemeClr val="accent1"/>
+          </a:fillRef>
+          <a:effectRef idx="2">
+            <a:schemeClr val="accent1"/>
+          </a:effectRef>
+          <a:fontRef idx="minor">
+            <a:schemeClr val="lt1"/>
+          </a:fontRef>
+        </p:style>
+        <p:txBody>
+          <a:bodyPr rtlCol="0" anchor="ctr"/>
+          <a:lstStyle/>
+          <a:p>
+            <a:pPr algn="ctr"/>
+          </a:p>
+        </p:txBody>
+      </p:sp>
+      <p:sp>
+        <p:nvSpPr>
+          <p:cNvPr id="4" name="Rectangle 3"/>
+          <p:cNvSpPr/>
+          <p:nvPr/>
+        </p:nvSpPr>
+        <p:spPr>
+          <a:xfrm>
+            <a:off x="0" y="6784848"/>
+            <a:ext cx="9144000" cy="73152"/>
+          </a:xfrm>
+          <a:prstGeom prst="rect">
+            <a:avLst/>
+          </a:prstGeom>
+          <a:solidFill>
+            <a:srgbClr val="6366F1"/>
+          </a:solidFill>
+          <a:ln>
+            <a:noFill/>
+          </a:ln>
+        </p:spPr>
+        <p:style>
+          <a:lnRef idx="1">
+            <a:schemeClr val="accent1"/>
+          </a:lnRef>
+          <a:fillRef idx="3">
+            <a:schemeClr val="accent1"/>
+          </a:fillRef>
+          <a:effectRef idx="2">
+            <a:schemeClr val="accent1"/>
+          </a:effectRef>
+          <a:fontRef idx="minor">
+            <a:schemeClr val="lt1"/>
+          </a:fontRef>
+        </p:style>
+        <p:txBody>
+          <a:bodyPr rtlCol="0" anchor="ctr"/>
+          <a:lstStyle/>
+          <a:p>
+            <a:pPr algn="ctr"/>
+          </a:p>
+        </p:txBody>
+      </p:sp>
+      <p:sp>
+        <p:nvSpPr>
+          <p:cNvPr id="5" name="Oval 4"/>
+          <p:cNvSpPr/>
+          <p:nvPr/>
+        </p:nvSpPr>
+        <p:spPr>
+          <a:xfrm>
+            <a:off x="5943600" y="4114800"/>
+            <a:ext cx="3657600" cy="3657600"/>
+          </a:xfrm>
+          <a:prstGeom prst="ellipse">
+            <a:avLst/>
+          </a:prstGeom>
+          <a:solidFill>
+            <a:srgbClr val="1E293B"/>
+          </a:solidFill>
+          <a:ln>
+            <a:noFill/>
+          </a:ln>
+        </p:spPr>
+        <p:style>
+          <a:lnRef idx="1">
+            <a:schemeClr val="accent1"/>
+          </a:lnRef>
+          <a:fillRef idx="3">
+            <a:schemeClr val="accent1"/>
+          </a:fillRef>
+          <a:effectRef idx="2">
+            <a:schemeClr val="accent1"/>
+          </a:effectRef>
+          <a:fontRef idx="minor">
+            <a:schemeClr val="lt1"/>
+          </a:fontRef>
+        </p:style>
+        <p:txBody>
+          <a:bodyPr rtlCol="0" anchor="ctr"/>
+          <a:lstStyle/>
+          <a:p>
+            <a:pPr algn="ctr"/>
+          </a:p>
+        </p:txBody>
+      </p:sp>
+      <p:sp>
+        <p:nvSpPr>
+          <p:cNvPr id="6" name="TextBox 5"/>
           <p:cNvSpPr txBox="1"/>
           <p:nvPr/>
         </p:nvSpPr>
         <p:spPr>
           <a:xfrm>
-            <a:off x="457200" y="2560320"/>
-            <a:ext cx="8229600" cy="1371600"/>
+            <a:off x="731520" y="2286000"/>
+            <a:ext cx="7315200" cy="914400"/>
           </a:xfrm>
           <a:prstGeom prst="rect">
             <a:avLst/>
@@ -4469,29 +7915,29 @@
           </a:bodyPr>
           <a:lstStyle/>
           <a:p>
-            <a:pPr algn="ctr">
-              <a:defRPr sz="5400" b="1">
+            <a:pPr>
+              <a:defRPr sz="6400" b="1">
                 <a:solidFill>
                   <a:srgbClr val="FFFFFF"/>
                 </a:solidFill>
               </a:defRPr>
             </a:pPr>
             <a:r>
-              <a:t>감사합니다</a:t>
-            </a:r>
-          </a:p>
-        </p:txBody>
-      </p:sp>
-      <p:sp>
-        <p:nvSpPr>
-          <p:cNvPr id="4" name="TextBox 3"/>
+              <a:t>THANK YOU</a:t>
+            </a:r>
+          </a:p>
+        </p:txBody>
+      </p:sp>
+      <p:sp>
+        <p:nvSpPr>
+          <p:cNvPr id="7" name="TextBox 6"/>
           <p:cNvSpPr txBox="1"/>
           <p:nvPr/>
         </p:nvSpPr>
         <p:spPr>
           <a:xfrm>
-            <a:off x="457200" y="4114800"/>
-            <a:ext cx="8229600" cy="731520"/>
+            <a:off x="731520" y="3291840"/>
+            <a:ext cx="5486400" cy="457200"/>
           </a:xfrm>
           <a:prstGeom prst="rect">
             <a:avLst/>
@@ -4504,15 +7950,93 @@
           </a:bodyPr>
           <a:lstStyle/>
           <a:p>
-            <a:pPr algn="ctr">
-              <a:defRPr sz="2400">
-                <a:solidFill>
-                  <a:srgbClr val="C8C8C8"/>
+            <a:pPr>
+              <a:defRPr sz="2000">
+                <a:solidFill>
+                  <a:srgbClr val="6366F1"/>
                 </a:solidFill>
               </a:defRPr>
             </a:pPr>
             <a:r>
-              <a:t>AI 트렌드 2025</a:t>
+              <a:t>AI Trends 2025</a:t>
+            </a:r>
+          </a:p>
+        </p:txBody>
+      </p:sp>
+      <p:sp>
+        <p:nvSpPr>
+          <p:cNvPr id="8" name="Rectangle 7"/>
+          <p:cNvSpPr/>
+          <p:nvPr/>
+        </p:nvSpPr>
+        <p:spPr>
+          <a:xfrm>
+            <a:off x="731520" y="3840480"/>
+            <a:ext cx="1371600" cy="36576"/>
+          </a:xfrm>
+          <a:prstGeom prst="rect">
+            <a:avLst/>
+          </a:prstGeom>
+          <a:solidFill>
+            <a:srgbClr val="6366F1"/>
+          </a:solidFill>
+          <a:ln>
+            <a:noFill/>
+          </a:ln>
+        </p:spPr>
+        <p:style>
+          <a:lnRef idx="1">
+            <a:schemeClr val="accent1"/>
+          </a:lnRef>
+          <a:fillRef idx="3">
+            <a:schemeClr val="accent1"/>
+          </a:fillRef>
+          <a:effectRef idx="2">
+            <a:schemeClr val="accent1"/>
+          </a:effectRef>
+          <a:fontRef idx="minor">
+            <a:schemeClr val="lt1"/>
+          </a:fontRef>
+        </p:style>
+        <p:txBody>
+          <a:bodyPr rtlCol="0" anchor="ctr"/>
+          <a:lstStyle/>
+          <a:p>
+            <a:pPr algn="ctr"/>
+          </a:p>
+        </p:txBody>
+      </p:sp>
+      <p:sp>
+        <p:nvSpPr>
+          <p:cNvPr id="9" name="TextBox 8"/>
+          <p:cNvSpPr txBox="1"/>
+          <p:nvPr/>
+        </p:nvSpPr>
+        <p:spPr>
+          <a:xfrm>
+            <a:off x="731520" y="4114800"/>
+            <a:ext cx="5486400" cy="731520"/>
+          </a:xfrm>
+          <a:prstGeom prst="rect">
+            <a:avLst/>
+          </a:prstGeom>
+          <a:noFill/>
+        </p:spPr>
+        <p:txBody>
+          <a:bodyPr wrap="none">
+            <a:spAutoFit/>
+          </a:bodyPr>
+          <a:lstStyle/>
+          <a:p>
+            <a:pPr>
+              <a:defRPr sz="1600">
+                <a:solidFill>
+                  <a:srgbClr val="94A3B8"/>
+                </a:solidFill>
+              </a:defRPr>
+            </a:pPr>
+            <a:r>
+              <a:t>The Future is Intelligent</a:t>
             </a:r>
           </a:p>
         </p:txBody>
@@ -4544,13 +8068,13 @@
         <p:spPr>
           <a:xfrm>
             <a:off x="0" y="0"/>
-            <a:ext cx="9144000" cy="1097280"/>
-          </a:xfrm>
-          <a:prstGeom prst="rect">
-            <a:avLst/>
-          </a:prstGeom>
-          <a:solidFill>
-            <a:srgbClr val="6B7280"/>
+            <a:ext cx="9144000" cy="6858000"/>
+          </a:xfrm>
+          <a:prstGeom prst="rect">
+            <a:avLst/>
+          </a:prstGeom>
+          <a:solidFill>
+            <a:srgbClr val="0F172A"/>
           </a:solidFill>
           <a:ln>
             <a:noFill/>
@@ -4580,14 +8104,57 @@
       </p:sp>
       <p:sp>
         <p:nvSpPr>
-          <p:cNvPr id="3" name="TextBox 2"/>
+          <p:cNvPr id="3" name="Rectangle 2"/>
+          <p:cNvSpPr/>
+          <p:nvPr/>
+        </p:nvSpPr>
+        <p:spPr>
+          <a:xfrm>
+            <a:off x="0" y="0"/>
+            <a:ext cx="137160" cy="6858000"/>
+          </a:xfrm>
+          <a:prstGeom prst="rect">
+            <a:avLst/>
+          </a:prstGeom>
+          <a:solidFill>
+            <a:srgbClr val="6366F1"/>
+          </a:solidFill>
+          <a:ln>
+            <a:noFill/>
+          </a:ln>
+        </p:spPr>
+        <p:style>
+          <a:lnRef idx="1">
+            <a:schemeClr val="accent1"/>
+          </a:lnRef>
+          <a:fillRef idx="3">
+            <a:schemeClr val="accent1"/>
+          </a:fillRef>
+          <a:effectRef idx="2">
+            <a:schemeClr val="accent1"/>
+          </a:effectRef>
+          <a:fontRef idx="minor">
+            <a:schemeClr val="lt1"/>
+          </a:fontRef>
+        </p:style>
+        <p:txBody>
+          <a:bodyPr rtlCol="0" anchor="ctr"/>
+          <a:lstStyle/>
+          <a:p>
+            <a:pPr algn="ctr"/>
+          </a:p>
+        </p:txBody>
+      </p:sp>
+      <p:sp>
+        <p:nvSpPr>
+          <p:cNvPr id="4" name="TextBox 3"/>
           <p:cNvSpPr txBox="1"/>
           <p:nvPr/>
         </p:nvSpPr>
         <p:spPr>
           <a:xfrm>
-            <a:off x="457200" y="274320"/>
-            <a:ext cx="8229600" cy="731520"/>
+            <a:off x="548640" y="365760"/>
+            <a:ext cx="2743200" cy="457200"/>
           </a:xfrm>
           <a:prstGeom prst="rect">
             <a:avLst/>
@@ -4601,28 +8168,71 @@
           <a:lstStyle/>
           <a:p>
             <a:pPr>
-              <a:defRPr sz="3600" b="1">
-                <a:solidFill>
-                  <a:srgbClr val="FFFFFF"/>
+              <a:defRPr sz="1400" b="1">
+                <a:solidFill>
+                  <a:srgbClr val="6366F1"/>
                 </a:solidFill>
               </a:defRPr>
             </a:pPr>
             <a:r>
-              <a:t>📋 목차</a:t>
-            </a:r>
-          </a:p>
-        </p:txBody>
-      </p:sp>
-      <p:sp>
-        <p:nvSpPr>
-          <p:cNvPr id="4" name="TextBox 3"/>
+              <a:t>CONTENTS</a:t>
+            </a:r>
+          </a:p>
+        </p:txBody>
+      </p:sp>
+      <p:sp>
+        <p:nvSpPr>
+          <p:cNvPr id="5" name="Rounded Rectangle 4"/>
+          <p:cNvSpPr/>
+          <p:nvPr/>
+        </p:nvSpPr>
+        <p:spPr>
+          <a:xfrm>
+            <a:off x="548640" y="1097280"/>
+            <a:ext cx="640080" cy="502920"/>
+          </a:xfrm>
+          <a:prstGeom prst="roundRect">
+            <a:avLst/>
+          </a:prstGeom>
+          <a:solidFill>
+            <a:srgbClr val="8B5CF6"/>
+          </a:solidFill>
+          <a:ln>
+            <a:noFill/>
+          </a:ln>
+        </p:spPr>
+        <p:style>
+          <a:lnRef idx="1">
+            <a:schemeClr val="accent1"/>
+          </a:lnRef>
+          <a:fillRef idx="3">
+            <a:schemeClr val="accent1"/>
+          </a:fillRef>
+          <a:effectRef idx="2">
+            <a:schemeClr val="accent1"/>
+          </a:effectRef>
+          <a:fontRef idx="minor">
+            <a:schemeClr val="lt1"/>
+          </a:fontRef>
+        </p:style>
+        <p:txBody>
+          <a:bodyPr rtlCol="0" anchor="ctr"/>
+          <a:lstStyle/>
+          <a:p>
+            <a:pPr algn="ctr"/>
+          </a:p>
+        </p:txBody>
+      </p:sp>
+      <p:sp>
+        <p:nvSpPr>
+          <p:cNvPr id="6" name="TextBox 5"/>
           <p:cNvSpPr txBox="1"/>
           <p:nvPr/>
         </p:nvSpPr>
         <p:spPr>
           <a:xfrm>
-            <a:off x="640080" y="1463040"/>
-            <a:ext cx="7863840" cy="4572000"/>
+            <a:off x="548640" y="1170432"/>
+            <a:ext cx="640080" cy="365760"/>
           </a:xfrm>
           <a:prstGeom prst="rect">
             <a:avLst/>
@@ -4630,113 +8240,733 @@
           <a:noFill/>
         </p:spPr>
         <p:txBody>
-          <a:bodyPr wrap="square">
+          <a:bodyPr wrap="none">
             <a:spAutoFit/>
           </a:bodyPr>
           <a:lstStyle/>
           <a:p>
-            <a:pPr>
-              <a:spcAft>
-                <a:spcPts val="1600"/>
-              </a:spcAft>
+            <a:pPr algn="ctr">
+              <a:defRPr sz="1800" b="1">
+                <a:solidFill>
+                  <a:srgbClr val="FFFFFF"/>
+                </a:solidFill>
+              </a:defRPr>
+            </a:pPr>
+            <a:r>
+              <a:t>01</a:t>
+            </a:r>
+          </a:p>
+        </p:txBody>
+      </p:sp>
+      <p:sp>
+        <p:nvSpPr>
+          <p:cNvPr id="7" name="TextBox 6"/>
+          <p:cNvSpPr txBox="1"/>
+          <p:nvPr/>
+        </p:nvSpPr>
+        <p:spPr>
+          <a:xfrm>
+            <a:off x="1371600" y="1188720"/>
+            <a:ext cx="6400800" cy="457200"/>
+          </a:xfrm>
+          <a:prstGeom prst="rect">
+            <a:avLst/>
+          </a:prstGeom>
+          <a:noFill/>
+        </p:spPr>
+        <p:txBody>
+          <a:bodyPr wrap="none">
+            <a:spAutoFit/>
+          </a:bodyPr>
+          <a:lstStyle/>
+          <a:p>
+            <a:pPr algn="l">
               <a:defRPr sz="2200">
                 <a:solidFill>
-                  <a:srgbClr val="323232"/>
+                  <a:srgbClr val="FFFFFF"/>
                 </a:solidFill>
               </a:defRPr>
             </a:pPr>
             <a:r>
-              <a:t>• 생성형 AI의 진화</a:t>
-            </a:r>
-          </a:p>
-          <a:p>
-            <a:pPr>
-              <a:spcAft>
-                <a:spcPts val="1600"/>
-              </a:spcAft>
+              <a:t>생성형 AI의 진화</a:t>
+            </a:r>
+          </a:p>
+        </p:txBody>
+      </p:sp>
+      <p:sp>
+        <p:nvSpPr>
+          <p:cNvPr id="8" name="Rounded Rectangle 7"/>
+          <p:cNvSpPr/>
+          <p:nvPr/>
+        </p:nvSpPr>
+        <p:spPr>
+          <a:xfrm>
+            <a:off x="548640" y="1874520"/>
+            <a:ext cx="640080" cy="502920"/>
+          </a:xfrm>
+          <a:prstGeom prst="roundRect">
+            <a:avLst/>
+          </a:prstGeom>
+          <a:solidFill>
+            <a:srgbClr val="EC4899"/>
+          </a:solidFill>
+          <a:ln>
+            <a:noFill/>
+          </a:ln>
+        </p:spPr>
+        <p:style>
+          <a:lnRef idx="1">
+            <a:schemeClr val="accent1"/>
+          </a:lnRef>
+          <a:fillRef idx="3">
+            <a:schemeClr val="accent1"/>
+          </a:fillRef>
+          <a:effectRef idx="2">
+            <a:schemeClr val="accent1"/>
+          </a:effectRef>
+          <a:fontRef idx="minor">
+            <a:schemeClr val="lt1"/>
+          </a:fontRef>
+        </p:style>
+        <p:txBody>
+          <a:bodyPr rtlCol="0" anchor="ctr"/>
+          <a:lstStyle/>
+          <a:p>
+            <a:pPr algn="ctr"/>
+          </a:p>
+        </p:txBody>
+      </p:sp>
+      <p:sp>
+        <p:nvSpPr>
+          <p:cNvPr id="9" name="TextBox 8"/>
+          <p:cNvSpPr txBox="1"/>
+          <p:nvPr/>
+        </p:nvSpPr>
+        <p:spPr>
+          <a:xfrm>
+            <a:off x="548640" y="1947672"/>
+            <a:ext cx="640080" cy="365760"/>
+          </a:xfrm>
+          <a:prstGeom prst="rect">
+            <a:avLst/>
+          </a:prstGeom>
+          <a:noFill/>
+        </p:spPr>
+        <p:txBody>
+          <a:bodyPr wrap="none">
+            <a:spAutoFit/>
+          </a:bodyPr>
+          <a:lstStyle/>
+          <a:p>
+            <a:pPr algn="ctr">
+              <a:defRPr sz="1800" b="1">
+                <a:solidFill>
+                  <a:srgbClr val="FFFFFF"/>
+                </a:solidFill>
+              </a:defRPr>
+            </a:pPr>
+            <a:r>
+              <a:t>02</a:t>
+            </a:r>
+          </a:p>
+        </p:txBody>
+      </p:sp>
+      <p:sp>
+        <p:nvSpPr>
+          <p:cNvPr id="10" name="TextBox 9"/>
+          <p:cNvSpPr txBox="1"/>
+          <p:nvPr/>
+        </p:nvSpPr>
+        <p:spPr>
+          <a:xfrm>
+            <a:off x="1371600" y="1965960"/>
+            <a:ext cx="6400800" cy="457200"/>
+          </a:xfrm>
+          <a:prstGeom prst="rect">
+            <a:avLst/>
+          </a:prstGeom>
+          <a:noFill/>
+        </p:spPr>
+        <p:txBody>
+          <a:bodyPr wrap="none">
+            <a:spAutoFit/>
+          </a:bodyPr>
+          <a:lstStyle/>
+          <a:p>
+            <a:pPr algn="l">
               <a:defRPr sz="2200">
                 <a:solidFill>
-                  <a:srgbClr val="323232"/>
+                  <a:srgbClr val="FFFFFF"/>
                 </a:solidFill>
               </a:defRPr>
             </a:pPr>
             <a:r>
-              <a:t>• 멀티모달 AI</a:t>
-            </a:r>
-          </a:p>
-          <a:p>
-            <a:pPr>
-              <a:spcAft>
-                <a:spcPts val="1600"/>
-              </a:spcAft>
+              <a:t>멀티모달 AI</a:t>
+            </a:r>
+          </a:p>
+        </p:txBody>
+      </p:sp>
+      <p:sp>
+        <p:nvSpPr>
+          <p:cNvPr id="11" name="Rounded Rectangle 10"/>
+          <p:cNvSpPr/>
+          <p:nvPr/>
+        </p:nvSpPr>
+        <p:spPr>
+          <a:xfrm>
+            <a:off x="548640" y="2651760"/>
+            <a:ext cx="640080" cy="502920"/>
+          </a:xfrm>
+          <a:prstGeom prst="roundRect">
+            <a:avLst/>
+          </a:prstGeom>
+          <a:solidFill>
+            <a:srgbClr val="0EA5E9"/>
+          </a:solidFill>
+          <a:ln>
+            <a:noFill/>
+          </a:ln>
+        </p:spPr>
+        <p:style>
+          <a:lnRef idx="1">
+            <a:schemeClr val="accent1"/>
+          </a:lnRef>
+          <a:fillRef idx="3">
+            <a:schemeClr val="accent1"/>
+          </a:fillRef>
+          <a:effectRef idx="2">
+            <a:schemeClr val="accent1"/>
+          </a:effectRef>
+          <a:fontRef idx="minor">
+            <a:schemeClr val="lt1"/>
+          </a:fontRef>
+        </p:style>
+        <p:txBody>
+          <a:bodyPr rtlCol="0" anchor="ctr"/>
+          <a:lstStyle/>
+          <a:p>
+            <a:pPr algn="ctr"/>
+          </a:p>
+        </p:txBody>
+      </p:sp>
+      <p:sp>
+        <p:nvSpPr>
+          <p:cNvPr id="12" name="TextBox 11"/>
+          <p:cNvSpPr txBox="1"/>
+          <p:nvPr/>
+        </p:nvSpPr>
+        <p:spPr>
+          <a:xfrm>
+            <a:off x="548640" y="2724912"/>
+            <a:ext cx="640080" cy="365760"/>
+          </a:xfrm>
+          <a:prstGeom prst="rect">
+            <a:avLst/>
+          </a:prstGeom>
+          <a:noFill/>
+        </p:spPr>
+        <p:txBody>
+          <a:bodyPr wrap="none">
+            <a:spAutoFit/>
+          </a:bodyPr>
+          <a:lstStyle/>
+          <a:p>
+            <a:pPr algn="ctr">
+              <a:defRPr sz="1800" b="1">
+                <a:solidFill>
+                  <a:srgbClr val="FFFFFF"/>
+                </a:solidFill>
+              </a:defRPr>
+            </a:pPr>
+            <a:r>
+              <a:t>03</a:t>
+            </a:r>
+          </a:p>
+        </p:txBody>
+      </p:sp>
+      <p:sp>
+        <p:nvSpPr>
+          <p:cNvPr id="13" name="TextBox 12"/>
+          <p:cNvSpPr txBox="1"/>
+          <p:nvPr/>
+        </p:nvSpPr>
+        <p:spPr>
+          <a:xfrm>
+            <a:off x="1371600" y="2743200"/>
+            <a:ext cx="6400800" cy="457200"/>
+          </a:xfrm>
+          <a:prstGeom prst="rect">
+            <a:avLst/>
+          </a:prstGeom>
+          <a:noFill/>
+        </p:spPr>
+        <p:txBody>
+          <a:bodyPr wrap="none">
+            <a:spAutoFit/>
+          </a:bodyPr>
+          <a:lstStyle/>
+          <a:p>
+            <a:pPr algn="l">
               <a:defRPr sz="2200">
                 <a:solidFill>
-                  <a:srgbClr val="323232"/>
+                  <a:srgbClr val="FFFFFF"/>
                 </a:solidFill>
               </a:defRPr>
             </a:pPr>
             <a:r>
-              <a:t>• AI 에이전트</a:t>
-            </a:r>
-          </a:p>
-          <a:p>
-            <a:pPr>
-              <a:spcAft>
-                <a:spcPts val="1600"/>
-              </a:spcAft>
+              <a:t>AI 에이전트</a:t>
+            </a:r>
+          </a:p>
+        </p:txBody>
+      </p:sp>
+      <p:sp>
+        <p:nvSpPr>
+          <p:cNvPr id="14" name="Rounded Rectangle 13"/>
+          <p:cNvSpPr/>
+          <p:nvPr/>
+        </p:nvSpPr>
+        <p:spPr>
+          <a:xfrm>
+            <a:off x="548640" y="3429000"/>
+            <a:ext cx="640080" cy="502920"/>
+          </a:xfrm>
+          <a:prstGeom prst="roundRect">
+            <a:avLst/>
+          </a:prstGeom>
+          <a:solidFill>
+            <a:srgbClr val="14B8A6"/>
+          </a:solidFill>
+          <a:ln>
+            <a:noFill/>
+          </a:ln>
+        </p:spPr>
+        <p:style>
+          <a:lnRef idx="1">
+            <a:schemeClr val="accent1"/>
+          </a:lnRef>
+          <a:fillRef idx="3">
+            <a:schemeClr val="accent1"/>
+          </a:fillRef>
+          <a:effectRef idx="2">
+            <a:schemeClr val="accent1"/>
+          </a:effectRef>
+          <a:fontRef idx="minor">
+            <a:schemeClr val="lt1"/>
+          </a:fontRef>
+        </p:style>
+        <p:txBody>
+          <a:bodyPr rtlCol="0" anchor="ctr"/>
+          <a:lstStyle/>
+          <a:p>
+            <a:pPr algn="ctr"/>
+          </a:p>
+        </p:txBody>
+      </p:sp>
+      <p:sp>
+        <p:nvSpPr>
+          <p:cNvPr id="15" name="TextBox 14"/>
+          <p:cNvSpPr txBox="1"/>
+          <p:nvPr/>
+        </p:nvSpPr>
+        <p:spPr>
+          <a:xfrm>
+            <a:off x="548640" y="3502152"/>
+            <a:ext cx="640080" cy="365760"/>
+          </a:xfrm>
+          <a:prstGeom prst="rect">
+            <a:avLst/>
+          </a:prstGeom>
+          <a:noFill/>
+        </p:spPr>
+        <p:txBody>
+          <a:bodyPr wrap="none">
+            <a:spAutoFit/>
+          </a:bodyPr>
+          <a:lstStyle/>
+          <a:p>
+            <a:pPr algn="ctr">
+              <a:defRPr sz="1800" b="1">
+                <a:solidFill>
+                  <a:srgbClr val="FFFFFF"/>
+                </a:solidFill>
+              </a:defRPr>
+            </a:pPr>
+            <a:r>
+              <a:t>04</a:t>
+            </a:r>
+          </a:p>
+        </p:txBody>
+      </p:sp>
+      <p:sp>
+        <p:nvSpPr>
+          <p:cNvPr id="16" name="TextBox 15"/>
+          <p:cNvSpPr txBox="1"/>
+          <p:nvPr/>
+        </p:nvSpPr>
+        <p:spPr>
+          <a:xfrm>
+            <a:off x="1371600" y="3520440"/>
+            <a:ext cx="6400800" cy="457200"/>
+          </a:xfrm>
+          <a:prstGeom prst="rect">
+            <a:avLst/>
+          </a:prstGeom>
+          <a:noFill/>
+        </p:spPr>
+        <p:txBody>
+          <a:bodyPr wrap="none">
+            <a:spAutoFit/>
+          </a:bodyPr>
+          <a:lstStyle/>
+          <a:p>
+            <a:pPr algn="l">
               <a:defRPr sz="2200">
                 <a:solidFill>
-                  <a:srgbClr val="323232"/>
+                  <a:srgbClr val="FFFFFF"/>
                 </a:solidFill>
               </a:defRPr>
             </a:pPr>
             <a:r>
-              <a:t>• 엣지 AI &amp; 온디바이스 AI</a:t>
-            </a:r>
-          </a:p>
-          <a:p>
-            <a:pPr>
-              <a:spcAft>
-                <a:spcPts val="1600"/>
-              </a:spcAft>
+              <a:t>엣지 AI</a:t>
+            </a:r>
+          </a:p>
+        </p:txBody>
+      </p:sp>
+      <p:sp>
+        <p:nvSpPr>
+          <p:cNvPr id="17" name="Rounded Rectangle 16"/>
+          <p:cNvSpPr/>
+          <p:nvPr/>
+        </p:nvSpPr>
+        <p:spPr>
+          <a:xfrm>
+            <a:off x="548640" y="4206240"/>
+            <a:ext cx="640080" cy="502920"/>
+          </a:xfrm>
+          <a:prstGeom prst="roundRect">
+            <a:avLst/>
+          </a:prstGeom>
+          <a:solidFill>
+            <a:srgbClr val="F59E0B"/>
+          </a:solidFill>
+          <a:ln>
+            <a:noFill/>
+          </a:ln>
+        </p:spPr>
+        <p:style>
+          <a:lnRef idx="1">
+            <a:schemeClr val="accent1"/>
+          </a:lnRef>
+          <a:fillRef idx="3">
+            <a:schemeClr val="accent1"/>
+          </a:fillRef>
+          <a:effectRef idx="2">
+            <a:schemeClr val="accent1"/>
+          </a:effectRef>
+          <a:fontRef idx="minor">
+            <a:schemeClr val="lt1"/>
+          </a:fontRef>
+        </p:style>
+        <p:txBody>
+          <a:bodyPr rtlCol="0" anchor="ctr"/>
+          <a:lstStyle/>
+          <a:p>
+            <a:pPr algn="ctr"/>
+          </a:p>
+        </p:txBody>
+      </p:sp>
+      <p:sp>
+        <p:nvSpPr>
+          <p:cNvPr id="18" name="TextBox 17"/>
+          <p:cNvSpPr txBox="1"/>
+          <p:nvPr/>
+        </p:nvSpPr>
+        <p:spPr>
+          <a:xfrm>
+            <a:off x="548640" y="4279392"/>
+            <a:ext cx="640080" cy="365760"/>
+          </a:xfrm>
+          <a:prstGeom prst="rect">
+            <a:avLst/>
+          </a:prstGeom>
+          <a:noFill/>
+        </p:spPr>
+        <p:txBody>
+          <a:bodyPr wrap="none">
+            <a:spAutoFit/>
+          </a:bodyPr>
+          <a:lstStyle/>
+          <a:p>
+            <a:pPr algn="ctr">
+              <a:defRPr sz="1800" b="1">
+                <a:solidFill>
+                  <a:srgbClr val="FFFFFF"/>
+                </a:solidFill>
+              </a:defRPr>
+            </a:pPr>
+            <a:r>
+              <a:t>05</a:t>
+            </a:r>
+          </a:p>
+        </p:txBody>
+      </p:sp>
+      <p:sp>
+        <p:nvSpPr>
+          <p:cNvPr id="19" name="TextBox 18"/>
+          <p:cNvSpPr txBox="1"/>
+          <p:nvPr/>
+        </p:nvSpPr>
+        <p:spPr>
+          <a:xfrm>
+            <a:off x="1371600" y="4297680"/>
+            <a:ext cx="6400800" cy="457200"/>
+          </a:xfrm>
+          <a:prstGeom prst="rect">
+            <a:avLst/>
+          </a:prstGeom>
+          <a:noFill/>
+        </p:spPr>
+        <p:txBody>
+          <a:bodyPr wrap="none">
+            <a:spAutoFit/>
+          </a:bodyPr>
+          <a:lstStyle/>
+          <a:p>
+            <a:pPr algn="l">
               <a:defRPr sz="2200">
                 <a:solidFill>
-                  <a:srgbClr val="323232"/>
+                  <a:srgbClr val="FFFFFF"/>
                 </a:solidFill>
               </a:defRPr>
             </a:pPr>
             <a:r>
-              <a:t>• AI 규제와 윤리</a:t>
-            </a:r>
-          </a:p>
-          <a:p>
-            <a:pPr>
-              <a:spcAft>
-                <a:spcPts val="1600"/>
-              </a:spcAft>
+              <a:t>AI 규제와 윤리</a:t>
+            </a:r>
+          </a:p>
+        </p:txBody>
+      </p:sp>
+      <p:sp>
+        <p:nvSpPr>
+          <p:cNvPr id="20" name="Rounded Rectangle 19"/>
+          <p:cNvSpPr/>
+          <p:nvPr/>
+        </p:nvSpPr>
+        <p:spPr>
+          <a:xfrm>
+            <a:off x="548640" y="4983480"/>
+            <a:ext cx="640080" cy="502920"/>
+          </a:xfrm>
+          <a:prstGeom prst="roundRect">
+            <a:avLst/>
+          </a:prstGeom>
+          <a:solidFill>
+            <a:srgbClr val="22C55E"/>
+          </a:solidFill>
+          <a:ln>
+            <a:noFill/>
+          </a:ln>
+        </p:spPr>
+        <p:style>
+          <a:lnRef idx="1">
+            <a:schemeClr val="accent1"/>
+          </a:lnRef>
+          <a:fillRef idx="3">
+            <a:schemeClr val="accent1"/>
+          </a:fillRef>
+          <a:effectRef idx="2">
+            <a:schemeClr val="accent1"/>
+          </a:effectRef>
+          <a:fontRef idx="minor">
+            <a:schemeClr val="lt1"/>
+          </a:fontRef>
+        </p:style>
+        <p:txBody>
+          <a:bodyPr rtlCol="0" anchor="ctr"/>
+          <a:lstStyle/>
+          <a:p>
+            <a:pPr algn="ctr"/>
+          </a:p>
+        </p:txBody>
+      </p:sp>
+      <p:sp>
+        <p:nvSpPr>
+          <p:cNvPr id="21" name="TextBox 20"/>
+          <p:cNvSpPr txBox="1"/>
+          <p:nvPr/>
+        </p:nvSpPr>
+        <p:spPr>
+          <a:xfrm>
+            <a:off x="548640" y="5056632"/>
+            <a:ext cx="640080" cy="365760"/>
+          </a:xfrm>
+          <a:prstGeom prst="rect">
+            <a:avLst/>
+          </a:prstGeom>
+          <a:noFill/>
+        </p:spPr>
+        <p:txBody>
+          <a:bodyPr wrap="none">
+            <a:spAutoFit/>
+          </a:bodyPr>
+          <a:lstStyle/>
+          <a:p>
+            <a:pPr algn="ctr">
+              <a:defRPr sz="1800" b="1">
+                <a:solidFill>
+                  <a:srgbClr val="FFFFFF"/>
+                </a:solidFill>
+              </a:defRPr>
+            </a:pPr>
+            <a:r>
+              <a:t>06</a:t>
+            </a:r>
+          </a:p>
+        </p:txBody>
+      </p:sp>
+      <p:sp>
+        <p:nvSpPr>
+          <p:cNvPr id="22" name="TextBox 21"/>
+          <p:cNvSpPr txBox="1"/>
+          <p:nvPr/>
+        </p:nvSpPr>
+        <p:spPr>
+          <a:xfrm>
+            <a:off x="1371600" y="5074920"/>
+            <a:ext cx="6400800" cy="457200"/>
+          </a:xfrm>
+          <a:prstGeom prst="rect">
+            <a:avLst/>
+          </a:prstGeom>
+          <a:noFill/>
+        </p:spPr>
+        <p:txBody>
+          <a:bodyPr wrap="none">
+            <a:spAutoFit/>
+          </a:bodyPr>
+          <a:lstStyle/>
+          <a:p>
+            <a:pPr algn="l">
               <a:defRPr sz="2200">
                 <a:solidFill>
-                  <a:srgbClr val="323232"/>
+                  <a:srgbClr val="FFFFFF"/>
                 </a:solidFill>
               </a:defRPr>
             </a:pPr>
             <a:r>
-              <a:t>• 산업별 AI 적용 사례</a:t>
-            </a:r>
-          </a:p>
-          <a:p>
-            <a:pPr>
-              <a:spcAft>
-                <a:spcPts val="1600"/>
-              </a:spcAft>
+              <a:t>산업별 AI 적용</a:t>
+            </a:r>
+          </a:p>
+        </p:txBody>
+      </p:sp>
+      <p:sp>
+        <p:nvSpPr>
+          <p:cNvPr id="23" name="Rounded Rectangle 22"/>
+          <p:cNvSpPr/>
+          <p:nvPr/>
+        </p:nvSpPr>
+        <p:spPr>
+          <a:xfrm>
+            <a:off x="548640" y="5760720"/>
+            <a:ext cx="640080" cy="502920"/>
+          </a:xfrm>
+          <a:prstGeom prst="roundRect">
+            <a:avLst/>
+          </a:prstGeom>
+          <a:solidFill>
+            <a:srgbClr val="6366F1"/>
+          </a:solidFill>
+          <a:ln>
+            <a:noFill/>
+          </a:ln>
+        </p:spPr>
+        <p:style>
+          <a:lnRef idx="1">
+            <a:schemeClr val="accent1"/>
+          </a:lnRef>
+          <a:fillRef idx="3">
+            <a:schemeClr val="accent1"/>
+          </a:fillRef>
+          <a:effectRef idx="2">
+            <a:schemeClr val="accent1"/>
+          </a:effectRef>
+          <a:fontRef idx="minor">
+            <a:schemeClr val="lt1"/>
+          </a:fontRef>
+        </p:style>
+        <p:txBody>
+          <a:bodyPr rtlCol="0" anchor="ctr"/>
+          <a:lstStyle/>
+          <a:p>
+            <a:pPr algn="ctr"/>
+          </a:p>
+        </p:txBody>
+      </p:sp>
+      <p:sp>
+        <p:nvSpPr>
+          <p:cNvPr id="24" name="TextBox 23"/>
+          <p:cNvSpPr txBox="1"/>
+          <p:nvPr/>
+        </p:nvSpPr>
+        <p:spPr>
+          <a:xfrm>
+            <a:off x="548640" y="5833872"/>
+            <a:ext cx="640080" cy="365760"/>
+          </a:xfrm>
+          <a:prstGeom prst="rect">
+            <a:avLst/>
+          </a:prstGeom>
+          <a:noFill/>
+        </p:spPr>
+        <p:txBody>
+          <a:bodyPr wrap="none">
+            <a:spAutoFit/>
+          </a:bodyPr>
+          <a:lstStyle/>
+          <a:p>
+            <a:pPr algn="ctr">
+              <a:defRPr sz="1800" b="1">
+                <a:solidFill>
+                  <a:srgbClr val="FFFFFF"/>
+                </a:solidFill>
+              </a:defRPr>
+            </a:pPr>
+            <a:r>
+              <a:t>07</a:t>
+            </a:r>
+          </a:p>
+        </p:txBody>
+      </p:sp>
+      <p:sp>
+        <p:nvSpPr>
+          <p:cNvPr id="25" name="TextBox 24"/>
+          <p:cNvSpPr txBox="1"/>
+          <p:nvPr/>
+        </p:nvSpPr>
+        <p:spPr>
+          <a:xfrm>
+            <a:off x="1371600" y="5852160"/>
+            <a:ext cx="6400800" cy="457200"/>
+          </a:xfrm>
+          <a:prstGeom prst="rect">
+            <a:avLst/>
+          </a:prstGeom>
+          <a:noFill/>
+        </p:spPr>
+        <p:txBody>
+          <a:bodyPr wrap="none">
+            <a:spAutoFit/>
+          </a:bodyPr>
+          <a:lstStyle/>
+          <a:p>
+            <a:pPr algn="l">
               <a:defRPr sz="2200">
                 <a:solidFill>
-                  <a:srgbClr val="323232"/>
+                  <a:srgbClr val="FFFFFF"/>
                 </a:solidFill>
               </a:defRPr>
             </a:pPr>
             <a:r>
-              <a:t>• 미래 전망</a:t>
+              <a:t>미래 전망</a:t>
             </a:r>
           </a:p>
         </p:txBody>
@@ -4774,7 +9004,7 @@
             <a:avLst/>
           </a:prstGeom>
           <a:solidFill>
-            <a:srgbClr val="10B981"/>
+            <a:srgbClr val="0F172A"/>
           </a:solidFill>
           <a:ln>
             <a:noFill/>
@@ -4810,8 +9040,8 @@
         </p:nvSpPr>
         <p:spPr>
           <a:xfrm>
-            <a:off x="457200" y="1828800"/>
-            <a:ext cx="8229600" cy="914400"/>
+            <a:off x="5029200" y="457200"/>
+            <a:ext cx="4572000" cy="5486400"/>
           </a:xfrm>
           <a:prstGeom prst="rect">
             <a:avLst/>
@@ -4824,10 +9054,10 @@
           </a:bodyPr>
           <a:lstStyle/>
           <a:p>
-            <a:pPr algn="ctr">
-              <a:defRPr sz="7200" b="1">
-                <a:solidFill>
-                  <a:srgbClr val="FFFFFF"/>
+            <a:pPr algn="r">
+              <a:defRPr sz="28000" b="1">
+                <a:solidFill>
+                  <a:srgbClr val="1E293B"/>
                 </a:solidFill>
               </a:defRPr>
             </a:pPr>
@@ -4839,14 +9069,57 @@
       </p:sp>
       <p:sp>
         <p:nvSpPr>
-          <p:cNvPr id="4" name="TextBox 3"/>
+          <p:cNvPr id="4" name="Rectangle 3"/>
+          <p:cNvSpPr/>
+          <p:nvPr/>
+        </p:nvSpPr>
+        <p:spPr>
+          <a:xfrm>
+            <a:off x="731520" y="2926080"/>
+            <a:ext cx="731520" cy="54864"/>
+          </a:xfrm>
+          <a:prstGeom prst="rect">
+            <a:avLst/>
+          </a:prstGeom>
+          <a:solidFill>
+            <a:srgbClr val="8B5CF6"/>
+          </a:solidFill>
+          <a:ln>
+            <a:noFill/>
+          </a:ln>
+        </p:spPr>
+        <p:style>
+          <a:lnRef idx="1">
+            <a:schemeClr val="accent1"/>
+          </a:lnRef>
+          <a:fillRef idx="3">
+            <a:schemeClr val="accent1"/>
+          </a:fillRef>
+          <a:effectRef idx="2">
+            <a:schemeClr val="accent1"/>
+          </a:effectRef>
+          <a:fontRef idx="minor">
+            <a:schemeClr val="lt1"/>
+          </a:fontRef>
+        </p:style>
+        <p:txBody>
+          <a:bodyPr rtlCol="0" anchor="ctr"/>
+          <a:lstStyle/>
+          <a:p>
+            <a:pPr algn="ctr"/>
+          </a:p>
+        </p:txBody>
+      </p:sp>
+      <p:sp>
+        <p:nvSpPr>
+          <p:cNvPr id="5" name="TextBox 4"/>
           <p:cNvSpPr txBox="1"/>
           <p:nvPr/>
         </p:nvSpPr>
         <p:spPr>
           <a:xfrm>
-            <a:off x="457200" y="2926080"/>
-            <a:ext cx="8229600" cy="914400"/>
+            <a:off x="731520" y="2286000"/>
+            <a:ext cx="1828800" cy="548640"/>
           </a:xfrm>
           <a:prstGeom prst="rect">
             <a:avLst/>
@@ -4859,8 +9132,43 @@
           </a:bodyPr>
           <a:lstStyle/>
           <a:p>
-            <a:pPr algn="ctr">
-              <a:defRPr sz="4000">
+            <a:pPr>
+              <a:defRPr sz="1400" b="1">
+                <a:solidFill>
+                  <a:srgbClr val="8B5CF6"/>
+                </a:solidFill>
+              </a:defRPr>
+            </a:pPr>
+            <a:r>
+              <a:t>SECTION 01</a:t>
+            </a:r>
+          </a:p>
+        </p:txBody>
+      </p:sp>
+      <p:sp>
+        <p:nvSpPr>
+          <p:cNvPr id="6" name="TextBox 5"/>
+          <p:cNvSpPr txBox="1"/>
+          <p:nvPr/>
+        </p:nvSpPr>
+        <p:spPr>
+          <a:xfrm>
+            <a:off x="731520" y="3200400"/>
+            <a:ext cx="6400800" cy="1097280"/>
+          </a:xfrm>
+          <a:prstGeom prst="rect">
+            <a:avLst/>
+          </a:prstGeom>
+          <a:noFill/>
+        </p:spPr>
+        <p:txBody>
+          <a:bodyPr wrap="none">
+            <a:spAutoFit/>
+          </a:bodyPr>
+          <a:lstStyle/>
+          <a:p>
+            <a:pPr>
+              <a:defRPr sz="4400" b="1">
                 <a:solidFill>
                   <a:srgbClr val="FFFFFF"/>
                 </a:solidFill>
@@ -4899,13 +9207,13 @@
         <p:spPr>
           <a:xfrm>
             <a:off x="0" y="0"/>
-            <a:ext cx="9144000" cy="1097280"/>
-          </a:xfrm>
-          <a:prstGeom prst="rect">
-            <a:avLst/>
-          </a:prstGeom>
-          <a:solidFill>
-            <a:srgbClr val="8B5CF6"/>
+            <a:ext cx="9144000" cy="6858000"/>
+          </a:xfrm>
+          <a:prstGeom prst="rect">
+            <a:avLst/>
+          </a:prstGeom>
+          <a:solidFill>
+            <a:srgbClr val="0F172A"/>
           </a:solidFill>
           <a:ln>
             <a:noFill/>
@@ -4935,14 +9243,57 @@
       </p:sp>
       <p:sp>
         <p:nvSpPr>
-          <p:cNvPr id="3" name="TextBox 2"/>
+          <p:cNvPr id="3" name="Rectangle 2"/>
+          <p:cNvSpPr/>
+          <p:nvPr/>
+        </p:nvSpPr>
+        <p:spPr>
+          <a:xfrm>
+            <a:off x="0" y="0"/>
+            <a:ext cx="137160" cy="6858000"/>
+          </a:xfrm>
+          <a:prstGeom prst="rect">
+            <a:avLst/>
+          </a:prstGeom>
+          <a:solidFill>
+            <a:srgbClr val="8B5CF6"/>
+          </a:solidFill>
+          <a:ln>
+            <a:noFill/>
+          </a:ln>
+        </p:spPr>
+        <p:style>
+          <a:lnRef idx="1">
+            <a:schemeClr val="accent1"/>
+          </a:lnRef>
+          <a:fillRef idx="3">
+            <a:schemeClr val="accent1"/>
+          </a:fillRef>
+          <a:effectRef idx="2">
+            <a:schemeClr val="accent1"/>
+          </a:effectRef>
+          <a:fontRef idx="minor">
+            <a:schemeClr val="lt1"/>
+          </a:fontRef>
+        </p:style>
+        <p:txBody>
+          <a:bodyPr rtlCol="0" anchor="ctr"/>
+          <a:lstStyle/>
+          <a:p>
+            <a:pPr algn="ctr"/>
+          </a:p>
+        </p:txBody>
+      </p:sp>
+      <p:sp>
+        <p:nvSpPr>
+          <p:cNvPr id="4" name="TextBox 3"/>
           <p:cNvSpPr txBox="1"/>
           <p:nvPr/>
         </p:nvSpPr>
         <p:spPr>
           <a:xfrm>
-            <a:off x="457200" y="274320"/>
-            <a:ext cx="8229600" cy="731520"/>
+            <a:off x="548640" y="320040"/>
+            <a:ext cx="7315200" cy="365760"/>
           </a:xfrm>
           <a:prstGeom prst="rect">
             <a:avLst/>
@@ -4956,28 +9307,227 @@
           <a:lstStyle/>
           <a:p>
             <a:pPr>
-              <a:defRPr sz="3600" b="1">
+              <a:defRPr sz="1200" b="1">
+                <a:solidFill>
+                  <a:srgbClr val="8B5CF6"/>
+                </a:solidFill>
+              </a:defRPr>
+            </a:pPr>
+            <a:r>
+              <a:t>SECTION 01 · 생성형 AI</a:t>
+            </a:r>
+          </a:p>
+        </p:txBody>
+      </p:sp>
+      <p:sp>
+        <p:nvSpPr>
+          <p:cNvPr id="5" name="TextBox 4"/>
+          <p:cNvSpPr txBox="1"/>
+          <p:nvPr/>
+        </p:nvSpPr>
+        <p:spPr>
+          <a:xfrm>
+            <a:off x="548640" y="640080"/>
+            <a:ext cx="7315200" cy="640080"/>
+          </a:xfrm>
+          <a:prstGeom prst="rect">
+            <a:avLst/>
+          </a:prstGeom>
+          <a:noFill/>
+        </p:spPr>
+        <p:txBody>
+          <a:bodyPr wrap="none">
+            <a:spAutoFit/>
+          </a:bodyPr>
+          <a:lstStyle/>
+          <a:p>
+            <a:pPr>
+              <a:defRPr sz="3200" b="1">
                 <a:solidFill>
                   <a:srgbClr val="FFFFFF"/>
                 </a:solidFill>
               </a:defRPr>
             </a:pPr>
             <a:r>
-              <a:t>🤖 생성형 AI (Generative AI)</a:t>
-            </a:r>
-          </a:p>
-        </p:txBody>
-      </p:sp>
-      <p:sp>
-        <p:nvSpPr>
-          <p:cNvPr id="4" name="TextBox 3"/>
+              <a:t>Generative AI</a:t>
+            </a:r>
+          </a:p>
+        </p:txBody>
+      </p:sp>
+      <p:sp>
+        <p:nvSpPr>
+          <p:cNvPr id="6" name="Rectangle 5"/>
+          <p:cNvSpPr/>
+          <p:nvPr/>
+        </p:nvSpPr>
+        <p:spPr>
+          <a:xfrm>
+            <a:off x="548640" y="1325880"/>
+            <a:ext cx="8046720" cy="13716"/>
+          </a:xfrm>
+          <a:prstGeom prst="rect">
+            <a:avLst/>
+          </a:prstGeom>
+          <a:solidFill>
+            <a:srgbClr val="1E293B"/>
+          </a:solidFill>
+          <a:ln>
+            <a:noFill/>
+          </a:ln>
+        </p:spPr>
+        <p:style>
+          <a:lnRef idx="1">
+            <a:schemeClr val="accent1"/>
+          </a:lnRef>
+          <a:fillRef idx="3">
+            <a:schemeClr val="accent1"/>
+          </a:fillRef>
+          <a:effectRef idx="2">
+            <a:schemeClr val="accent1"/>
+          </a:effectRef>
+          <a:fontRef idx="minor">
+            <a:schemeClr val="lt1"/>
+          </a:fontRef>
+        </p:style>
+        <p:txBody>
+          <a:bodyPr rtlCol="0" anchor="ctr"/>
+          <a:lstStyle/>
+          <a:p>
+            <a:pPr algn="ctr"/>
+          </a:p>
+        </p:txBody>
+      </p:sp>
+      <p:sp>
+        <p:nvSpPr>
+          <p:cNvPr id="7" name="Rounded Rectangle 6"/>
+          <p:cNvSpPr/>
+          <p:nvPr/>
+        </p:nvSpPr>
+        <p:spPr>
+          <a:xfrm>
+            <a:off x="548640" y="1554480"/>
+            <a:ext cx="8046720" cy="822960"/>
+          </a:xfrm>
+          <a:prstGeom prst="roundRect">
+            <a:avLst/>
+          </a:prstGeom>
+          <a:solidFill>
+            <a:srgbClr val="1E293B"/>
+          </a:solidFill>
+          <a:ln>
+            <a:noFill/>
+          </a:ln>
+        </p:spPr>
+        <p:style>
+          <a:lnRef idx="1">
+            <a:schemeClr val="accent1"/>
+          </a:lnRef>
+          <a:fillRef idx="3">
+            <a:schemeClr val="accent1"/>
+          </a:fillRef>
+          <a:effectRef idx="2">
+            <a:schemeClr val="accent1"/>
+          </a:effectRef>
+          <a:fontRef idx="minor">
+            <a:schemeClr val="lt1"/>
+          </a:fontRef>
+        </p:style>
+        <p:txBody>
+          <a:bodyPr rtlCol="0" anchor="ctr"/>
+          <a:lstStyle/>
+          <a:p>
+            <a:pPr algn="ctr"/>
+          </a:p>
+        </p:txBody>
+      </p:sp>
+      <p:sp>
+        <p:nvSpPr>
+          <p:cNvPr id="8" name="Oval 7"/>
+          <p:cNvSpPr/>
+          <p:nvPr/>
+        </p:nvSpPr>
+        <p:spPr>
+          <a:xfrm>
+            <a:off x="777240" y="1810512"/>
+            <a:ext cx="320040" cy="320040"/>
+          </a:xfrm>
+          <a:prstGeom prst="ellipse">
+            <a:avLst/>
+          </a:prstGeom>
+          <a:solidFill>
+            <a:srgbClr val="8B5CF6"/>
+          </a:solidFill>
+          <a:ln>
+            <a:noFill/>
+          </a:ln>
+        </p:spPr>
+        <p:style>
+          <a:lnRef idx="1">
+            <a:schemeClr val="accent1"/>
+          </a:lnRef>
+          <a:fillRef idx="3">
+            <a:schemeClr val="accent1"/>
+          </a:fillRef>
+          <a:effectRef idx="2">
+            <a:schemeClr val="accent1"/>
+          </a:effectRef>
+          <a:fontRef idx="minor">
+            <a:schemeClr val="lt1"/>
+          </a:fontRef>
+        </p:style>
+        <p:txBody>
+          <a:bodyPr rtlCol="0" anchor="ctr"/>
+          <a:lstStyle/>
+          <a:p>
+            <a:pPr algn="ctr"/>
+          </a:p>
+        </p:txBody>
+      </p:sp>
+      <p:sp>
+        <p:nvSpPr>
+          <p:cNvPr id="9" name="TextBox 8"/>
           <p:cNvSpPr txBox="1"/>
           <p:nvPr/>
         </p:nvSpPr>
         <p:spPr>
           <a:xfrm>
-            <a:off x="640080" y="1463040"/>
-            <a:ext cx="7863840" cy="4572000"/>
+            <a:off x="777240" y="1847088"/>
+            <a:ext cx="320040" cy="274320"/>
+          </a:xfrm>
+          <a:prstGeom prst="rect">
+            <a:avLst/>
+          </a:prstGeom>
+          <a:noFill/>
+        </p:spPr>
+        <p:txBody>
+          <a:bodyPr wrap="none">
+            <a:spAutoFit/>
+          </a:bodyPr>
+          <a:lstStyle/>
+          <a:p>
+            <a:pPr algn="ctr">
+              <a:defRPr sz="1400" b="1">
+                <a:solidFill>
+                  <a:srgbClr val="FFFFFF"/>
+                </a:solidFill>
+              </a:defRPr>
+            </a:pPr>
+            <a:r>
+              <a:t>1</a:t>
+            </a:r>
+          </a:p>
+        </p:txBody>
+      </p:sp>
+      <p:sp>
+        <p:nvSpPr>
+          <p:cNvPr id="10" name="TextBox 9"/>
+          <p:cNvSpPr txBox="1"/>
+          <p:nvPr/>
+        </p:nvSpPr>
+        <p:spPr>
+          <a:xfrm>
+            <a:off x="1280160" y="1783080"/>
+            <a:ext cx="7132320" cy="457200"/>
           </a:xfrm>
           <a:prstGeom prst="rect">
             <a:avLst/>
@@ -4991,77 +9541,638 @@
           <a:lstStyle/>
           <a:p>
             <a:pPr>
-              <a:spcAft>
-                <a:spcPts val="1600"/>
-              </a:spcAft>
-              <a:defRPr sz="2200">
-                <a:solidFill>
-                  <a:srgbClr val="323232"/>
+              <a:defRPr sz="1800">
+                <a:solidFill>
+                  <a:srgbClr val="E2E8F0"/>
                 </a:solidFill>
               </a:defRPr>
             </a:pPr>
             <a:r>
-              <a:t>• GPT-4, Claude, Gemini 등 대형 언어모델의 지속적 발전</a:t>
-            </a:r>
-          </a:p>
+              <a:t>GPT-4, Claude, Gemini 등 대형 언어모델(LLM)의 지속적 발전</a:t>
+            </a:r>
+          </a:p>
+        </p:txBody>
+      </p:sp>
+      <p:sp>
+        <p:nvSpPr>
+          <p:cNvPr id="11" name="Rounded Rectangle 10"/>
+          <p:cNvSpPr/>
+          <p:nvPr/>
+        </p:nvSpPr>
+        <p:spPr>
+          <a:xfrm>
+            <a:off x="548640" y="2514600"/>
+            <a:ext cx="8046720" cy="822960"/>
+          </a:xfrm>
+          <a:prstGeom prst="roundRect">
+            <a:avLst/>
+          </a:prstGeom>
+          <a:solidFill>
+            <a:srgbClr val="1E293B"/>
+          </a:solidFill>
+          <a:ln>
+            <a:noFill/>
+          </a:ln>
+        </p:spPr>
+        <p:style>
+          <a:lnRef idx="1">
+            <a:schemeClr val="accent1"/>
+          </a:lnRef>
+          <a:fillRef idx="3">
+            <a:schemeClr val="accent1"/>
+          </a:fillRef>
+          <a:effectRef idx="2">
+            <a:schemeClr val="accent1"/>
+          </a:effectRef>
+          <a:fontRef idx="minor">
+            <a:schemeClr val="lt1"/>
+          </a:fontRef>
+        </p:style>
+        <p:txBody>
+          <a:bodyPr rtlCol="0" anchor="ctr"/>
+          <a:lstStyle/>
+          <a:p>
+            <a:pPr algn="ctr"/>
+          </a:p>
+        </p:txBody>
+      </p:sp>
+      <p:sp>
+        <p:nvSpPr>
+          <p:cNvPr id="12" name="Oval 11"/>
+          <p:cNvSpPr/>
+          <p:nvPr/>
+        </p:nvSpPr>
+        <p:spPr>
+          <a:xfrm>
+            <a:off x="777240" y="2770632"/>
+            <a:ext cx="320040" cy="320040"/>
+          </a:xfrm>
+          <a:prstGeom prst="ellipse">
+            <a:avLst/>
+          </a:prstGeom>
+          <a:solidFill>
+            <a:srgbClr val="8B5CF6"/>
+          </a:solidFill>
+          <a:ln>
+            <a:noFill/>
+          </a:ln>
+        </p:spPr>
+        <p:style>
+          <a:lnRef idx="1">
+            <a:schemeClr val="accent1"/>
+          </a:lnRef>
+          <a:fillRef idx="3">
+            <a:schemeClr val="accent1"/>
+          </a:fillRef>
+          <a:effectRef idx="2">
+            <a:schemeClr val="accent1"/>
+          </a:effectRef>
+          <a:fontRef idx="minor">
+            <a:schemeClr val="lt1"/>
+          </a:fontRef>
+        </p:style>
+        <p:txBody>
+          <a:bodyPr rtlCol="0" anchor="ctr"/>
+          <a:lstStyle/>
+          <a:p>
+            <a:pPr algn="ctr"/>
+          </a:p>
+        </p:txBody>
+      </p:sp>
+      <p:sp>
+        <p:nvSpPr>
+          <p:cNvPr id="13" name="TextBox 12"/>
+          <p:cNvSpPr txBox="1"/>
+          <p:nvPr/>
+        </p:nvSpPr>
+        <p:spPr>
+          <a:xfrm>
+            <a:off x="777240" y="2807208"/>
+            <a:ext cx="320040" cy="274320"/>
+          </a:xfrm>
+          <a:prstGeom prst="rect">
+            <a:avLst/>
+          </a:prstGeom>
+          <a:noFill/>
+        </p:spPr>
+        <p:txBody>
+          <a:bodyPr wrap="none">
+            <a:spAutoFit/>
+          </a:bodyPr>
+          <a:lstStyle/>
+          <a:p>
+            <a:pPr algn="ctr">
+              <a:defRPr sz="1400" b="1">
+                <a:solidFill>
+                  <a:srgbClr val="FFFFFF"/>
+                </a:solidFill>
+              </a:defRPr>
+            </a:pPr>
+            <a:r>
+              <a:t>2</a:t>
+            </a:r>
+          </a:p>
+        </p:txBody>
+      </p:sp>
+      <p:sp>
+        <p:nvSpPr>
+          <p:cNvPr id="14" name="TextBox 13"/>
+          <p:cNvSpPr txBox="1"/>
+          <p:nvPr/>
+        </p:nvSpPr>
+        <p:spPr>
+          <a:xfrm>
+            <a:off x="1280160" y="2743200"/>
+            <a:ext cx="7132320" cy="457200"/>
+          </a:xfrm>
+          <a:prstGeom prst="rect">
+            <a:avLst/>
+          </a:prstGeom>
+          <a:noFill/>
+        </p:spPr>
+        <p:txBody>
+          <a:bodyPr wrap="square">
+            <a:spAutoFit/>
+          </a:bodyPr>
+          <a:lstStyle/>
           <a:p>
             <a:pPr>
-              <a:spcAft>
-                <a:spcPts val="1600"/>
-              </a:spcAft>
-              <a:defRPr sz="2200">
-                <a:solidFill>
-                  <a:srgbClr val="323232"/>
+              <a:defRPr sz="1800">
+                <a:solidFill>
+                  <a:srgbClr val="E2E8F0"/>
                 </a:solidFill>
               </a:defRPr>
             </a:pPr>
             <a:r>
-              <a:t>• 텍스트, 이미지, 비디오, 음악 등 다양한 콘텐츠 생성</a:t>
-            </a:r>
-          </a:p>
+              <a:t>텍스트, 이미지, 비디오, 음악 등 다양한 콘텐츠 자동 생성</a:t>
+            </a:r>
+          </a:p>
+        </p:txBody>
+      </p:sp>
+      <p:sp>
+        <p:nvSpPr>
+          <p:cNvPr id="15" name="Rounded Rectangle 14"/>
+          <p:cNvSpPr/>
+          <p:nvPr/>
+        </p:nvSpPr>
+        <p:spPr>
+          <a:xfrm>
+            <a:off x="548640" y="3474720"/>
+            <a:ext cx="8046720" cy="822960"/>
+          </a:xfrm>
+          <a:prstGeom prst="roundRect">
+            <a:avLst/>
+          </a:prstGeom>
+          <a:solidFill>
+            <a:srgbClr val="1E293B"/>
+          </a:solidFill>
+          <a:ln>
+            <a:noFill/>
+          </a:ln>
+        </p:spPr>
+        <p:style>
+          <a:lnRef idx="1">
+            <a:schemeClr val="accent1"/>
+          </a:lnRef>
+          <a:fillRef idx="3">
+            <a:schemeClr val="accent1"/>
+          </a:fillRef>
+          <a:effectRef idx="2">
+            <a:schemeClr val="accent1"/>
+          </a:effectRef>
+          <a:fontRef idx="minor">
+            <a:schemeClr val="lt1"/>
+          </a:fontRef>
+        </p:style>
+        <p:txBody>
+          <a:bodyPr rtlCol="0" anchor="ctr"/>
+          <a:lstStyle/>
+          <a:p>
+            <a:pPr algn="ctr"/>
+          </a:p>
+        </p:txBody>
+      </p:sp>
+      <p:sp>
+        <p:nvSpPr>
+          <p:cNvPr id="16" name="Oval 15"/>
+          <p:cNvSpPr/>
+          <p:nvPr/>
+        </p:nvSpPr>
+        <p:spPr>
+          <a:xfrm>
+            <a:off x="777240" y="3730752"/>
+            <a:ext cx="320040" cy="320040"/>
+          </a:xfrm>
+          <a:prstGeom prst="ellipse">
+            <a:avLst/>
+          </a:prstGeom>
+          <a:solidFill>
+            <a:srgbClr val="8B5CF6"/>
+          </a:solidFill>
+          <a:ln>
+            <a:noFill/>
+          </a:ln>
+        </p:spPr>
+        <p:style>
+          <a:lnRef idx="1">
+            <a:schemeClr val="accent1"/>
+          </a:lnRef>
+          <a:fillRef idx="3">
+            <a:schemeClr val="accent1"/>
+          </a:fillRef>
+          <a:effectRef idx="2">
+            <a:schemeClr val="accent1"/>
+          </a:effectRef>
+          <a:fontRef idx="minor">
+            <a:schemeClr val="lt1"/>
+          </a:fontRef>
+        </p:style>
+        <p:txBody>
+          <a:bodyPr rtlCol="0" anchor="ctr"/>
+          <a:lstStyle/>
+          <a:p>
+            <a:pPr algn="ctr"/>
+          </a:p>
+        </p:txBody>
+      </p:sp>
+      <p:sp>
+        <p:nvSpPr>
+          <p:cNvPr id="17" name="TextBox 16"/>
+          <p:cNvSpPr txBox="1"/>
+          <p:nvPr/>
+        </p:nvSpPr>
+        <p:spPr>
+          <a:xfrm>
+            <a:off x="777240" y="3767328"/>
+            <a:ext cx="320040" cy="274320"/>
+          </a:xfrm>
+          <a:prstGeom prst="rect">
+            <a:avLst/>
+          </a:prstGeom>
+          <a:noFill/>
+        </p:spPr>
+        <p:txBody>
+          <a:bodyPr wrap="none">
+            <a:spAutoFit/>
+          </a:bodyPr>
+          <a:lstStyle/>
+          <a:p>
+            <a:pPr algn="ctr">
+              <a:defRPr sz="1400" b="1">
+                <a:solidFill>
+                  <a:srgbClr val="FFFFFF"/>
+                </a:solidFill>
+              </a:defRPr>
+            </a:pPr>
+            <a:r>
+              <a:t>3</a:t>
+            </a:r>
+          </a:p>
+        </p:txBody>
+      </p:sp>
+      <p:sp>
+        <p:nvSpPr>
+          <p:cNvPr id="18" name="TextBox 17"/>
+          <p:cNvSpPr txBox="1"/>
+          <p:nvPr/>
+        </p:nvSpPr>
+        <p:spPr>
+          <a:xfrm>
+            <a:off x="1280160" y="3703320"/>
+            <a:ext cx="7132320" cy="457200"/>
+          </a:xfrm>
+          <a:prstGeom prst="rect">
+            <a:avLst/>
+          </a:prstGeom>
+          <a:noFill/>
+        </p:spPr>
+        <p:txBody>
+          <a:bodyPr wrap="square">
+            <a:spAutoFit/>
+          </a:bodyPr>
+          <a:lstStyle/>
           <a:p>
             <a:pPr>
-              <a:spcAft>
-                <a:spcPts val="1600"/>
-              </a:spcAft>
-              <a:defRPr sz="2200">
-                <a:solidFill>
-                  <a:srgbClr val="323232"/>
+              <a:defRPr sz="1800">
+                <a:solidFill>
+                  <a:srgbClr val="E2E8F0"/>
                 </a:solidFill>
               </a:defRPr>
             </a:pPr>
             <a:r>
-              <a:t>• 코드 생성 및 소프트웨어 개발 자동화</a:t>
-            </a:r>
-          </a:p>
+              <a:t>코드 생성 및 소프트웨어 개발 프로세스 자동화</a:t>
+            </a:r>
+          </a:p>
+        </p:txBody>
+      </p:sp>
+      <p:sp>
+        <p:nvSpPr>
+          <p:cNvPr id="19" name="Rounded Rectangle 18"/>
+          <p:cNvSpPr/>
+          <p:nvPr/>
+        </p:nvSpPr>
+        <p:spPr>
+          <a:xfrm>
+            <a:off x="548640" y="4434840"/>
+            <a:ext cx="8046720" cy="822960"/>
+          </a:xfrm>
+          <a:prstGeom prst="roundRect">
+            <a:avLst/>
+          </a:prstGeom>
+          <a:solidFill>
+            <a:srgbClr val="1E293B"/>
+          </a:solidFill>
+          <a:ln>
+            <a:noFill/>
+          </a:ln>
+        </p:spPr>
+        <p:style>
+          <a:lnRef idx="1">
+            <a:schemeClr val="accent1"/>
+          </a:lnRef>
+          <a:fillRef idx="3">
+            <a:schemeClr val="accent1"/>
+          </a:fillRef>
+          <a:effectRef idx="2">
+            <a:schemeClr val="accent1"/>
+          </a:effectRef>
+          <a:fontRef idx="minor">
+            <a:schemeClr val="lt1"/>
+          </a:fontRef>
+        </p:style>
+        <p:txBody>
+          <a:bodyPr rtlCol="0" anchor="ctr"/>
+          <a:lstStyle/>
+          <a:p>
+            <a:pPr algn="ctr"/>
+          </a:p>
+        </p:txBody>
+      </p:sp>
+      <p:sp>
+        <p:nvSpPr>
+          <p:cNvPr id="20" name="Oval 19"/>
+          <p:cNvSpPr/>
+          <p:nvPr/>
+        </p:nvSpPr>
+        <p:spPr>
+          <a:xfrm>
+            <a:off x="777240" y="4690872"/>
+            <a:ext cx="320040" cy="320040"/>
+          </a:xfrm>
+          <a:prstGeom prst="ellipse">
+            <a:avLst/>
+          </a:prstGeom>
+          <a:solidFill>
+            <a:srgbClr val="8B5CF6"/>
+          </a:solidFill>
+          <a:ln>
+            <a:noFill/>
+          </a:ln>
+        </p:spPr>
+        <p:style>
+          <a:lnRef idx="1">
+            <a:schemeClr val="accent1"/>
+          </a:lnRef>
+          <a:fillRef idx="3">
+            <a:schemeClr val="accent1"/>
+          </a:fillRef>
+          <a:effectRef idx="2">
+            <a:schemeClr val="accent1"/>
+          </a:effectRef>
+          <a:fontRef idx="minor">
+            <a:schemeClr val="lt1"/>
+          </a:fontRef>
+        </p:style>
+        <p:txBody>
+          <a:bodyPr rtlCol="0" anchor="ctr"/>
+          <a:lstStyle/>
+          <a:p>
+            <a:pPr algn="ctr"/>
+          </a:p>
+        </p:txBody>
+      </p:sp>
+      <p:sp>
+        <p:nvSpPr>
+          <p:cNvPr id="21" name="TextBox 20"/>
+          <p:cNvSpPr txBox="1"/>
+          <p:nvPr/>
+        </p:nvSpPr>
+        <p:spPr>
+          <a:xfrm>
+            <a:off x="777240" y="4727448"/>
+            <a:ext cx="320040" cy="274320"/>
+          </a:xfrm>
+          <a:prstGeom prst="rect">
+            <a:avLst/>
+          </a:prstGeom>
+          <a:noFill/>
+        </p:spPr>
+        <p:txBody>
+          <a:bodyPr wrap="none">
+            <a:spAutoFit/>
+          </a:bodyPr>
+          <a:lstStyle/>
+          <a:p>
+            <a:pPr algn="ctr">
+              <a:defRPr sz="1400" b="1">
+                <a:solidFill>
+                  <a:srgbClr val="FFFFFF"/>
+                </a:solidFill>
+              </a:defRPr>
+            </a:pPr>
+            <a:r>
+              <a:t>4</a:t>
+            </a:r>
+          </a:p>
+        </p:txBody>
+      </p:sp>
+      <p:sp>
+        <p:nvSpPr>
+          <p:cNvPr id="22" name="TextBox 21"/>
+          <p:cNvSpPr txBox="1"/>
+          <p:nvPr/>
+        </p:nvSpPr>
+        <p:spPr>
+          <a:xfrm>
+            <a:off x="1280160" y="4663440"/>
+            <a:ext cx="7132320" cy="457200"/>
+          </a:xfrm>
+          <a:prstGeom prst="rect">
+            <a:avLst/>
+          </a:prstGeom>
+          <a:noFill/>
+        </p:spPr>
+        <p:txBody>
+          <a:bodyPr wrap="square">
+            <a:spAutoFit/>
+          </a:bodyPr>
+          <a:lstStyle/>
           <a:p>
             <a:pPr>
-              <a:spcAft>
-                <a:spcPts val="1600"/>
-              </a:spcAft>
-              <a:defRPr sz="2200">
-                <a:solidFill>
-                  <a:srgbClr val="323232"/>
+              <a:defRPr sz="1800">
+                <a:solidFill>
+                  <a:srgbClr val="E2E8F0"/>
                 </a:solidFill>
               </a:defRPr>
             </a:pPr>
             <a:r>
-              <a:t>• 기업용 맞춤형 AI 솔루션 확대</a:t>
-            </a:r>
-          </a:p>
+              <a:t>RAG 기술을 통한 정확도와 신뢰성 향상</a:t>
+            </a:r>
+          </a:p>
+        </p:txBody>
+      </p:sp>
+      <p:sp>
+        <p:nvSpPr>
+          <p:cNvPr id="23" name="Rounded Rectangle 22"/>
+          <p:cNvSpPr/>
+          <p:nvPr/>
+        </p:nvSpPr>
+        <p:spPr>
+          <a:xfrm>
+            <a:off x="548640" y="5394960"/>
+            <a:ext cx="8046720" cy="822960"/>
+          </a:xfrm>
+          <a:prstGeom prst="roundRect">
+            <a:avLst/>
+          </a:prstGeom>
+          <a:solidFill>
+            <a:srgbClr val="1E293B"/>
+          </a:solidFill>
+          <a:ln>
+            <a:noFill/>
+          </a:ln>
+        </p:spPr>
+        <p:style>
+          <a:lnRef idx="1">
+            <a:schemeClr val="accent1"/>
+          </a:lnRef>
+          <a:fillRef idx="3">
+            <a:schemeClr val="accent1"/>
+          </a:fillRef>
+          <a:effectRef idx="2">
+            <a:schemeClr val="accent1"/>
+          </a:effectRef>
+          <a:fontRef idx="minor">
+            <a:schemeClr val="lt1"/>
+          </a:fontRef>
+        </p:style>
+        <p:txBody>
+          <a:bodyPr rtlCol="0" anchor="ctr"/>
+          <a:lstStyle/>
+          <a:p>
+            <a:pPr algn="ctr"/>
+          </a:p>
+        </p:txBody>
+      </p:sp>
+      <p:sp>
+        <p:nvSpPr>
+          <p:cNvPr id="24" name="Oval 23"/>
+          <p:cNvSpPr/>
+          <p:nvPr/>
+        </p:nvSpPr>
+        <p:spPr>
+          <a:xfrm>
+            <a:off x="777240" y="5650992"/>
+            <a:ext cx="320040" cy="320040"/>
+          </a:xfrm>
+          <a:prstGeom prst="ellipse">
+            <a:avLst/>
+          </a:prstGeom>
+          <a:solidFill>
+            <a:srgbClr val="8B5CF6"/>
+          </a:solidFill>
+          <a:ln>
+            <a:noFill/>
+          </a:ln>
+        </p:spPr>
+        <p:style>
+          <a:lnRef idx="1">
+            <a:schemeClr val="accent1"/>
+          </a:lnRef>
+          <a:fillRef idx="3">
+            <a:schemeClr val="accent1"/>
+          </a:fillRef>
+          <a:effectRef idx="2">
+            <a:schemeClr val="accent1"/>
+          </a:effectRef>
+          <a:fontRef idx="minor">
+            <a:schemeClr val="lt1"/>
+          </a:fontRef>
+        </p:style>
+        <p:txBody>
+          <a:bodyPr rtlCol="0" anchor="ctr"/>
+          <a:lstStyle/>
+          <a:p>
+            <a:pPr algn="ctr"/>
+          </a:p>
+        </p:txBody>
+      </p:sp>
+      <p:sp>
+        <p:nvSpPr>
+          <p:cNvPr id="25" name="TextBox 24"/>
+          <p:cNvSpPr txBox="1"/>
+          <p:nvPr/>
+        </p:nvSpPr>
+        <p:spPr>
+          <a:xfrm>
+            <a:off x="777240" y="5687568"/>
+            <a:ext cx="320040" cy="274320"/>
+          </a:xfrm>
+          <a:prstGeom prst="rect">
+            <a:avLst/>
+          </a:prstGeom>
+          <a:noFill/>
+        </p:spPr>
+        <p:txBody>
+          <a:bodyPr wrap="none">
+            <a:spAutoFit/>
+          </a:bodyPr>
+          <a:lstStyle/>
+          <a:p>
+            <a:pPr algn="ctr">
+              <a:defRPr sz="1400" b="1">
+                <a:solidFill>
+                  <a:srgbClr val="FFFFFF"/>
+                </a:solidFill>
+              </a:defRPr>
+            </a:pPr>
+            <a:r>
+              <a:t>5</a:t>
+            </a:r>
+          </a:p>
+        </p:txBody>
+      </p:sp>
+      <p:sp>
+        <p:nvSpPr>
+          <p:cNvPr id="26" name="TextBox 25"/>
+          <p:cNvSpPr txBox="1"/>
+          <p:nvPr/>
+        </p:nvSpPr>
+        <p:spPr>
+          <a:xfrm>
+            <a:off x="1280160" y="5623560"/>
+            <a:ext cx="7132320" cy="457200"/>
+          </a:xfrm>
+          <a:prstGeom prst="rect">
+            <a:avLst/>
+          </a:prstGeom>
+          <a:noFill/>
+        </p:spPr>
+        <p:txBody>
+          <a:bodyPr wrap="square">
+            <a:spAutoFit/>
+          </a:bodyPr>
+          <a:lstStyle/>
           <a:p>
             <a:pPr>
-              <a:spcAft>
-                <a:spcPts val="1600"/>
-              </a:spcAft>
-              <a:defRPr sz="2200">
-                <a:solidFill>
-                  <a:srgbClr val="323232"/>
+              <a:defRPr sz="1800">
+                <a:solidFill>
+                  <a:srgbClr val="E2E8F0"/>
                 </a:solidFill>
               </a:defRPr>
             </a:pPr>
             <a:r>
-              <a:t>• RAG (Retrieval-Augmented Generation) 기술 고도화</a:t>
+              <a:t>기업 맞춤형 Private LLM 솔루션 확대</a:t>
             </a:r>
           </a:p>
         </p:txBody>
@@ -5099,7 +10210,7 @@
             <a:avLst/>
           </a:prstGeom>
           <a:solidFill>
-            <a:srgbClr val="10B981"/>
+            <a:srgbClr val="0F172A"/>
           </a:solidFill>
           <a:ln>
             <a:noFill/>
@@ -5135,8 +10246,8 @@
         </p:nvSpPr>
         <p:spPr>
           <a:xfrm>
-            <a:off x="457200" y="1828800"/>
-            <a:ext cx="8229600" cy="914400"/>
+            <a:off x="5029200" y="457200"/>
+            <a:ext cx="4572000" cy="5486400"/>
           </a:xfrm>
           <a:prstGeom prst="rect">
             <a:avLst/>
@@ -5149,10 +10260,10 @@
           </a:bodyPr>
           <a:lstStyle/>
           <a:p>
-            <a:pPr algn="ctr">
-              <a:defRPr sz="7200" b="1">
-                <a:solidFill>
-                  <a:srgbClr val="FFFFFF"/>
+            <a:pPr algn="r">
+              <a:defRPr sz="28000" b="1">
+                <a:solidFill>
+                  <a:srgbClr val="1E293B"/>
                 </a:solidFill>
               </a:defRPr>
             </a:pPr>
@@ -5164,14 +10275,57 @@
       </p:sp>
       <p:sp>
         <p:nvSpPr>
-          <p:cNvPr id="4" name="TextBox 3"/>
+          <p:cNvPr id="4" name="Rectangle 3"/>
+          <p:cNvSpPr/>
+          <p:nvPr/>
+        </p:nvSpPr>
+        <p:spPr>
+          <a:xfrm>
+            <a:off x="731520" y="2926080"/>
+            <a:ext cx="731520" cy="54864"/>
+          </a:xfrm>
+          <a:prstGeom prst="rect">
+            <a:avLst/>
+          </a:prstGeom>
+          <a:solidFill>
+            <a:srgbClr val="EC4899"/>
+          </a:solidFill>
+          <a:ln>
+            <a:noFill/>
+          </a:ln>
+        </p:spPr>
+        <p:style>
+          <a:lnRef idx="1">
+            <a:schemeClr val="accent1"/>
+          </a:lnRef>
+          <a:fillRef idx="3">
+            <a:schemeClr val="accent1"/>
+          </a:fillRef>
+          <a:effectRef idx="2">
+            <a:schemeClr val="accent1"/>
+          </a:effectRef>
+          <a:fontRef idx="minor">
+            <a:schemeClr val="lt1"/>
+          </a:fontRef>
+        </p:style>
+        <p:txBody>
+          <a:bodyPr rtlCol="0" anchor="ctr"/>
+          <a:lstStyle/>
+          <a:p>
+            <a:pPr algn="ctr"/>
+          </a:p>
+        </p:txBody>
+      </p:sp>
+      <p:sp>
+        <p:nvSpPr>
+          <p:cNvPr id="5" name="TextBox 4"/>
           <p:cNvSpPr txBox="1"/>
           <p:nvPr/>
         </p:nvSpPr>
         <p:spPr>
           <a:xfrm>
-            <a:off x="457200" y="2926080"/>
-            <a:ext cx="8229600" cy="914400"/>
+            <a:off x="731520" y="2286000"/>
+            <a:ext cx="1828800" cy="548640"/>
           </a:xfrm>
           <a:prstGeom prst="rect">
             <a:avLst/>
@@ -5184,8 +10338,43 @@
           </a:bodyPr>
           <a:lstStyle/>
           <a:p>
-            <a:pPr algn="ctr">
-              <a:defRPr sz="4000">
+            <a:pPr>
+              <a:defRPr sz="1400" b="1">
+                <a:solidFill>
+                  <a:srgbClr val="EC4899"/>
+                </a:solidFill>
+              </a:defRPr>
+            </a:pPr>
+            <a:r>
+              <a:t>SECTION 02</a:t>
+            </a:r>
+          </a:p>
+        </p:txBody>
+      </p:sp>
+      <p:sp>
+        <p:nvSpPr>
+          <p:cNvPr id="6" name="TextBox 5"/>
+          <p:cNvSpPr txBox="1"/>
+          <p:nvPr/>
+        </p:nvSpPr>
+        <p:spPr>
+          <a:xfrm>
+            <a:off x="731520" y="3200400"/>
+            <a:ext cx="6400800" cy="1097280"/>
+          </a:xfrm>
+          <a:prstGeom prst="rect">
+            <a:avLst/>
+          </a:prstGeom>
+          <a:noFill/>
+        </p:spPr>
+        <p:txBody>
+          <a:bodyPr wrap="none">
+            <a:spAutoFit/>
+          </a:bodyPr>
+          <a:lstStyle/>
+          <a:p>
+            <a:pPr>
+              <a:defRPr sz="4400" b="1">
                 <a:solidFill>
                   <a:srgbClr val="FFFFFF"/>
                 </a:solidFill>
@@ -5224,13 +10413,13 @@
         <p:spPr>
           <a:xfrm>
             <a:off x="0" y="0"/>
-            <a:ext cx="9144000" cy="1097280"/>
-          </a:xfrm>
-          <a:prstGeom prst="rect">
-            <a:avLst/>
-          </a:prstGeom>
-          <a:solidFill>
-            <a:srgbClr val="EC4899"/>
+            <a:ext cx="9144000" cy="6858000"/>
+          </a:xfrm>
+          <a:prstGeom prst="rect">
+            <a:avLst/>
+          </a:prstGeom>
+          <a:solidFill>
+            <a:srgbClr val="0F172A"/>
           </a:solidFill>
           <a:ln>
             <a:noFill/>
@@ -5260,14 +10449,57 @@
       </p:sp>
       <p:sp>
         <p:nvSpPr>
-          <p:cNvPr id="3" name="TextBox 2"/>
+          <p:cNvPr id="3" name="Rectangle 2"/>
+          <p:cNvSpPr/>
+          <p:nvPr/>
+        </p:nvSpPr>
+        <p:spPr>
+          <a:xfrm>
+            <a:off x="0" y="0"/>
+            <a:ext cx="137160" cy="6858000"/>
+          </a:xfrm>
+          <a:prstGeom prst="rect">
+            <a:avLst/>
+          </a:prstGeom>
+          <a:solidFill>
+            <a:srgbClr val="EC4899"/>
+          </a:solidFill>
+          <a:ln>
+            <a:noFill/>
+          </a:ln>
+        </p:spPr>
+        <p:style>
+          <a:lnRef idx="1">
+            <a:schemeClr val="accent1"/>
+          </a:lnRef>
+          <a:fillRef idx="3">
+            <a:schemeClr val="accent1"/>
+          </a:fillRef>
+          <a:effectRef idx="2">
+            <a:schemeClr val="accent1"/>
+          </a:effectRef>
+          <a:fontRef idx="minor">
+            <a:schemeClr val="lt1"/>
+          </a:fontRef>
+        </p:style>
+        <p:txBody>
+          <a:bodyPr rtlCol="0" anchor="ctr"/>
+          <a:lstStyle/>
+          <a:p>
+            <a:pPr algn="ctr"/>
+          </a:p>
+        </p:txBody>
+      </p:sp>
+      <p:sp>
+        <p:nvSpPr>
+          <p:cNvPr id="4" name="TextBox 3"/>
           <p:cNvSpPr txBox="1"/>
           <p:nvPr/>
         </p:nvSpPr>
         <p:spPr>
           <a:xfrm>
-            <a:off x="457200" y="274320"/>
-            <a:ext cx="8229600" cy="731520"/>
+            <a:off x="548640" y="320040"/>
+            <a:ext cx="7315200" cy="365760"/>
           </a:xfrm>
           <a:prstGeom prst="rect">
             <a:avLst/>
@@ -5281,28 +10513,227 @@
           <a:lstStyle/>
           <a:p>
             <a:pPr>
-              <a:defRPr sz="3600" b="1">
+              <a:defRPr sz="1200" b="1">
+                <a:solidFill>
+                  <a:srgbClr val="EC4899"/>
+                </a:solidFill>
+              </a:defRPr>
+            </a:pPr>
+            <a:r>
+              <a:t>SECTION 02 · 멀티모달 AI</a:t>
+            </a:r>
+          </a:p>
+        </p:txBody>
+      </p:sp>
+      <p:sp>
+        <p:nvSpPr>
+          <p:cNvPr id="5" name="TextBox 4"/>
+          <p:cNvSpPr txBox="1"/>
+          <p:nvPr/>
+        </p:nvSpPr>
+        <p:spPr>
+          <a:xfrm>
+            <a:off x="548640" y="640080"/>
+            <a:ext cx="7315200" cy="640080"/>
+          </a:xfrm>
+          <a:prstGeom prst="rect">
+            <a:avLst/>
+          </a:prstGeom>
+          <a:noFill/>
+        </p:spPr>
+        <p:txBody>
+          <a:bodyPr wrap="none">
+            <a:spAutoFit/>
+          </a:bodyPr>
+          <a:lstStyle/>
+          <a:p>
+            <a:pPr>
+              <a:defRPr sz="3200" b="1">
                 <a:solidFill>
                   <a:srgbClr val="FFFFFF"/>
                 </a:solidFill>
               </a:defRPr>
             </a:pPr>
             <a:r>
-              <a:t>🎯 멀티모달 AI</a:t>
-            </a:r>
-          </a:p>
-        </p:txBody>
-      </p:sp>
-      <p:sp>
-        <p:nvSpPr>
-          <p:cNvPr id="4" name="TextBox 3"/>
+              <a:t>Multimodal AI</a:t>
+            </a:r>
+          </a:p>
+        </p:txBody>
+      </p:sp>
+      <p:sp>
+        <p:nvSpPr>
+          <p:cNvPr id="6" name="Rectangle 5"/>
+          <p:cNvSpPr/>
+          <p:nvPr/>
+        </p:nvSpPr>
+        <p:spPr>
+          <a:xfrm>
+            <a:off x="548640" y="1325880"/>
+            <a:ext cx="8046720" cy="13716"/>
+          </a:xfrm>
+          <a:prstGeom prst="rect">
+            <a:avLst/>
+          </a:prstGeom>
+          <a:solidFill>
+            <a:srgbClr val="1E293B"/>
+          </a:solidFill>
+          <a:ln>
+            <a:noFill/>
+          </a:ln>
+        </p:spPr>
+        <p:style>
+          <a:lnRef idx="1">
+            <a:schemeClr val="accent1"/>
+          </a:lnRef>
+          <a:fillRef idx="3">
+            <a:schemeClr val="accent1"/>
+          </a:fillRef>
+          <a:effectRef idx="2">
+            <a:schemeClr val="accent1"/>
+          </a:effectRef>
+          <a:fontRef idx="minor">
+            <a:schemeClr val="lt1"/>
+          </a:fontRef>
+        </p:style>
+        <p:txBody>
+          <a:bodyPr rtlCol="0" anchor="ctr"/>
+          <a:lstStyle/>
+          <a:p>
+            <a:pPr algn="ctr"/>
+          </a:p>
+        </p:txBody>
+      </p:sp>
+      <p:sp>
+        <p:nvSpPr>
+          <p:cNvPr id="7" name="Rounded Rectangle 6"/>
+          <p:cNvSpPr/>
+          <p:nvPr/>
+        </p:nvSpPr>
+        <p:spPr>
+          <a:xfrm>
+            <a:off x="548640" y="1554480"/>
+            <a:ext cx="8046720" cy="822960"/>
+          </a:xfrm>
+          <a:prstGeom prst="roundRect">
+            <a:avLst/>
+          </a:prstGeom>
+          <a:solidFill>
+            <a:srgbClr val="1E293B"/>
+          </a:solidFill>
+          <a:ln>
+            <a:noFill/>
+          </a:ln>
+        </p:spPr>
+        <p:style>
+          <a:lnRef idx="1">
+            <a:schemeClr val="accent1"/>
+          </a:lnRef>
+          <a:fillRef idx="3">
+            <a:schemeClr val="accent1"/>
+          </a:fillRef>
+          <a:effectRef idx="2">
+            <a:schemeClr val="accent1"/>
+          </a:effectRef>
+          <a:fontRef idx="minor">
+            <a:schemeClr val="lt1"/>
+          </a:fontRef>
+        </p:style>
+        <p:txBody>
+          <a:bodyPr rtlCol="0" anchor="ctr"/>
+          <a:lstStyle/>
+          <a:p>
+            <a:pPr algn="ctr"/>
+          </a:p>
+        </p:txBody>
+      </p:sp>
+      <p:sp>
+        <p:nvSpPr>
+          <p:cNvPr id="8" name="Oval 7"/>
+          <p:cNvSpPr/>
+          <p:nvPr/>
+        </p:nvSpPr>
+        <p:spPr>
+          <a:xfrm>
+            <a:off x="777240" y="1810512"/>
+            <a:ext cx="320040" cy="320040"/>
+          </a:xfrm>
+          <a:prstGeom prst="ellipse">
+            <a:avLst/>
+          </a:prstGeom>
+          <a:solidFill>
+            <a:srgbClr val="EC4899"/>
+          </a:solidFill>
+          <a:ln>
+            <a:noFill/>
+          </a:ln>
+        </p:spPr>
+        <p:style>
+          <a:lnRef idx="1">
+            <a:schemeClr val="accent1"/>
+          </a:lnRef>
+          <a:fillRef idx="3">
+            <a:schemeClr val="accent1"/>
+          </a:fillRef>
+          <a:effectRef idx="2">
+            <a:schemeClr val="accent1"/>
+          </a:effectRef>
+          <a:fontRef idx="minor">
+            <a:schemeClr val="lt1"/>
+          </a:fontRef>
+        </p:style>
+        <p:txBody>
+          <a:bodyPr rtlCol="0" anchor="ctr"/>
+          <a:lstStyle/>
+          <a:p>
+            <a:pPr algn="ctr"/>
+          </a:p>
+        </p:txBody>
+      </p:sp>
+      <p:sp>
+        <p:nvSpPr>
+          <p:cNvPr id="9" name="TextBox 8"/>
           <p:cNvSpPr txBox="1"/>
           <p:nvPr/>
         </p:nvSpPr>
         <p:spPr>
           <a:xfrm>
-            <a:off x="640080" y="1463040"/>
-            <a:ext cx="7863840" cy="4572000"/>
+            <a:off x="777240" y="1847088"/>
+            <a:ext cx="320040" cy="274320"/>
+          </a:xfrm>
+          <a:prstGeom prst="rect">
+            <a:avLst/>
+          </a:prstGeom>
+          <a:noFill/>
+        </p:spPr>
+        <p:txBody>
+          <a:bodyPr wrap="none">
+            <a:spAutoFit/>
+          </a:bodyPr>
+          <a:lstStyle/>
+          <a:p>
+            <a:pPr algn="ctr">
+              <a:defRPr sz="1400" b="1">
+                <a:solidFill>
+                  <a:srgbClr val="FFFFFF"/>
+                </a:solidFill>
+              </a:defRPr>
+            </a:pPr>
+            <a:r>
+              <a:t>1</a:t>
+            </a:r>
+          </a:p>
+        </p:txBody>
+      </p:sp>
+      <p:sp>
+        <p:nvSpPr>
+          <p:cNvPr id="10" name="TextBox 9"/>
+          <p:cNvSpPr txBox="1"/>
+          <p:nvPr/>
+        </p:nvSpPr>
+        <p:spPr>
+          <a:xfrm>
+            <a:off x="1280160" y="1783080"/>
+            <a:ext cx="7132320" cy="457200"/>
           </a:xfrm>
           <a:prstGeom prst="rect">
             <a:avLst/>
@@ -5316,77 +10747,638 @@
           <a:lstStyle/>
           <a:p>
             <a:pPr>
-              <a:spcAft>
-                <a:spcPts val="1600"/>
-              </a:spcAft>
-              <a:defRPr sz="2200">
-                <a:solidFill>
-                  <a:srgbClr val="323232"/>
+              <a:defRPr sz="1800">
+                <a:solidFill>
+                  <a:srgbClr val="E2E8F0"/>
                 </a:solidFill>
               </a:defRPr>
             </a:pPr>
             <a:r>
-              <a:t>• 텍스트 + 이미지 + 음성 + 비디오 통합 처리</a:t>
-            </a:r>
-          </a:p>
+              <a:t>텍스트 + 이미지 + 음성 + 비디오 통합 처리 능력</a:t>
+            </a:r>
+          </a:p>
+        </p:txBody>
+      </p:sp>
+      <p:sp>
+        <p:nvSpPr>
+          <p:cNvPr id="11" name="Rounded Rectangle 10"/>
+          <p:cNvSpPr/>
+          <p:nvPr/>
+        </p:nvSpPr>
+        <p:spPr>
+          <a:xfrm>
+            <a:off x="548640" y="2514600"/>
+            <a:ext cx="8046720" cy="822960"/>
+          </a:xfrm>
+          <a:prstGeom prst="roundRect">
+            <a:avLst/>
+          </a:prstGeom>
+          <a:solidFill>
+            <a:srgbClr val="1E293B"/>
+          </a:solidFill>
+          <a:ln>
+            <a:noFill/>
+          </a:ln>
+        </p:spPr>
+        <p:style>
+          <a:lnRef idx="1">
+            <a:schemeClr val="accent1"/>
+          </a:lnRef>
+          <a:fillRef idx="3">
+            <a:schemeClr val="accent1"/>
+          </a:fillRef>
+          <a:effectRef idx="2">
+            <a:schemeClr val="accent1"/>
+          </a:effectRef>
+          <a:fontRef idx="minor">
+            <a:schemeClr val="lt1"/>
+          </a:fontRef>
+        </p:style>
+        <p:txBody>
+          <a:bodyPr rtlCol="0" anchor="ctr"/>
+          <a:lstStyle/>
+          <a:p>
+            <a:pPr algn="ctr"/>
+          </a:p>
+        </p:txBody>
+      </p:sp>
+      <p:sp>
+        <p:nvSpPr>
+          <p:cNvPr id="12" name="Oval 11"/>
+          <p:cNvSpPr/>
+          <p:nvPr/>
+        </p:nvSpPr>
+        <p:spPr>
+          <a:xfrm>
+            <a:off x="777240" y="2770632"/>
+            <a:ext cx="320040" cy="320040"/>
+          </a:xfrm>
+          <a:prstGeom prst="ellipse">
+            <a:avLst/>
+          </a:prstGeom>
+          <a:solidFill>
+            <a:srgbClr val="EC4899"/>
+          </a:solidFill>
+          <a:ln>
+            <a:noFill/>
+          </a:ln>
+        </p:spPr>
+        <p:style>
+          <a:lnRef idx="1">
+            <a:schemeClr val="accent1"/>
+          </a:lnRef>
+          <a:fillRef idx="3">
+            <a:schemeClr val="accent1"/>
+          </a:fillRef>
+          <a:effectRef idx="2">
+            <a:schemeClr val="accent1"/>
+          </a:effectRef>
+          <a:fontRef idx="minor">
+            <a:schemeClr val="lt1"/>
+          </a:fontRef>
+        </p:style>
+        <p:txBody>
+          <a:bodyPr rtlCol="0" anchor="ctr"/>
+          <a:lstStyle/>
+          <a:p>
+            <a:pPr algn="ctr"/>
+          </a:p>
+        </p:txBody>
+      </p:sp>
+      <p:sp>
+        <p:nvSpPr>
+          <p:cNvPr id="13" name="TextBox 12"/>
+          <p:cNvSpPr txBox="1"/>
+          <p:nvPr/>
+        </p:nvSpPr>
+        <p:spPr>
+          <a:xfrm>
+            <a:off x="777240" y="2807208"/>
+            <a:ext cx="320040" cy="274320"/>
+          </a:xfrm>
+          <a:prstGeom prst="rect">
+            <a:avLst/>
+          </a:prstGeom>
+          <a:noFill/>
+        </p:spPr>
+        <p:txBody>
+          <a:bodyPr wrap="none">
+            <a:spAutoFit/>
+          </a:bodyPr>
+          <a:lstStyle/>
+          <a:p>
+            <a:pPr algn="ctr">
+              <a:defRPr sz="1400" b="1">
+                <a:solidFill>
+                  <a:srgbClr val="FFFFFF"/>
+                </a:solidFill>
+              </a:defRPr>
+            </a:pPr>
+            <a:r>
+              <a:t>2</a:t>
+            </a:r>
+          </a:p>
+        </p:txBody>
+      </p:sp>
+      <p:sp>
+        <p:nvSpPr>
+          <p:cNvPr id="14" name="TextBox 13"/>
+          <p:cNvSpPr txBox="1"/>
+          <p:nvPr/>
+        </p:nvSpPr>
+        <p:spPr>
+          <a:xfrm>
+            <a:off x="1280160" y="2743200"/>
+            <a:ext cx="7132320" cy="457200"/>
+          </a:xfrm>
+          <a:prstGeom prst="rect">
+            <a:avLst/>
+          </a:prstGeom>
+          <a:noFill/>
+        </p:spPr>
+        <p:txBody>
+          <a:bodyPr wrap="square">
+            <a:spAutoFit/>
+          </a:bodyPr>
+          <a:lstStyle/>
           <a:p>
             <a:pPr>
-              <a:spcAft>
-                <a:spcPts val="1600"/>
-              </a:spcAft>
-              <a:defRPr sz="2200">
-                <a:solidFill>
-                  <a:srgbClr val="323232"/>
+              <a:defRPr sz="1800">
+                <a:solidFill>
+                  <a:srgbClr val="E2E8F0"/>
                 </a:solidFill>
               </a:defRPr>
             </a:pPr>
             <a:r>
-              <a:t>• 더 자연스러운 인간-AI 상호작용</a:t>
-            </a:r>
-          </a:p>
+              <a:t>자연스러운 인간-AI 상호작용 인터페이스 구현</a:t>
+            </a:r>
+          </a:p>
+        </p:txBody>
+      </p:sp>
+      <p:sp>
+        <p:nvSpPr>
+          <p:cNvPr id="15" name="Rounded Rectangle 14"/>
+          <p:cNvSpPr/>
+          <p:nvPr/>
+        </p:nvSpPr>
+        <p:spPr>
+          <a:xfrm>
+            <a:off x="548640" y="3474720"/>
+            <a:ext cx="8046720" cy="822960"/>
+          </a:xfrm>
+          <a:prstGeom prst="roundRect">
+            <a:avLst/>
+          </a:prstGeom>
+          <a:solidFill>
+            <a:srgbClr val="1E293B"/>
+          </a:solidFill>
+          <a:ln>
+            <a:noFill/>
+          </a:ln>
+        </p:spPr>
+        <p:style>
+          <a:lnRef idx="1">
+            <a:schemeClr val="accent1"/>
+          </a:lnRef>
+          <a:fillRef idx="3">
+            <a:schemeClr val="accent1"/>
+          </a:fillRef>
+          <a:effectRef idx="2">
+            <a:schemeClr val="accent1"/>
+          </a:effectRef>
+          <a:fontRef idx="minor">
+            <a:schemeClr val="lt1"/>
+          </a:fontRef>
+        </p:style>
+        <p:txBody>
+          <a:bodyPr rtlCol="0" anchor="ctr"/>
+          <a:lstStyle/>
+          <a:p>
+            <a:pPr algn="ctr"/>
+          </a:p>
+        </p:txBody>
+      </p:sp>
+      <p:sp>
+        <p:nvSpPr>
+          <p:cNvPr id="16" name="Oval 15"/>
+          <p:cNvSpPr/>
+          <p:nvPr/>
+        </p:nvSpPr>
+        <p:spPr>
+          <a:xfrm>
+            <a:off x="777240" y="3730752"/>
+            <a:ext cx="320040" cy="320040"/>
+          </a:xfrm>
+          <a:prstGeom prst="ellipse">
+            <a:avLst/>
+          </a:prstGeom>
+          <a:solidFill>
+            <a:srgbClr val="EC4899"/>
+          </a:solidFill>
+          <a:ln>
+            <a:noFill/>
+          </a:ln>
+        </p:spPr>
+        <p:style>
+          <a:lnRef idx="1">
+            <a:schemeClr val="accent1"/>
+          </a:lnRef>
+          <a:fillRef idx="3">
+            <a:schemeClr val="accent1"/>
+          </a:fillRef>
+          <a:effectRef idx="2">
+            <a:schemeClr val="accent1"/>
+          </a:effectRef>
+          <a:fontRef idx="minor">
+            <a:schemeClr val="lt1"/>
+          </a:fontRef>
+        </p:style>
+        <p:txBody>
+          <a:bodyPr rtlCol="0" anchor="ctr"/>
+          <a:lstStyle/>
+          <a:p>
+            <a:pPr algn="ctr"/>
+          </a:p>
+        </p:txBody>
+      </p:sp>
+      <p:sp>
+        <p:nvSpPr>
+          <p:cNvPr id="17" name="TextBox 16"/>
+          <p:cNvSpPr txBox="1"/>
+          <p:nvPr/>
+        </p:nvSpPr>
+        <p:spPr>
+          <a:xfrm>
+            <a:off x="777240" y="3767328"/>
+            <a:ext cx="320040" cy="274320"/>
+          </a:xfrm>
+          <a:prstGeom prst="rect">
+            <a:avLst/>
+          </a:prstGeom>
+          <a:noFill/>
+        </p:spPr>
+        <p:txBody>
+          <a:bodyPr wrap="none">
+            <a:spAutoFit/>
+          </a:bodyPr>
+          <a:lstStyle/>
+          <a:p>
+            <a:pPr algn="ctr">
+              <a:defRPr sz="1400" b="1">
+                <a:solidFill>
+                  <a:srgbClr val="FFFFFF"/>
+                </a:solidFill>
+              </a:defRPr>
+            </a:pPr>
+            <a:r>
+              <a:t>3</a:t>
+            </a:r>
+          </a:p>
+        </p:txBody>
+      </p:sp>
+      <p:sp>
+        <p:nvSpPr>
+          <p:cNvPr id="18" name="TextBox 17"/>
+          <p:cNvSpPr txBox="1"/>
+          <p:nvPr/>
+        </p:nvSpPr>
+        <p:spPr>
+          <a:xfrm>
+            <a:off x="1280160" y="3703320"/>
+            <a:ext cx="7132320" cy="457200"/>
+          </a:xfrm>
+          <a:prstGeom prst="rect">
+            <a:avLst/>
+          </a:prstGeom>
+          <a:noFill/>
+        </p:spPr>
+        <p:txBody>
+          <a:bodyPr wrap="square">
+            <a:spAutoFit/>
+          </a:bodyPr>
+          <a:lstStyle/>
           <a:p>
             <a:pPr>
-              <a:spcAft>
-                <a:spcPts val="1600"/>
-              </a:spcAft>
-              <a:defRPr sz="2200">
-                <a:solidFill>
-                  <a:srgbClr val="323232"/>
+              <a:defRPr sz="1800">
+                <a:solidFill>
+                  <a:srgbClr val="E2E8F0"/>
                 </a:solidFill>
               </a:defRPr>
             </a:pPr>
             <a:r>
-              <a:t>• 실시간 번역 및 통역 서비스</a:t>
-            </a:r>
-          </a:p>
+              <a:t>실시간 다국어 번역 및 통역 서비스</a:t>
+            </a:r>
+          </a:p>
+        </p:txBody>
+      </p:sp>
+      <p:sp>
+        <p:nvSpPr>
+          <p:cNvPr id="19" name="Rounded Rectangle 18"/>
+          <p:cNvSpPr/>
+          <p:nvPr/>
+        </p:nvSpPr>
+        <p:spPr>
+          <a:xfrm>
+            <a:off x="548640" y="4434840"/>
+            <a:ext cx="8046720" cy="822960"/>
+          </a:xfrm>
+          <a:prstGeom prst="roundRect">
+            <a:avLst/>
+          </a:prstGeom>
+          <a:solidFill>
+            <a:srgbClr val="1E293B"/>
+          </a:solidFill>
+          <a:ln>
+            <a:noFill/>
+          </a:ln>
+        </p:spPr>
+        <p:style>
+          <a:lnRef idx="1">
+            <a:schemeClr val="accent1"/>
+          </a:lnRef>
+          <a:fillRef idx="3">
+            <a:schemeClr val="accent1"/>
+          </a:fillRef>
+          <a:effectRef idx="2">
+            <a:schemeClr val="accent1"/>
+          </a:effectRef>
+          <a:fontRef idx="minor">
+            <a:schemeClr val="lt1"/>
+          </a:fontRef>
+        </p:style>
+        <p:txBody>
+          <a:bodyPr rtlCol="0" anchor="ctr"/>
+          <a:lstStyle/>
+          <a:p>
+            <a:pPr algn="ctr"/>
+          </a:p>
+        </p:txBody>
+      </p:sp>
+      <p:sp>
+        <p:nvSpPr>
+          <p:cNvPr id="20" name="Oval 19"/>
+          <p:cNvSpPr/>
+          <p:nvPr/>
+        </p:nvSpPr>
+        <p:spPr>
+          <a:xfrm>
+            <a:off x="777240" y="4690872"/>
+            <a:ext cx="320040" cy="320040"/>
+          </a:xfrm>
+          <a:prstGeom prst="ellipse">
+            <a:avLst/>
+          </a:prstGeom>
+          <a:solidFill>
+            <a:srgbClr val="EC4899"/>
+          </a:solidFill>
+          <a:ln>
+            <a:noFill/>
+          </a:ln>
+        </p:spPr>
+        <p:style>
+          <a:lnRef idx="1">
+            <a:schemeClr val="accent1"/>
+          </a:lnRef>
+          <a:fillRef idx="3">
+            <a:schemeClr val="accent1"/>
+          </a:fillRef>
+          <a:effectRef idx="2">
+            <a:schemeClr val="accent1"/>
+          </a:effectRef>
+          <a:fontRef idx="minor">
+            <a:schemeClr val="lt1"/>
+          </a:fontRef>
+        </p:style>
+        <p:txBody>
+          <a:bodyPr rtlCol="0" anchor="ctr"/>
+          <a:lstStyle/>
+          <a:p>
+            <a:pPr algn="ctr"/>
+          </a:p>
+        </p:txBody>
+      </p:sp>
+      <p:sp>
+        <p:nvSpPr>
+          <p:cNvPr id="21" name="TextBox 20"/>
+          <p:cNvSpPr txBox="1"/>
+          <p:nvPr/>
+        </p:nvSpPr>
+        <p:spPr>
+          <a:xfrm>
+            <a:off x="777240" y="4727448"/>
+            <a:ext cx="320040" cy="274320"/>
+          </a:xfrm>
+          <a:prstGeom prst="rect">
+            <a:avLst/>
+          </a:prstGeom>
+          <a:noFill/>
+        </p:spPr>
+        <p:txBody>
+          <a:bodyPr wrap="none">
+            <a:spAutoFit/>
+          </a:bodyPr>
+          <a:lstStyle/>
+          <a:p>
+            <a:pPr algn="ctr">
+              <a:defRPr sz="1400" b="1">
+                <a:solidFill>
+                  <a:srgbClr val="FFFFFF"/>
+                </a:solidFill>
+              </a:defRPr>
+            </a:pPr>
+            <a:r>
+              <a:t>4</a:t>
+            </a:r>
+          </a:p>
+        </p:txBody>
+      </p:sp>
+      <p:sp>
+        <p:nvSpPr>
+          <p:cNvPr id="22" name="TextBox 21"/>
+          <p:cNvSpPr txBox="1"/>
+          <p:nvPr/>
+        </p:nvSpPr>
+        <p:spPr>
+          <a:xfrm>
+            <a:off x="1280160" y="4663440"/>
+            <a:ext cx="7132320" cy="457200"/>
+          </a:xfrm>
+          <a:prstGeom prst="rect">
+            <a:avLst/>
+          </a:prstGeom>
+          <a:noFill/>
+        </p:spPr>
+        <p:txBody>
+          <a:bodyPr wrap="square">
+            <a:spAutoFit/>
+          </a:bodyPr>
+          <a:lstStyle/>
           <a:p>
             <a:pPr>
-              <a:spcAft>
-                <a:spcPts val="1600"/>
-              </a:spcAft>
-              <a:defRPr sz="2200">
-                <a:solidFill>
-                  <a:srgbClr val="323232"/>
+              <a:defRPr sz="1800">
+                <a:solidFill>
+                  <a:srgbClr val="E2E8F0"/>
                 </a:solidFill>
               </a:defRPr>
             </a:pPr>
             <a:r>
-              <a:t>• 의료 영상 분석과 진단 보조</a:t>
-            </a:r>
-          </a:p>
+              <a:t>의료 영상 분석과 진단 보조 시스템</a:t>
+            </a:r>
+          </a:p>
+        </p:txBody>
+      </p:sp>
+      <p:sp>
+        <p:nvSpPr>
+          <p:cNvPr id="23" name="Rounded Rectangle 22"/>
+          <p:cNvSpPr/>
+          <p:nvPr/>
+        </p:nvSpPr>
+        <p:spPr>
+          <a:xfrm>
+            <a:off x="548640" y="5394960"/>
+            <a:ext cx="8046720" cy="822960"/>
+          </a:xfrm>
+          <a:prstGeom prst="roundRect">
+            <a:avLst/>
+          </a:prstGeom>
+          <a:solidFill>
+            <a:srgbClr val="1E293B"/>
+          </a:solidFill>
+          <a:ln>
+            <a:noFill/>
+          </a:ln>
+        </p:spPr>
+        <p:style>
+          <a:lnRef idx="1">
+            <a:schemeClr val="accent1"/>
+          </a:lnRef>
+          <a:fillRef idx="3">
+            <a:schemeClr val="accent1"/>
+          </a:fillRef>
+          <a:effectRef idx="2">
+            <a:schemeClr val="accent1"/>
+          </a:effectRef>
+          <a:fontRef idx="minor">
+            <a:schemeClr val="lt1"/>
+          </a:fontRef>
+        </p:style>
+        <p:txBody>
+          <a:bodyPr rtlCol="0" anchor="ctr"/>
+          <a:lstStyle/>
+          <a:p>
+            <a:pPr algn="ctr"/>
+          </a:p>
+        </p:txBody>
+      </p:sp>
+      <p:sp>
+        <p:nvSpPr>
+          <p:cNvPr id="24" name="Oval 23"/>
+          <p:cNvSpPr/>
+          <p:nvPr/>
+        </p:nvSpPr>
+        <p:spPr>
+          <a:xfrm>
+            <a:off x="777240" y="5650992"/>
+            <a:ext cx="320040" cy="320040"/>
+          </a:xfrm>
+          <a:prstGeom prst="ellipse">
+            <a:avLst/>
+          </a:prstGeom>
+          <a:solidFill>
+            <a:srgbClr val="EC4899"/>
+          </a:solidFill>
+          <a:ln>
+            <a:noFill/>
+          </a:ln>
+        </p:spPr>
+        <p:style>
+          <a:lnRef idx="1">
+            <a:schemeClr val="accent1"/>
+          </a:lnRef>
+          <a:fillRef idx="3">
+            <a:schemeClr val="accent1"/>
+          </a:fillRef>
+          <a:effectRef idx="2">
+            <a:schemeClr val="accent1"/>
+          </a:effectRef>
+          <a:fontRef idx="minor">
+            <a:schemeClr val="lt1"/>
+          </a:fontRef>
+        </p:style>
+        <p:txBody>
+          <a:bodyPr rtlCol="0" anchor="ctr"/>
+          <a:lstStyle/>
+          <a:p>
+            <a:pPr algn="ctr"/>
+          </a:p>
+        </p:txBody>
+      </p:sp>
+      <p:sp>
+        <p:nvSpPr>
+          <p:cNvPr id="25" name="TextBox 24"/>
+          <p:cNvSpPr txBox="1"/>
+          <p:nvPr/>
+        </p:nvSpPr>
+        <p:spPr>
+          <a:xfrm>
+            <a:off x="777240" y="5687568"/>
+            <a:ext cx="320040" cy="274320"/>
+          </a:xfrm>
+          <a:prstGeom prst="rect">
+            <a:avLst/>
+          </a:prstGeom>
+          <a:noFill/>
+        </p:spPr>
+        <p:txBody>
+          <a:bodyPr wrap="none">
+            <a:spAutoFit/>
+          </a:bodyPr>
+          <a:lstStyle/>
+          <a:p>
+            <a:pPr algn="ctr">
+              <a:defRPr sz="1400" b="1">
+                <a:solidFill>
+                  <a:srgbClr val="FFFFFF"/>
+                </a:solidFill>
+              </a:defRPr>
+            </a:pPr>
+            <a:r>
+              <a:t>5</a:t>
+            </a:r>
+          </a:p>
+        </p:txBody>
+      </p:sp>
+      <p:sp>
+        <p:nvSpPr>
+          <p:cNvPr id="26" name="TextBox 25"/>
+          <p:cNvSpPr txBox="1"/>
+          <p:nvPr/>
+        </p:nvSpPr>
+        <p:spPr>
+          <a:xfrm>
+            <a:off x="1280160" y="5623560"/>
+            <a:ext cx="7132320" cy="457200"/>
+          </a:xfrm>
+          <a:prstGeom prst="rect">
+            <a:avLst/>
+          </a:prstGeom>
+          <a:noFill/>
+        </p:spPr>
+        <p:txBody>
+          <a:bodyPr wrap="square">
+            <a:spAutoFit/>
+          </a:bodyPr>
+          <a:lstStyle/>
           <a:p>
             <a:pPr>
-              <a:spcAft>
-                <a:spcPts val="1600"/>
-              </a:spcAft>
-              <a:defRPr sz="2200">
-                <a:solidFill>
-                  <a:srgbClr val="323232"/>
+              <a:defRPr sz="1800">
+                <a:solidFill>
+                  <a:srgbClr val="E2E8F0"/>
                 </a:solidFill>
               </a:defRPr>
             </a:pPr>
             <a:r>
-              <a:t>• 자율주행 및 로보틱스 분야 활용</a:t>
+              <a:t>자율주행 및 로보틱스 분야의 인지 능력 향상</a:t>
             </a:r>
           </a:p>
         </p:txBody>
@@ -5424,7 +11416,7 @@
             <a:avLst/>
           </a:prstGeom>
           <a:solidFill>
-            <a:srgbClr val="10B981"/>
+            <a:srgbClr val="0F172A"/>
           </a:solidFill>
           <a:ln>
             <a:noFill/>
@@ -5460,8 +11452,8 @@
         </p:nvSpPr>
         <p:spPr>
           <a:xfrm>
-            <a:off x="457200" y="1828800"/>
-            <a:ext cx="8229600" cy="914400"/>
+            <a:off x="5029200" y="457200"/>
+            <a:ext cx="4572000" cy="5486400"/>
           </a:xfrm>
           <a:prstGeom prst="rect">
             <a:avLst/>
@@ -5474,10 +11466,10 @@
           </a:bodyPr>
           <a:lstStyle/>
           <a:p>
-            <a:pPr algn="ctr">
-              <a:defRPr sz="7200" b="1">
-                <a:solidFill>
-                  <a:srgbClr val="FFFFFF"/>
+            <a:pPr algn="r">
+              <a:defRPr sz="28000" b="1">
+                <a:solidFill>
+                  <a:srgbClr val="1E293B"/>
                 </a:solidFill>
               </a:defRPr>
             </a:pPr>
@@ -5489,14 +11481,57 @@
       </p:sp>
       <p:sp>
         <p:nvSpPr>
-          <p:cNvPr id="4" name="TextBox 3"/>
+          <p:cNvPr id="4" name="Rectangle 3"/>
+          <p:cNvSpPr/>
+          <p:nvPr/>
+        </p:nvSpPr>
+        <p:spPr>
+          <a:xfrm>
+            <a:off x="731520" y="2926080"/>
+            <a:ext cx="731520" cy="54864"/>
+          </a:xfrm>
+          <a:prstGeom prst="rect">
+            <a:avLst/>
+          </a:prstGeom>
+          <a:solidFill>
+            <a:srgbClr val="0EA5E9"/>
+          </a:solidFill>
+          <a:ln>
+            <a:noFill/>
+          </a:ln>
+        </p:spPr>
+        <p:style>
+          <a:lnRef idx="1">
+            <a:schemeClr val="accent1"/>
+          </a:lnRef>
+          <a:fillRef idx="3">
+            <a:schemeClr val="accent1"/>
+          </a:fillRef>
+          <a:effectRef idx="2">
+            <a:schemeClr val="accent1"/>
+          </a:effectRef>
+          <a:fontRef idx="minor">
+            <a:schemeClr val="lt1"/>
+          </a:fontRef>
+        </p:style>
+        <p:txBody>
+          <a:bodyPr rtlCol="0" anchor="ctr"/>
+          <a:lstStyle/>
+          <a:p>
+            <a:pPr algn="ctr"/>
+          </a:p>
+        </p:txBody>
+      </p:sp>
+      <p:sp>
+        <p:nvSpPr>
+          <p:cNvPr id="5" name="TextBox 4"/>
           <p:cNvSpPr txBox="1"/>
           <p:nvPr/>
         </p:nvSpPr>
         <p:spPr>
           <a:xfrm>
-            <a:off x="457200" y="2926080"/>
-            <a:ext cx="8229600" cy="914400"/>
+            <a:off x="731520" y="2286000"/>
+            <a:ext cx="1828800" cy="548640"/>
           </a:xfrm>
           <a:prstGeom prst="rect">
             <a:avLst/>
@@ -5509,8 +11544,43 @@
           </a:bodyPr>
           <a:lstStyle/>
           <a:p>
-            <a:pPr algn="ctr">
-              <a:defRPr sz="4000">
+            <a:pPr>
+              <a:defRPr sz="1400" b="1">
+                <a:solidFill>
+                  <a:srgbClr val="0EA5E9"/>
+                </a:solidFill>
+              </a:defRPr>
+            </a:pPr>
+            <a:r>
+              <a:t>SECTION 03</a:t>
+            </a:r>
+          </a:p>
+        </p:txBody>
+      </p:sp>
+      <p:sp>
+        <p:nvSpPr>
+          <p:cNvPr id="6" name="TextBox 5"/>
+          <p:cNvSpPr txBox="1"/>
+          <p:nvPr/>
+        </p:nvSpPr>
+        <p:spPr>
+          <a:xfrm>
+            <a:off x="731520" y="3200400"/>
+            <a:ext cx="6400800" cy="1097280"/>
+          </a:xfrm>
+          <a:prstGeom prst="rect">
+            <a:avLst/>
+          </a:prstGeom>
+          <a:noFill/>
+        </p:spPr>
+        <p:txBody>
+          <a:bodyPr wrap="none">
+            <a:spAutoFit/>
+          </a:bodyPr>
+          <a:lstStyle/>
+          <a:p>
+            <a:pPr>
+              <a:defRPr sz="4400" b="1">
                 <a:solidFill>
                   <a:srgbClr val="FFFFFF"/>
                 </a:solidFill>
@@ -5549,13 +11619,13 @@
         <p:spPr>
           <a:xfrm>
             <a:off x="0" y="0"/>
-            <a:ext cx="9144000" cy="1097280"/>
-          </a:xfrm>
-          <a:prstGeom prst="rect">
-            <a:avLst/>
-          </a:prstGeom>
-          <a:solidFill>
-            <a:srgbClr val="F59E0B"/>
+            <a:ext cx="9144000" cy="6858000"/>
+          </a:xfrm>
+          <a:prstGeom prst="rect">
+            <a:avLst/>
+          </a:prstGeom>
+          <a:solidFill>
+            <a:srgbClr val="0F172A"/>
           </a:solidFill>
           <a:ln>
             <a:noFill/>
@@ -5585,14 +11655,57 @@
       </p:sp>
       <p:sp>
         <p:nvSpPr>
-          <p:cNvPr id="3" name="TextBox 2"/>
+          <p:cNvPr id="3" name="Rectangle 2"/>
+          <p:cNvSpPr/>
+          <p:nvPr/>
+        </p:nvSpPr>
+        <p:spPr>
+          <a:xfrm>
+            <a:off x="0" y="0"/>
+            <a:ext cx="137160" cy="6858000"/>
+          </a:xfrm>
+          <a:prstGeom prst="rect">
+            <a:avLst/>
+          </a:prstGeom>
+          <a:solidFill>
+            <a:srgbClr val="0EA5E9"/>
+          </a:solidFill>
+          <a:ln>
+            <a:noFill/>
+          </a:ln>
+        </p:spPr>
+        <p:style>
+          <a:lnRef idx="1">
+            <a:schemeClr val="accent1"/>
+          </a:lnRef>
+          <a:fillRef idx="3">
+            <a:schemeClr val="accent1"/>
+          </a:fillRef>
+          <a:effectRef idx="2">
+            <a:schemeClr val="accent1"/>
+          </a:effectRef>
+          <a:fontRef idx="minor">
+            <a:schemeClr val="lt1"/>
+          </a:fontRef>
+        </p:style>
+        <p:txBody>
+          <a:bodyPr rtlCol="0" anchor="ctr"/>
+          <a:lstStyle/>
+          <a:p>
+            <a:pPr algn="ctr"/>
+          </a:p>
+        </p:txBody>
+      </p:sp>
+      <p:sp>
+        <p:nvSpPr>
+          <p:cNvPr id="4" name="TextBox 3"/>
           <p:cNvSpPr txBox="1"/>
           <p:nvPr/>
         </p:nvSpPr>
         <p:spPr>
           <a:xfrm>
-            <a:off x="457200" y="274320"/>
-            <a:ext cx="8229600" cy="731520"/>
+            <a:off x="548640" y="320040"/>
+            <a:ext cx="7315200" cy="365760"/>
           </a:xfrm>
           <a:prstGeom prst="rect">
             <a:avLst/>
@@ -5606,28 +11719,227 @@
           <a:lstStyle/>
           <a:p>
             <a:pPr>
-              <a:defRPr sz="3600" b="1">
+              <a:defRPr sz="1200" b="1">
+                <a:solidFill>
+                  <a:srgbClr val="0EA5E9"/>
+                </a:solidFill>
+              </a:defRPr>
+            </a:pPr>
+            <a:r>
+              <a:t>SECTION 03 · AI 에이전트</a:t>
+            </a:r>
+          </a:p>
+        </p:txBody>
+      </p:sp>
+      <p:sp>
+        <p:nvSpPr>
+          <p:cNvPr id="5" name="TextBox 4"/>
+          <p:cNvSpPr txBox="1"/>
+          <p:nvPr/>
+        </p:nvSpPr>
+        <p:spPr>
+          <a:xfrm>
+            <a:off x="548640" y="640080"/>
+            <a:ext cx="7315200" cy="640080"/>
+          </a:xfrm>
+          <a:prstGeom prst="rect">
+            <a:avLst/>
+          </a:prstGeom>
+          <a:noFill/>
+        </p:spPr>
+        <p:txBody>
+          <a:bodyPr wrap="none">
+            <a:spAutoFit/>
+          </a:bodyPr>
+          <a:lstStyle/>
+          <a:p>
+            <a:pPr>
+              <a:defRPr sz="3200" b="1">
                 <a:solidFill>
                   <a:srgbClr val="FFFFFF"/>
                 </a:solidFill>
               </a:defRPr>
             </a:pPr>
             <a:r>
-              <a:t>🚀 AI 에이전트 (Agentic AI)</a:t>
-            </a:r>
-          </a:p>
-        </p:txBody>
-      </p:sp>
-      <p:sp>
-        <p:nvSpPr>
-          <p:cNvPr id="4" name="TextBox 3"/>
+              <a:t>Agentic AI</a:t>
+            </a:r>
+          </a:p>
+        </p:txBody>
+      </p:sp>
+      <p:sp>
+        <p:nvSpPr>
+          <p:cNvPr id="6" name="Rectangle 5"/>
+          <p:cNvSpPr/>
+          <p:nvPr/>
+        </p:nvSpPr>
+        <p:spPr>
+          <a:xfrm>
+            <a:off x="548640" y="1325880"/>
+            <a:ext cx="8046720" cy="13716"/>
+          </a:xfrm>
+          <a:prstGeom prst="rect">
+            <a:avLst/>
+          </a:prstGeom>
+          <a:solidFill>
+            <a:srgbClr val="1E293B"/>
+          </a:solidFill>
+          <a:ln>
+            <a:noFill/>
+          </a:ln>
+        </p:spPr>
+        <p:style>
+          <a:lnRef idx="1">
+            <a:schemeClr val="accent1"/>
+          </a:lnRef>
+          <a:fillRef idx="3">
+            <a:schemeClr val="accent1"/>
+          </a:fillRef>
+          <a:effectRef idx="2">
+            <a:schemeClr val="accent1"/>
+          </a:effectRef>
+          <a:fontRef idx="minor">
+            <a:schemeClr val="lt1"/>
+          </a:fontRef>
+        </p:style>
+        <p:txBody>
+          <a:bodyPr rtlCol="0" anchor="ctr"/>
+          <a:lstStyle/>
+          <a:p>
+            <a:pPr algn="ctr"/>
+          </a:p>
+        </p:txBody>
+      </p:sp>
+      <p:sp>
+        <p:nvSpPr>
+          <p:cNvPr id="7" name="Rounded Rectangle 6"/>
+          <p:cNvSpPr/>
+          <p:nvPr/>
+        </p:nvSpPr>
+        <p:spPr>
+          <a:xfrm>
+            <a:off x="548640" y="1554480"/>
+            <a:ext cx="8046720" cy="822960"/>
+          </a:xfrm>
+          <a:prstGeom prst="roundRect">
+            <a:avLst/>
+          </a:prstGeom>
+          <a:solidFill>
+            <a:srgbClr val="1E293B"/>
+          </a:solidFill>
+          <a:ln>
+            <a:noFill/>
+          </a:ln>
+        </p:spPr>
+        <p:style>
+          <a:lnRef idx="1">
+            <a:schemeClr val="accent1"/>
+          </a:lnRef>
+          <a:fillRef idx="3">
+            <a:schemeClr val="accent1"/>
+          </a:fillRef>
+          <a:effectRef idx="2">
+            <a:schemeClr val="accent1"/>
+          </a:effectRef>
+          <a:fontRef idx="minor">
+            <a:schemeClr val="lt1"/>
+          </a:fontRef>
+        </p:style>
+        <p:txBody>
+          <a:bodyPr rtlCol="0" anchor="ctr"/>
+          <a:lstStyle/>
+          <a:p>
+            <a:pPr algn="ctr"/>
+          </a:p>
+        </p:txBody>
+      </p:sp>
+      <p:sp>
+        <p:nvSpPr>
+          <p:cNvPr id="8" name="Oval 7"/>
+          <p:cNvSpPr/>
+          <p:nvPr/>
+        </p:nvSpPr>
+        <p:spPr>
+          <a:xfrm>
+            <a:off x="777240" y="1810512"/>
+            <a:ext cx="320040" cy="320040"/>
+          </a:xfrm>
+          <a:prstGeom prst="ellipse">
+            <a:avLst/>
+          </a:prstGeom>
+          <a:solidFill>
+            <a:srgbClr val="0EA5E9"/>
+          </a:solidFill>
+          <a:ln>
+            <a:noFill/>
+          </a:ln>
+        </p:spPr>
+        <p:style>
+          <a:lnRef idx="1">
+            <a:schemeClr val="accent1"/>
+          </a:lnRef>
+          <a:fillRef idx="3">
+            <a:schemeClr val="accent1"/>
+          </a:fillRef>
+          <a:effectRef idx="2">
+            <a:schemeClr val="accent1"/>
+          </a:effectRef>
+          <a:fontRef idx="minor">
+            <a:schemeClr val="lt1"/>
+          </a:fontRef>
+        </p:style>
+        <p:txBody>
+          <a:bodyPr rtlCol="0" anchor="ctr"/>
+          <a:lstStyle/>
+          <a:p>
+            <a:pPr algn="ctr"/>
+          </a:p>
+        </p:txBody>
+      </p:sp>
+      <p:sp>
+        <p:nvSpPr>
+          <p:cNvPr id="9" name="TextBox 8"/>
           <p:cNvSpPr txBox="1"/>
           <p:nvPr/>
         </p:nvSpPr>
         <p:spPr>
           <a:xfrm>
-            <a:off x="640080" y="1463040"/>
-            <a:ext cx="7863840" cy="4572000"/>
+            <a:off x="777240" y="1847088"/>
+            <a:ext cx="320040" cy="274320"/>
+          </a:xfrm>
+          <a:prstGeom prst="rect">
+            <a:avLst/>
+          </a:prstGeom>
+          <a:noFill/>
+        </p:spPr>
+        <p:txBody>
+          <a:bodyPr wrap="none">
+            <a:spAutoFit/>
+          </a:bodyPr>
+          <a:lstStyle/>
+          <a:p>
+            <a:pPr algn="ctr">
+              <a:defRPr sz="1400" b="1">
+                <a:solidFill>
+                  <a:srgbClr val="FFFFFF"/>
+                </a:solidFill>
+              </a:defRPr>
+            </a:pPr>
+            <a:r>
+              <a:t>1</a:t>
+            </a:r>
+          </a:p>
+        </p:txBody>
+      </p:sp>
+      <p:sp>
+        <p:nvSpPr>
+          <p:cNvPr id="10" name="TextBox 9"/>
+          <p:cNvSpPr txBox="1"/>
+          <p:nvPr/>
+        </p:nvSpPr>
+        <p:spPr>
+          <a:xfrm>
+            <a:off x="1280160" y="1783080"/>
+            <a:ext cx="7132320" cy="457200"/>
           </a:xfrm>
           <a:prstGeom prst="rect">
             <a:avLst/>
@@ -5641,77 +11953,638 @@
           <a:lstStyle/>
           <a:p>
             <a:pPr>
-              <a:spcAft>
-                <a:spcPts val="1600"/>
-              </a:spcAft>
-              <a:defRPr sz="2200">
-                <a:solidFill>
-                  <a:srgbClr val="323232"/>
+              <a:defRPr sz="1800">
+                <a:solidFill>
+                  <a:srgbClr val="E2E8F0"/>
                 </a:solidFill>
               </a:defRPr>
             </a:pPr>
             <a:r>
-              <a:t>• 자율적으로 작업을 계획하고 실행하는 AI</a:t>
-            </a:r>
-          </a:p>
+              <a:t>자율적으로 목표를 설정하고 작업을 계획·실행하는 AI</a:t>
+            </a:r>
+          </a:p>
+        </p:txBody>
+      </p:sp>
+      <p:sp>
+        <p:nvSpPr>
+          <p:cNvPr id="11" name="Rounded Rectangle 10"/>
+          <p:cNvSpPr/>
+          <p:nvPr/>
+        </p:nvSpPr>
+        <p:spPr>
+          <a:xfrm>
+            <a:off x="548640" y="2514600"/>
+            <a:ext cx="8046720" cy="822960"/>
+          </a:xfrm>
+          <a:prstGeom prst="roundRect">
+            <a:avLst/>
+          </a:prstGeom>
+          <a:solidFill>
+            <a:srgbClr val="1E293B"/>
+          </a:solidFill>
+          <a:ln>
+            <a:noFill/>
+          </a:ln>
+        </p:spPr>
+        <p:style>
+          <a:lnRef idx="1">
+            <a:schemeClr val="accent1"/>
+          </a:lnRef>
+          <a:fillRef idx="3">
+            <a:schemeClr val="accent1"/>
+          </a:fillRef>
+          <a:effectRef idx="2">
+            <a:schemeClr val="accent1"/>
+          </a:effectRef>
+          <a:fontRef idx="minor">
+            <a:schemeClr val="lt1"/>
+          </a:fontRef>
+        </p:style>
+        <p:txBody>
+          <a:bodyPr rtlCol="0" anchor="ctr"/>
+          <a:lstStyle/>
+          <a:p>
+            <a:pPr algn="ctr"/>
+          </a:p>
+        </p:txBody>
+      </p:sp>
+      <p:sp>
+        <p:nvSpPr>
+          <p:cNvPr id="12" name="Oval 11"/>
+          <p:cNvSpPr/>
+          <p:nvPr/>
+        </p:nvSpPr>
+        <p:spPr>
+          <a:xfrm>
+            <a:off x="777240" y="2770632"/>
+            <a:ext cx="320040" cy="320040"/>
+          </a:xfrm>
+          <a:prstGeom prst="ellipse">
+            <a:avLst/>
+          </a:prstGeom>
+          <a:solidFill>
+            <a:srgbClr val="0EA5E9"/>
+          </a:solidFill>
+          <a:ln>
+            <a:noFill/>
+          </a:ln>
+        </p:spPr>
+        <p:style>
+          <a:lnRef idx="1">
+            <a:schemeClr val="accent1"/>
+          </a:lnRef>
+          <a:fillRef idx="3">
+            <a:schemeClr val="accent1"/>
+          </a:fillRef>
+          <a:effectRef idx="2">
+            <a:schemeClr val="accent1"/>
+          </a:effectRef>
+          <a:fontRef idx="minor">
+            <a:schemeClr val="lt1"/>
+          </a:fontRef>
+        </p:style>
+        <p:txBody>
+          <a:bodyPr rtlCol="0" anchor="ctr"/>
+          <a:lstStyle/>
+          <a:p>
+            <a:pPr algn="ctr"/>
+          </a:p>
+        </p:txBody>
+      </p:sp>
+      <p:sp>
+        <p:nvSpPr>
+          <p:cNvPr id="13" name="TextBox 12"/>
+          <p:cNvSpPr txBox="1"/>
+          <p:nvPr/>
+        </p:nvSpPr>
+        <p:spPr>
+          <a:xfrm>
+            <a:off x="777240" y="2807208"/>
+            <a:ext cx="320040" cy="274320"/>
+          </a:xfrm>
+          <a:prstGeom prst="rect">
+            <a:avLst/>
+          </a:prstGeom>
+          <a:noFill/>
+        </p:spPr>
+        <p:txBody>
+          <a:bodyPr wrap="none">
+            <a:spAutoFit/>
+          </a:bodyPr>
+          <a:lstStyle/>
+          <a:p>
+            <a:pPr algn="ctr">
+              <a:defRPr sz="1400" b="1">
+                <a:solidFill>
+                  <a:srgbClr val="FFFFFF"/>
+                </a:solidFill>
+              </a:defRPr>
+            </a:pPr>
+            <a:r>
+              <a:t>2</a:t>
+            </a:r>
+          </a:p>
+        </p:txBody>
+      </p:sp>
+      <p:sp>
+        <p:nvSpPr>
+          <p:cNvPr id="14" name="TextBox 13"/>
+          <p:cNvSpPr txBox="1"/>
+          <p:nvPr/>
+        </p:nvSpPr>
+        <p:spPr>
+          <a:xfrm>
+            <a:off x="1280160" y="2743200"/>
+            <a:ext cx="7132320" cy="457200"/>
+          </a:xfrm>
+          <a:prstGeom prst="rect">
+            <a:avLst/>
+          </a:prstGeom>
+          <a:noFill/>
+        </p:spPr>
+        <p:txBody>
+          <a:bodyPr wrap="square">
+            <a:spAutoFit/>
+          </a:bodyPr>
+          <a:lstStyle/>
           <a:p>
             <a:pPr>
-              <a:spcAft>
-                <a:spcPts val="1600"/>
-              </a:spcAft>
-              <a:defRPr sz="2200">
-                <a:solidFill>
-                  <a:srgbClr val="323232"/>
+              <a:defRPr sz="1800">
+                <a:solidFill>
+                  <a:srgbClr val="E2E8F0"/>
                 </a:solidFill>
               </a:defRPr>
             </a:pPr>
             <a:r>
-              <a:t>• 복잡한 업무 프로세스 자동화</a:t>
-            </a:r>
-          </a:p>
+              <a:t>복잡한 비즈니스 프로세스의 End-to-End 자동화</a:t>
+            </a:r>
+          </a:p>
+        </p:txBody>
+      </p:sp>
+      <p:sp>
+        <p:nvSpPr>
+          <p:cNvPr id="15" name="Rounded Rectangle 14"/>
+          <p:cNvSpPr/>
+          <p:nvPr/>
+        </p:nvSpPr>
+        <p:spPr>
+          <a:xfrm>
+            <a:off x="548640" y="3474720"/>
+            <a:ext cx="8046720" cy="822960"/>
+          </a:xfrm>
+          <a:prstGeom prst="roundRect">
+            <a:avLst/>
+          </a:prstGeom>
+          <a:solidFill>
+            <a:srgbClr val="1E293B"/>
+          </a:solidFill>
+          <a:ln>
+            <a:noFill/>
+          </a:ln>
+        </p:spPr>
+        <p:style>
+          <a:lnRef idx="1">
+            <a:schemeClr val="accent1"/>
+          </a:lnRef>
+          <a:fillRef idx="3">
+            <a:schemeClr val="accent1"/>
+          </a:fillRef>
+          <a:effectRef idx="2">
+            <a:schemeClr val="accent1"/>
+          </a:effectRef>
+          <a:fontRef idx="minor">
+            <a:schemeClr val="lt1"/>
+          </a:fontRef>
+        </p:style>
+        <p:txBody>
+          <a:bodyPr rtlCol="0" anchor="ctr"/>
+          <a:lstStyle/>
+          <a:p>
+            <a:pPr algn="ctr"/>
+          </a:p>
+        </p:txBody>
+      </p:sp>
+      <p:sp>
+        <p:nvSpPr>
+          <p:cNvPr id="16" name="Oval 15"/>
+          <p:cNvSpPr/>
+          <p:nvPr/>
+        </p:nvSpPr>
+        <p:spPr>
+          <a:xfrm>
+            <a:off x="777240" y="3730752"/>
+            <a:ext cx="320040" cy="320040"/>
+          </a:xfrm>
+          <a:prstGeom prst="ellipse">
+            <a:avLst/>
+          </a:prstGeom>
+          <a:solidFill>
+            <a:srgbClr val="0EA5E9"/>
+          </a:solidFill>
+          <a:ln>
+            <a:noFill/>
+          </a:ln>
+        </p:spPr>
+        <p:style>
+          <a:lnRef idx="1">
+            <a:schemeClr val="accent1"/>
+          </a:lnRef>
+          <a:fillRef idx="3">
+            <a:schemeClr val="accent1"/>
+          </a:fillRef>
+          <a:effectRef idx="2">
+            <a:schemeClr val="accent1"/>
+          </a:effectRef>
+          <a:fontRef idx="minor">
+            <a:schemeClr val="lt1"/>
+          </a:fontRef>
+        </p:style>
+        <p:txBody>
+          <a:bodyPr rtlCol="0" anchor="ctr"/>
+          <a:lstStyle/>
+          <a:p>
+            <a:pPr algn="ctr"/>
+          </a:p>
+        </p:txBody>
+      </p:sp>
+      <p:sp>
+        <p:nvSpPr>
+          <p:cNvPr id="17" name="TextBox 16"/>
+          <p:cNvSpPr txBox="1"/>
+          <p:nvPr/>
+        </p:nvSpPr>
+        <p:spPr>
+          <a:xfrm>
+            <a:off x="777240" y="3767328"/>
+            <a:ext cx="320040" cy="274320"/>
+          </a:xfrm>
+          <a:prstGeom prst="rect">
+            <a:avLst/>
+          </a:prstGeom>
+          <a:noFill/>
+        </p:spPr>
+        <p:txBody>
+          <a:bodyPr wrap="none">
+            <a:spAutoFit/>
+          </a:bodyPr>
+          <a:lstStyle/>
+          <a:p>
+            <a:pPr algn="ctr">
+              <a:defRPr sz="1400" b="1">
+                <a:solidFill>
+                  <a:srgbClr val="FFFFFF"/>
+                </a:solidFill>
+              </a:defRPr>
+            </a:pPr>
+            <a:r>
+              <a:t>3</a:t>
+            </a:r>
+          </a:p>
+        </p:txBody>
+      </p:sp>
+      <p:sp>
+        <p:nvSpPr>
+          <p:cNvPr id="18" name="TextBox 17"/>
+          <p:cNvSpPr txBox="1"/>
+          <p:nvPr/>
+        </p:nvSpPr>
+        <p:spPr>
+          <a:xfrm>
+            <a:off x="1280160" y="3703320"/>
+            <a:ext cx="7132320" cy="457200"/>
+          </a:xfrm>
+          <a:prstGeom prst="rect">
+            <a:avLst/>
+          </a:prstGeom>
+          <a:noFill/>
+        </p:spPr>
+        <p:txBody>
+          <a:bodyPr wrap="square">
+            <a:spAutoFit/>
+          </a:bodyPr>
+          <a:lstStyle/>
           <a:p>
             <a:pPr>
-              <a:spcAft>
-                <a:spcPts val="1600"/>
-              </a:spcAft>
-              <a:defRPr sz="2200">
-                <a:solidFill>
-                  <a:srgbClr val="323232"/>
+              <a:defRPr sz="1800">
+                <a:solidFill>
+                  <a:srgbClr val="E2E8F0"/>
                 </a:solidFill>
               </a:defRPr>
             </a:pPr>
             <a:r>
-              <a:t>• 웹 브라우징, 파일 관리, 코딩 등 수행</a:t>
-            </a:r>
-          </a:p>
+              <a:t>웹 브라우징, 파일 관리, 코딩 등 다양한 태스크 수행</a:t>
+            </a:r>
+          </a:p>
+        </p:txBody>
+      </p:sp>
+      <p:sp>
+        <p:nvSpPr>
+          <p:cNvPr id="19" name="Rounded Rectangle 18"/>
+          <p:cNvSpPr/>
+          <p:nvPr/>
+        </p:nvSpPr>
+        <p:spPr>
+          <a:xfrm>
+            <a:off x="548640" y="4434840"/>
+            <a:ext cx="8046720" cy="822960"/>
+          </a:xfrm>
+          <a:prstGeom prst="roundRect">
+            <a:avLst/>
+          </a:prstGeom>
+          <a:solidFill>
+            <a:srgbClr val="1E293B"/>
+          </a:solidFill>
+          <a:ln>
+            <a:noFill/>
+          </a:ln>
+        </p:spPr>
+        <p:style>
+          <a:lnRef idx="1">
+            <a:schemeClr val="accent1"/>
+          </a:lnRef>
+          <a:fillRef idx="3">
+            <a:schemeClr val="accent1"/>
+          </a:fillRef>
+          <a:effectRef idx="2">
+            <a:schemeClr val="accent1"/>
+          </a:effectRef>
+          <a:fontRef idx="minor">
+            <a:schemeClr val="lt1"/>
+          </a:fontRef>
+        </p:style>
+        <p:txBody>
+          <a:bodyPr rtlCol="0" anchor="ctr"/>
+          <a:lstStyle/>
+          <a:p>
+            <a:pPr algn="ctr"/>
+          </a:p>
+        </p:txBody>
+      </p:sp>
+      <p:sp>
+        <p:nvSpPr>
+          <p:cNvPr id="20" name="Oval 19"/>
+          <p:cNvSpPr/>
+          <p:nvPr/>
+        </p:nvSpPr>
+        <p:spPr>
+          <a:xfrm>
+            <a:off x="777240" y="4690872"/>
+            <a:ext cx="320040" cy="320040"/>
+          </a:xfrm>
+          <a:prstGeom prst="ellipse">
+            <a:avLst/>
+          </a:prstGeom>
+          <a:solidFill>
+            <a:srgbClr val="0EA5E9"/>
+          </a:solidFill>
+          <a:ln>
+            <a:noFill/>
+          </a:ln>
+        </p:spPr>
+        <p:style>
+          <a:lnRef idx="1">
+            <a:schemeClr val="accent1"/>
+          </a:lnRef>
+          <a:fillRef idx="3">
+            <a:schemeClr val="accent1"/>
+          </a:fillRef>
+          <a:effectRef idx="2">
+            <a:schemeClr val="accent1"/>
+          </a:effectRef>
+          <a:fontRef idx="minor">
+            <a:schemeClr val="lt1"/>
+          </a:fontRef>
+        </p:style>
+        <p:txBody>
+          <a:bodyPr rtlCol="0" anchor="ctr"/>
+          <a:lstStyle/>
+          <a:p>
+            <a:pPr algn="ctr"/>
+          </a:p>
+        </p:txBody>
+      </p:sp>
+      <p:sp>
+        <p:nvSpPr>
+          <p:cNvPr id="21" name="TextBox 20"/>
+          <p:cNvSpPr txBox="1"/>
+          <p:nvPr/>
+        </p:nvSpPr>
+        <p:spPr>
+          <a:xfrm>
+            <a:off x="777240" y="4727448"/>
+            <a:ext cx="320040" cy="274320"/>
+          </a:xfrm>
+          <a:prstGeom prst="rect">
+            <a:avLst/>
+          </a:prstGeom>
+          <a:noFill/>
+        </p:spPr>
+        <p:txBody>
+          <a:bodyPr wrap="none">
+            <a:spAutoFit/>
+          </a:bodyPr>
+          <a:lstStyle/>
+          <a:p>
+            <a:pPr algn="ctr">
+              <a:defRPr sz="1400" b="1">
+                <a:solidFill>
+                  <a:srgbClr val="FFFFFF"/>
+                </a:solidFill>
+              </a:defRPr>
+            </a:pPr>
+            <a:r>
+              <a:t>4</a:t>
+            </a:r>
+          </a:p>
+        </p:txBody>
+      </p:sp>
+      <p:sp>
+        <p:nvSpPr>
+          <p:cNvPr id="22" name="TextBox 21"/>
+          <p:cNvSpPr txBox="1"/>
+          <p:nvPr/>
+        </p:nvSpPr>
+        <p:spPr>
+          <a:xfrm>
+            <a:off x="1280160" y="4663440"/>
+            <a:ext cx="7132320" cy="457200"/>
+          </a:xfrm>
+          <a:prstGeom prst="rect">
+            <a:avLst/>
+          </a:prstGeom>
+          <a:noFill/>
+        </p:spPr>
+        <p:txBody>
+          <a:bodyPr wrap="square">
+            <a:spAutoFit/>
+          </a:bodyPr>
+          <a:lstStyle/>
           <a:p>
             <a:pPr>
-              <a:spcAft>
-                <a:spcPts val="1600"/>
-              </a:spcAft>
-              <a:defRPr sz="2200">
-                <a:solidFill>
-                  <a:srgbClr val="323232"/>
+              <a:defRPr sz="1800">
+                <a:solidFill>
+                  <a:srgbClr val="E2E8F0"/>
                 </a:solidFill>
               </a:defRPr>
             </a:pPr>
             <a:r>
-              <a:t>• 인간과 AI의 협업 워크플로우</a:t>
-            </a:r>
-          </a:p>
+              <a:t>인간과 AI의 협업 기반 하이브리드 워크플로우</a:t>
+            </a:r>
+          </a:p>
+        </p:txBody>
+      </p:sp>
+      <p:sp>
+        <p:nvSpPr>
+          <p:cNvPr id="23" name="Rounded Rectangle 22"/>
+          <p:cNvSpPr/>
+          <p:nvPr/>
+        </p:nvSpPr>
+        <p:spPr>
+          <a:xfrm>
+            <a:off x="548640" y="5394960"/>
+            <a:ext cx="8046720" cy="822960"/>
+          </a:xfrm>
+          <a:prstGeom prst="roundRect">
+            <a:avLst/>
+          </a:prstGeom>
+          <a:solidFill>
+            <a:srgbClr val="1E293B"/>
+          </a:solidFill>
+          <a:ln>
+            <a:noFill/>
+          </a:ln>
+        </p:spPr>
+        <p:style>
+          <a:lnRef idx="1">
+            <a:schemeClr val="accent1"/>
+          </a:lnRef>
+          <a:fillRef idx="3">
+            <a:schemeClr val="accent1"/>
+          </a:fillRef>
+          <a:effectRef idx="2">
+            <a:schemeClr val="accent1"/>
+          </a:effectRef>
+          <a:fontRef idx="minor">
+            <a:schemeClr val="lt1"/>
+          </a:fontRef>
+        </p:style>
+        <p:txBody>
+          <a:bodyPr rtlCol="0" anchor="ctr"/>
+          <a:lstStyle/>
+          <a:p>
+            <a:pPr algn="ctr"/>
+          </a:p>
+        </p:txBody>
+      </p:sp>
+      <p:sp>
+        <p:nvSpPr>
+          <p:cNvPr id="24" name="Oval 23"/>
+          <p:cNvSpPr/>
+          <p:nvPr/>
+        </p:nvSpPr>
+        <p:spPr>
+          <a:xfrm>
+            <a:off x="777240" y="5650992"/>
+            <a:ext cx="320040" cy="320040"/>
+          </a:xfrm>
+          <a:prstGeom prst="ellipse">
+            <a:avLst/>
+          </a:prstGeom>
+          <a:solidFill>
+            <a:srgbClr val="0EA5E9"/>
+          </a:solidFill>
+          <a:ln>
+            <a:noFill/>
+          </a:ln>
+        </p:spPr>
+        <p:style>
+          <a:lnRef idx="1">
+            <a:schemeClr val="accent1"/>
+          </a:lnRef>
+          <a:fillRef idx="3">
+            <a:schemeClr val="accent1"/>
+          </a:fillRef>
+          <a:effectRef idx="2">
+            <a:schemeClr val="accent1"/>
+          </a:effectRef>
+          <a:fontRef idx="minor">
+            <a:schemeClr val="lt1"/>
+          </a:fontRef>
+        </p:style>
+        <p:txBody>
+          <a:bodyPr rtlCol="0" anchor="ctr"/>
+          <a:lstStyle/>
+          <a:p>
+            <a:pPr algn="ctr"/>
+          </a:p>
+        </p:txBody>
+      </p:sp>
+      <p:sp>
+        <p:nvSpPr>
+          <p:cNvPr id="25" name="TextBox 24"/>
+          <p:cNvSpPr txBox="1"/>
+          <p:nvPr/>
+        </p:nvSpPr>
+        <p:spPr>
+          <a:xfrm>
+            <a:off x="777240" y="5687568"/>
+            <a:ext cx="320040" cy="274320"/>
+          </a:xfrm>
+          <a:prstGeom prst="rect">
+            <a:avLst/>
+          </a:prstGeom>
+          <a:noFill/>
+        </p:spPr>
+        <p:txBody>
+          <a:bodyPr wrap="none">
+            <a:spAutoFit/>
+          </a:bodyPr>
+          <a:lstStyle/>
+          <a:p>
+            <a:pPr algn="ctr">
+              <a:defRPr sz="1400" b="1">
+                <a:solidFill>
+                  <a:srgbClr val="FFFFFF"/>
+                </a:solidFill>
+              </a:defRPr>
+            </a:pPr>
+            <a:r>
+              <a:t>5</a:t>
+            </a:r>
+          </a:p>
+        </p:txBody>
+      </p:sp>
+      <p:sp>
+        <p:nvSpPr>
+          <p:cNvPr id="26" name="TextBox 25"/>
+          <p:cNvSpPr txBox="1"/>
+          <p:nvPr/>
+        </p:nvSpPr>
+        <p:spPr>
+          <a:xfrm>
+            <a:off x="1280160" y="5623560"/>
+            <a:ext cx="7132320" cy="457200"/>
+          </a:xfrm>
+          <a:prstGeom prst="rect">
+            <a:avLst/>
+          </a:prstGeom>
+          <a:noFill/>
+        </p:spPr>
+        <p:txBody>
+          <a:bodyPr wrap="square">
+            <a:spAutoFit/>
+          </a:bodyPr>
+          <a:lstStyle/>
           <a:p>
             <a:pPr>
-              <a:spcAft>
-                <a:spcPts val="1600"/>
-              </a:spcAft>
-              <a:defRPr sz="2200">
-                <a:solidFill>
-                  <a:srgbClr val="323232"/>
+              <a:defRPr sz="1800">
+                <a:solidFill>
+                  <a:srgbClr val="E2E8F0"/>
                 </a:solidFill>
               </a:defRPr>
             </a:pPr>
             <a:r>
-              <a:t>• 2025년 가장 주목받는 AI 트렌드</a:t>
+              <a:t>2025년 가장 주목받는 AI 기술 트렌드</a:t>
             </a:r>
           </a:p>
         </p:txBody>
@@ -5749,7 +12622,7 @@
             <a:avLst/>
           </a:prstGeom>
           <a:solidFill>
-            <a:srgbClr val="10B981"/>
+            <a:srgbClr val="0F172A"/>
           </a:solidFill>
           <a:ln>
             <a:noFill/>
@@ -5785,8 +12658,8 @@
         </p:nvSpPr>
         <p:spPr>
           <a:xfrm>
-            <a:off x="457200" y="1828800"/>
-            <a:ext cx="8229600" cy="914400"/>
+            <a:off x="5029200" y="457200"/>
+            <a:ext cx="4572000" cy="5486400"/>
           </a:xfrm>
           <a:prstGeom prst="rect">
             <a:avLst/>
@@ -5799,10 +12672,10 @@
           </a:bodyPr>
           <a:lstStyle/>
           <a:p>
-            <a:pPr algn="ctr">
-              <a:defRPr sz="7200" b="1">
-                <a:solidFill>
-                  <a:srgbClr val="FFFFFF"/>
+            <a:pPr algn="r">
+              <a:defRPr sz="28000" b="1">
+                <a:solidFill>
+                  <a:srgbClr val="1E293B"/>
                 </a:solidFill>
               </a:defRPr>
             </a:pPr>
@@ -5814,14 +12687,57 @@
       </p:sp>
       <p:sp>
         <p:nvSpPr>
-          <p:cNvPr id="4" name="TextBox 3"/>
+          <p:cNvPr id="4" name="Rectangle 3"/>
+          <p:cNvSpPr/>
+          <p:nvPr/>
+        </p:nvSpPr>
+        <p:spPr>
+          <a:xfrm>
+            <a:off x="731520" y="2926080"/>
+            <a:ext cx="731520" cy="54864"/>
+          </a:xfrm>
+          <a:prstGeom prst="rect">
+            <a:avLst/>
+          </a:prstGeom>
+          <a:solidFill>
+            <a:srgbClr val="14B8A6"/>
+          </a:solidFill>
+          <a:ln>
+            <a:noFill/>
+          </a:ln>
+        </p:spPr>
+        <p:style>
+          <a:lnRef idx="1">
+            <a:schemeClr val="accent1"/>
+          </a:lnRef>
+          <a:fillRef idx="3">
+            <a:schemeClr val="accent1"/>
+          </a:fillRef>
+          <a:effectRef idx="2">
+            <a:schemeClr val="accent1"/>
+          </a:effectRef>
+          <a:fontRef idx="minor">
+            <a:schemeClr val="lt1"/>
+          </a:fontRef>
+        </p:style>
+        <p:txBody>
+          <a:bodyPr rtlCol="0" anchor="ctr"/>
+          <a:lstStyle/>
+          <a:p>
+            <a:pPr algn="ctr"/>
+          </a:p>
+        </p:txBody>
+      </p:sp>
+      <p:sp>
+        <p:nvSpPr>
+          <p:cNvPr id="5" name="TextBox 4"/>
           <p:cNvSpPr txBox="1"/>
           <p:nvPr/>
         </p:nvSpPr>
         <p:spPr>
           <a:xfrm>
-            <a:off x="457200" y="2926080"/>
-            <a:ext cx="8229600" cy="914400"/>
+            <a:off x="731520" y="2286000"/>
+            <a:ext cx="1828800" cy="548640"/>
           </a:xfrm>
           <a:prstGeom prst="rect">
             <a:avLst/>
@@ -5834,15 +12750,50 @@
           </a:bodyPr>
           <a:lstStyle/>
           <a:p>
-            <a:pPr algn="ctr">
-              <a:defRPr sz="4000">
+            <a:pPr>
+              <a:defRPr sz="1400" b="1">
+                <a:solidFill>
+                  <a:srgbClr val="14B8A6"/>
+                </a:solidFill>
+              </a:defRPr>
+            </a:pPr>
+            <a:r>
+              <a:t>SECTION 04</a:t>
+            </a:r>
+          </a:p>
+        </p:txBody>
+      </p:sp>
+      <p:sp>
+        <p:nvSpPr>
+          <p:cNvPr id="6" name="TextBox 5"/>
+          <p:cNvSpPr txBox="1"/>
+          <p:nvPr/>
+        </p:nvSpPr>
+        <p:spPr>
+          <a:xfrm>
+            <a:off x="731520" y="3200400"/>
+            <a:ext cx="6400800" cy="1097280"/>
+          </a:xfrm>
+          <a:prstGeom prst="rect">
+            <a:avLst/>
+          </a:prstGeom>
+          <a:noFill/>
+        </p:spPr>
+        <p:txBody>
+          <a:bodyPr wrap="none">
+            <a:spAutoFit/>
+          </a:bodyPr>
+          <a:lstStyle/>
+          <a:p>
+            <a:pPr>
+              <a:defRPr sz="4400" b="1">
                 <a:solidFill>
                   <a:srgbClr val="FFFFFF"/>
                 </a:solidFill>
               </a:defRPr>
             </a:pPr>
             <a:r>
-              <a:t>엣지 AI &amp; 온디바이스 AI</a:t>
+              <a:t>엣지 AI</a:t>
             </a:r>
           </a:p>
         </p:txBody>
